--- a/ICCPROFILE_0929.pptx
+++ b/ICCPROFILE_0929.pptx
@@ -5,7 +5,7 @@
     <p:sldMasterId id="2147483658" r:id="rId1"/>
   </p:sldMasterIdLst>
   <p:notesMasterIdLst>
-    <p:notesMasterId r:id="rId14"/>
+    <p:notesMasterId r:id="rId13"/>
   </p:notesMasterIdLst>
   <p:sldIdLst>
     <p:sldId id="277" r:id="rId2"/>
@@ -13,13 +13,12 @@
     <p:sldId id="1938" r:id="rId4"/>
     <p:sldId id="1998" r:id="rId5"/>
     <p:sldId id="2013" r:id="rId6"/>
-    <p:sldId id="2014" r:id="rId7"/>
-    <p:sldId id="2020" r:id="rId8"/>
-    <p:sldId id="2017" r:id="rId9"/>
-    <p:sldId id="2018" r:id="rId10"/>
-    <p:sldId id="2019" r:id="rId11"/>
-    <p:sldId id="2016" r:id="rId12"/>
-    <p:sldId id="286" r:id="rId13"/>
+    <p:sldId id="2019" r:id="rId7"/>
+    <p:sldId id="2016" r:id="rId8"/>
+    <p:sldId id="2021" r:id="rId9"/>
+    <p:sldId id="2022" r:id="rId10"/>
+    <p:sldId id="2020" r:id="rId11"/>
+    <p:sldId id="286" r:id="rId12"/>
   </p:sldIdLst>
   <p:sldSz cx="9906000" cy="6858000" type="A4"/>
   <p:notesSz cx="7315200" cy="9601200"/>
@@ -266,16 +265,20 @@
             <p14:sldId id="1938"/>
             <p14:sldId id="1998"/>
             <p14:sldId id="2013"/>
-            <p14:sldId id="2014"/>
-            <p14:sldId id="2020"/>
-            <p14:sldId id="2017"/>
-            <p14:sldId id="2018"/>
+          </p14:sldIdLst>
+        </p14:section>
+        <p14:section name="DisplayCAL" id="{FA8538CB-EEBB-42F8-BEE8-82DA04CEC9C1}">
+          <p14:sldIdLst>
             <p14:sldId id="2019"/>
             <p14:sldId id="2016"/>
+            <p14:sldId id="2021"/>
+            <p14:sldId id="2022"/>
           </p14:sldIdLst>
         </p14:section>
-        <p14:section name="未來方向" id="{5971402B-6926-431D-89B8-CB51A2DAAEFC}">
-          <p14:sldIdLst/>
+        <p14:section name="下次進度" id="{5971402B-6926-431D-89B8-CB51A2DAAEFC}">
+          <p14:sldIdLst>
+            <p14:sldId id="2020"/>
+          </p14:sldIdLst>
         </p14:section>
         <p14:section name="End" id="{33EEDC85-A799-4CB3-BF13-F4955B8630BE}">
           <p14:sldIdLst>
@@ -1750,7 +1753,7 @@
     </p:spTree>
     <p:extLst>
       <p:ext uri="{BB962C8B-B14F-4D97-AF65-F5344CB8AC3E}">
-        <p14:creationId xmlns:p14="http://schemas.microsoft.com/office/powerpoint/2010/main" val="1895177803"/>
+        <p14:creationId xmlns:p14="http://schemas.microsoft.com/office/powerpoint/2010/main" val="177420443"/>
       </p:ext>
     </p:extLst>
   </p:cSld>
@@ -1761,140 +1764,6 @@
 </file>
 
 <file path=ppt/notesSlides/notesSlide11.xml><?xml version="1.0" encoding="utf-8"?>
-<p:notes xmlns:a="http://schemas.openxmlformats.org/drawingml/2006/main" xmlns:r="http://schemas.openxmlformats.org/officeDocument/2006/relationships" xmlns:p="http://schemas.openxmlformats.org/presentationml/2006/main">
-  <p:cSld>
-    <p:spTree>
-      <p:nvGrpSpPr>
-        <p:cNvPr id="1" name="">
-          <a:extLst>
-            <a:ext uri="{FF2B5EF4-FFF2-40B4-BE49-F238E27FC236}">
-              <a16:creationId xmlns:a16="http://schemas.microsoft.com/office/drawing/2014/main" id="{9A851A70-D7FF-B69E-2F1F-5276D7F44C59}"/>
-            </a:ext>
-          </a:extLst>
-        </p:cNvPr>
-        <p:cNvGrpSpPr/>
-        <p:nvPr/>
-      </p:nvGrpSpPr>
-      <p:grpSpPr>
-        <a:xfrm>
-          <a:off x="0" y="0"/>
-          <a:ext cx="0" cy="0"/>
-          <a:chOff x="0" y="0"/>
-          <a:chExt cx="0" cy="0"/>
-        </a:xfrm>
-      </p:grpSpPr>
-      <p:sp>
-        <p:nvSpPr>
-          <p:cNvPr id="2" name="投影片影像版面配置區 1">
-            <a:extLst>
-              <a:ext uri="{FF2B5EF4-FFF2-40B4-BE49-F238E27FC236}">
-                <a16:creationId xmlns:a16="http://schemas.microsoft.com/office/drawing/2014/main" id="{4FB2E1DE-40DE-B1BA-7135-64BFFB1631B9}"/>
-              </a:ext>
-            </a:extLst>
-          </p:cNvPr>
-          <p:cNvSpPr>
-            <a:spLocks noGrp="1" noRot="1" noChangeAspect="1"/>
-          </p:cNvSpPr>
-          <p:nvPr>
-            <p:ph type="sldImg"/>
-          </p:nvPr>
-        </p:nvSpPr>
-        <p:spPr/>
-      </p:sp>
-      <p:sp>
-        <p:nvSpPr>
-          <p:cNvPr id="3" name="備忘稿版面配置區 2">
-            <a:extLst>
-              <a:ext uri="{FF2B5EF4-FFF2-40B4-BE49-F238E27FC236}">
-                <a16:creationId xmlns:a16="http://schemas.microsoft.com/office/drawing/2014/main" id="{C4F8DB8E-F5F1-21EB-D41F-2C635FB715D5}"/>
-              </a:ext>
-            </a:extLst>
-          </p:cNvPr>
-          <p:cNvSpPr>
-            <a:spLocks noGrp="1"/>
-          </p:cNvSpPr>
-          <p:nvPr>
-            <p:ph type="body" idx="1"/>
-          </p:nvPr>
-        </p:nvSpPr>
-        <p:spPr/>
-        <p:txBody>
-          <a:bodyPr/>
-          <a:lstStyle/>
-          <a:p>
-            <a:pPr marL="0" indent="0"/>
-            <a:endParaRPr lang="zh-TW" altLang="en-US" dirty="0"/>
-          </a:p>
-        </p:txBody>
-      </p:sp>
-      <p:sp>
-        <p:nvSpPr>
-          <p:cNvPr id="4" name="投影片編號版面配置區 3">
-            <a:extLst>
-              <a:ext uri="{FF2B5EF4-FFF2-40B4-BE49-F238E27FC236}">
-                <a16:creationId xmlns:a16="http://schemas.microsoft.com/office/drawing/2014/main" id="{A81AD260-1FA1-46D2-EEFC-6CE390861C06}"/>
-              </a:ext>
-            </a:extLst>
-          </p:cNvPr>
-          <p:cNvSpPr>
-            <a:spLocks noGrp="1"/>
-          </p:cNvSpPr>
-          <p:nvPr>
-            <p:ph type="sldNum" idx="12"/>
-          </p:nvPr>
-        </p:nvSpPr>
-        <p:spPr/>
-        <p:txBody>
-          <a:bodyPr/>
-          <a:lstStyle/>
-          <a:p>
-            <a:pPr marL="0" marR="0" lvl="0" indent="0" algn="r" rtl="0">
-              <a:spcBef>
-                <a:spcPts val="0"/>
-              </a:spcBef>
-              <a:spcAft>
-                <a:spcPts val="0"/>
-              </a:spcAft>
-              <a:buNone/>
-            </a:pPr>
-            <a:fld id="{00000000-1234-1234-1234-123412341234}" type="slidenum">
-              <a:rPr lang="en-US" sz="2000" b="0" i="0" u="none" strike="noStrike" cap="none" smtClean="0">
-                <a:solidFill>
-                  <a:schemeClr val="dk1"/>
-                </a:solidFill>
-                <a:latin typeface="Times New Roman"/>
-                <a:ea typeface="Times New Roman"/>
-                <a:cs typeface="Times New Roman"/>
-                <a:sym typeface="Times New Roman"/>
-              </a:rPr>
-              <a:t>11</a:t>
-            </a:fld>
-            <a:endParaRPr lang="en-US" sz="2000" b="0" i="0" u="none" strike="noStrike" cap="none" dirty="0">
-              <a:solidFill>
-                <a:schemeClr val="dk1"/>
-              </a:solidFill>
-              <a:latin typeface="Times New Roman"/>
-              <a:ea typeface="Times New Roman"/>
-              <a:cs typeface="Times New Roman"/>
-              <a:sym typeface="Times New Roman"/>
-            </a:endParaRPr>
-          </a:p>
-        </p:txBody>
-      </p:sp>
-    </p:spTree>
-    <p:extLst>
-      <p:ext uri="{BB962C8B-B14F-4D97-AF65-F5344CB8AC3E}">
-        <p14:creationId xmlns:p14="http://schemas.microsoft.com/office/powerpoint/2010/main" val="1887491475"/>
-      </p:ext>
-    </p:extLst>
-  </p:cSld>
-  <p:clrMapOvr>
-    <a:masterClrMapping/>
-  </p:clrMapOvr>
-</p:notes>
-</file>
-
-<file path=ppt/notesSlides/notesSlide12.xml><?xml version="1.0" encoding="utf-8"?>
 <p:notes xmlns:a="http://schemas.openxmlformats.org/drawingml/2006/main" xmlns:r="http://schemas.openxmlformats.org/officeDocument/2006/relationships" xmlns:p="http://schemas.openxmlformats.org/presentationml/2006/main">
   <p:cSld>
     <p:spTree>
@@ -1962,7 +1831,7 @@
           <a:p>
             <a:fld id="{F5753A29-9D77-4C26-8BEC-432FE5D4B0A4}" type="slidenum">
               <a:rPr lang="en-US" altLang="zh-TW" smtClean="0"/>
-              <a:t>12</a:t>
+              <a:t>11</a:t>
             </a:fld>
             <a:endParaRPr lang="en-US" altLang="zh-TW" dirty="0"/>
           </a:p>
@@ -2684,35 +2553,7 @@
           <a:lstStyle/>
           <a:p>
             <a:pPr marL="0" indent="0"/>
-            <a:r>
-              <a:rPr lang="zh-TW" altLang="en-US" dirty="0"/>
-              <a:t>這邊確認</a:t>
-            </a:r>
-            <a:r>
-              <a:rPr lang="en-US" altLang="zh-TW" dirty="0" err="1"/>
-              <a:t>DisplayCAL</a:t>
-            </a:r>
-            <a:r>
-              <a:rPr lang="zh-TW" altLang="en-US" dirty="0"/>
-              <a:t>具備</a:t>
-            </a:r>
-            <a:r>
-              <a:rPr lang="en-US" altLang="zh-TW" dirty="0"/>
-              <a:t>ICC</a:t>
-            </a:r>
-            <a:r>
-              <a:rPr lang="zh-TW" altLang="en-US" dirty="0"/>
-              <a:t> </a:t>
-            </a:r>
-            <a:r>
-              <a:rPr lang="en-US" altLang="zh-TW" dirty="0" err="1"/>
-              <a:t>Prpfile</a:t>
-            </a:r>
-            <a:r>
-              <a:rPr lang="zh-TW" altLang="en-US" dirty="0"/>
-              <a:t>的資料查看功能</a:t>
-            </a:r>
-            <a:endParaRPr lang="en-US" altLang="zh-TW" dirty="0"/>
+            <a:endParaRPr lang="zh-TW" altLang="en-US" dirty="0"/>
           </a:p>
         </p:txBody>
       </p:sp>
@@ -2773,7 +2614,7 @@
     </p:spTree>
     <p:extLst>
       <p:ext uri="{BB962C8B-B14F-4D97-AF65-F5344CB8AC3E}">
-        <p14:creationId xmlns:p14="http://schemas.microsoft.com/office/powerpoint/2010/main" val="2995651230"/>
+        <p14:creationId xmlns:p14="http://schemas.microsoft.com/office/powerpoint/2010/main" val="1895177803"/>
       </p:ext>
     </p:extLst>
   </p:cSld>
@@ -2907,7 +2748,7 @@
     </p:spTree>
     <p:extLst>
       <p:ext uri="{BB962C8B-B14F-4D97-AF65-F5344CB8AC3E}">
-        <p14:creationId xmlns:p14="http://schemas.microsoft.com/office/powerpoint/2010/main" val="529593261"/>
+        <p14:creationId xmlns:p14="http://schemas.microsoft.com/office/powerpoint/2010/main" val="1887491475"/>
       </p:ext>
     </p:extLst>
   </p:cSld>
@@ -3041,7 +2882,7 @@
     </p:spTree>
     <p:extLst>
       <p:ext uri="{BB962C8B-B14F-4D97-AF65-F5344CB8AC3E}">
-        <p14:creationId xmlns:p14="http://schemas.microsoft.com/office/powerpoint/2010/main" val="3805465276"/>
+        <p14:creationId xmlns:p14="http://schemas.microsoft.com/office/powerpoint/2010/main" val="904068324"/>
       </p:ext>
     </p:extLst>
   </p:cSld>
@@ -3114,46 +2955,6 @@
           <a:lstStyle/>
           <a:p>
             <a:pPr marL="0" indent="0"/>
-            <a:r>
-              <a:rPr lang="zh-TW" altLang="en-US" dirty="0"/>
-              <a:t>沒有</a:t>
-            </a:r>
-            <a:r>
-              <a:rPr lang="en-US" altLang="zh-TW" dirty="0" err="1"/>
-              <a:t>vcgt</a:t>
-            </a:r>
-            <a:r>
-              <a:rPr lang="zh-TW" altLang="en-US" dirty="0"/>
-              <a:t>、</a:t>
-            </a:r>
-            <a:r>
-              <a:rPr lang="en-US" altLang="zh-TW" dirty="0"/>
-              <a:t>MS00</a:t>
-            </a:r>
-            <a:r>
-              <a:rPr lang="zh-TW" altLang="en-US" dirty="0"/>
-              <a:t>、</a:t>
-            </a:r>
-            <a:r>
-              <a:rPr lang="en-US" altLang="zh-TW" dirty="0"/>
-              <a:t>MCH2</a:t>
-            </a:r>
-            <a:r>
-              <a:rPr lang="zh-TW" altLang="en-US" dirty="0"/>
-              <a:t>等</a:t>
-            </a:r>
-            <a:r>
-              <a:rPr lang="en-US" altLang="zh-TW" dirty="0"/>
-              <a:t>tag</a:t>
-            </a:r>
-            <a:r>
-              <a:rPr lang="zh-TW" altLang="en-US" dirty="0"/>
-              <a:t>，所以他這只能生成純粹色彩描述檔的</a:t>
-            </a:r>
-            <a:r>
-              <a:rPr lang="en-US" altLang="zh-TW" dirty="0"/>
-              <a:t>ICC Profile</a:t>
-            </a:r>
             <a:endParaRPr lang="zh-TW" altLang="en-US" dirty="0"/>
           </a:p>
         </p:txBody>
@@ -3215,7 +3016,7 @@
     </p:spTree>
     <p:extLst>
       <p:ext uri="{BB962C8B-B14F-4D97-AF65-F5344CB8AC3E}">
-        <p14:creationId xmlns:p14="http://schemas.microsoft.com/office/powerpoint/2010/main" val="3917064610"/>
+        <p14:creationId xmlns:p14="http://schemas.microsoft.com/office/powerpoint/2010/main" val="2337433047"/>
       </p:ext>
     </p:extLst>
   </p:cSld>
@@ -8260,142 +8061,7 @@
                 <a:ea typeface="標楷體" panose="03000509000000000000" pitchFamily="65" charset="-120"/>
                 <a:cs typeface="Times New Roman" panose="02020603050405020304" pitchFamily="18" charset="0"/>
               </a:rPr>
-              <a:t>本次進度</a:t>
-            </a:r>
-            <a:r>
-              <a:rPr lang="en-US" altLang="zh-TW" dirty="0">
-                <a:latin typeface="Times New Roman" panose="02020603050405020304" pitchFamily="18" charset="0"/>
-                <a:ea typeface="標楷體" panose="03000509000000000000" pitchFamily="65" charset="-120"/>
-                <a:cs typeface="Times New Roman" panose="02020603050405020304" pitchFamily="18" charset="0"/>
-              </a:rPr>
-              <a:t>:</a:t>
-            </a:r>
-            <a:r>
-              <a:rPr lang="zh-TW" altLang="en-US" dirty="0">
-                <a:latin typeface="Times New Roman" panose="02020603050405020304" pitchFamily="18" charset="0"/>
-                <a:ea typeface="標楷體" panose="03000509000000000000" pitchFamily="65" charset="-120"/>
-                <a:cs typeface="Times New Roman" panose="02020603050405020304" pitchFamily="18" charset="0"/>
-              </a:rPr>
-              <a:t> </a:t>
-            </a:r>
-            <a:r>
-              <a:rPr lang="en-US" altLang="zh-TW" dirty="0" err="1">
-                <a:latin typeface="Times New Roman" panose="02020603050405020304" pitchFamily="18" charset="0"/>
-                <a:ea typeface="標楷體" panose="03000509000000000000" pitchFamily="65" charset="-120"/>
-                <a:cs typeface="Times New Roman" panose="02020603050405020304" pitchFamily="18" charset="0"/>
-              </a:rPr>
-              <a:t>DisplayCAL</a:t>
-            </a:r>
-            <a:endParaRPr lang="zh-TW" altLang="en-US" dirty="0">
-              <a:latin typeface="Times New Roman" panose="02020603050405020304" pitchFamily="18" charset="0"/>
-              <a:ea typeface="標楷體" panose="03000509000000000000" pitchFamily="65" charset="-120"/>
-              <a:cs typeface="Times New Roman" panose="02020603050405020304" pitchFamily="18" charset="0"/>
-            </a:endParaRPr>
-          </a:p>
-        </p:txBody>
-      </p:sp>
-      <p:pic>
-        <p:nvPicPr>
-          <p:cNvPr id="5" name="圖片 4">
-            <a:extLst>
-              <a:ext uri="{FF2B5EF4-FFF2-40B4-BE49-F238E27FC236}">
-                <a16:creationId xmlns:a16="http://schemas.microsoft.com/office/drawing/2014/main" id="{AEF40E0A-D220-62E9-2407-BDEBBBC48F41}"/>
-              </a:ext>
-            </a:extLst>
-          </p:cNvPr>
-          <p:cNvPicPr>
-            <a:picLocks noChangeAspect="1"/>
-          </p:cNvPicPr>
-          <p:nvPr/>
-        </p:nvPicPr>
-        <p:blipFill>
-          <a:blip r:embed="rId3"/>
-          <a:stretch>
-            <a:fillRect/>
-          </a:stretch>
-        </p:blipFill>
-        <p:spPr>
-          <a:xfrm>
-            <a:off x="1219198" y="1058334"/>
-            <a:ext cx="7471292" cy="5272726"/>
-          </a:xfrm>
-          <a:prstGeom prst="rect">
-            <a:avLst/>
-          </a:prstGeom>
-        </p:spPr>
-      </p:pic>
-    </p:spTree>
-    <p:extLst>
-      <p:ext uri="{BB962C8B-B14F-4D97-AF65-F5344CB8AC3E}">
-        <p14:creationId xmlns:p14="http://schemas.microsoft.com/office/powerpoint/2010/main" val="1488158986"/>
-      </p:ext>
-    </p:extLst>
-  </p:cSld>
-  <p:clrMapOvr>
-    <a:masterClrMapping/>
-  </p:clrMapOvr>
-</p:sld>
-</file>
-
-<file path=ppt/slides/slide11.xml><?xml version="1.0" encoding="utf-8"?>
-<p:sld xmlns:a="http://schemas.openxmlformats.org/drawingml/2006/main" xmlns:r="http://schemas.openxmlformats.org/officeDocument/2006/relationships" xmlns:p="http://schemas.openxmlformats.org/presentationml/2006/main">
-  <p:cSld>
-    <p:spTree>
-      <p:nvGrpSpPr>
-        <p:cNvPr id="1" name="">
-          <a:extLst>
-            <a:ext uri="{FF2B5EF4-FFF2-40B4-BE49-F238E27FC236}">
-              <a16:creationId xmlns:a16="http://schemas.microsoft.com/office/drawing/2014/main" id="{C25E9AAA-7E36-1E17-83F9-FD3A18A28BE9}"/>
-            </a:ext>
-          </a:extLst>
-        </p:cNvPr>
-        <p:cNvGrpSpPr/>
-        <p:nvPr/>
-      </p:nvGrpSpPr>
-      <p:grpSpPr>
-        <a:xfrm>
-          <a:off x="0" y="0"/>
-          <a:ext cx="0" cy="0"/>
-          <a:chOff x="0" y="0"/>
-          <a:chExt cx="0" cy="0"/>
-        </a:xfrm>
-      </p:grpSpPr>
-      <p:sp>
-        <p:nvSpPr>
-          <p:cNvPr id="15" name="標題 1">
-            <a:extLst>
-              <a:ext uri="{FF2B5EF4-FFF2-40B4-BE49-F238E27FC236}">
-                <a16:creationId xmlns:a16="http://schemas.microsoft.com/office/drawing/2014/main" id="{142C8726-E890-9988-40FC-8984FDA21FEE}"/>
-              </a:ext>
-            </a:extLst>
-          </p:cNvPr>
-          <p:cNvSpPr>
-            <a:spLocks noGrp="1"/>
-          </p:cNvSpPr>
-          <p:nvPr>
-            <p:ph type="title"/>
-          </p:nvPr>
-        </p:nvSpPr>
-        <p:spPr>
-          <a:xfrm>
-            <a:off x="609602" y="609600"/>
-            <a:ext cx="8077200" cy="533400"/>
-          </a:xfrm>
-          <a:ln>
-            <a:noFill/>
-          </a:ln>
-        </p:spPr>
-        <p:txBody>
-          <a:bodyPr/>
-          <a:lstStyle/>
-          <a:p>
-            <a:r>
-              <a:rPr lang="zh-TW" altLang="en-US" dirty="0">
-                <a:latin typeface="Times New Roman" panose="02020603050405020304" pitchFamily="18" charset="0"/>
-                <a:ea typeface="標楷體" panose="03000509000000000000" pitchFamily="65" charset="-120"/>
-                <a:cs typeface="Times New Roman" panose="02020603050405020304" pitchFamily="18" charset="0"/>
-              </a:rPr>
-              <a:t>本次進度</a:t>
+              <a:t>下次進度</a:t>
             </a:r>
             <a:r>
               <a:rPr lang="en-US" altLang="zh-TW" dirty="0">
@@ -8416,10 +8082,593 @@
           </a:p>
         </p:txBody>
       </p:sp>
+      <p:sp>
+        <p:nvSpPr>
+          <p:cNvPr id="6" name="文字版面配置區 6">
+            <a:extLst>
+              <a:ext uri="{FF2B5EF4-FFF2-40B4-BE49-F238E27FC236}">
+                <a16:creationId xmlns:a16="http://schemas.microsoft.com/office/drawing/2014/main" id="{ADB01919-7694-3665-C9C6-6D8F975ED431}"/>
+              </a:ext>
+            </a:extLst>
+          </p:cNvPr>
+          <p:cNvSpPr txBox="1"/>
+          <p:nvPr/>
+        </p:nvSpPr>
+        <p:spPr>
+          <a:xfrm>
+            <a:off x="609602" y="935857"/>
+            <a:ext cx="8686796" cy="4700685"/>
+          </a:xfrm>
+          <a:prstGeom prst="rect">
+            <a:avLst/>
+          </a:prstGeom>
+          <a:noFill/>
+          <a:ln>
+            <a:noFill/>
+          </a:ln>
+        </p:spPr>
+        <p:txBody>
+          <a:bodyPr spcFirstLastPara="1" wrap="square" lIns="91425" tIns="45700" rIns="91425" bIns="45700" anchor="t" anchorCtr="0">
+            <a:noAutofit/>
+          </a:bodyPr>
+          <a:lstStyle>
+            <a:defPPr marR="0" lvl="0" algn="l" rtl="0">
+              <a:lnSpc>
+                <a:spcPct val="100000"/>
+              </a:lnSpc>
+              <a:spcBef>
+                <a:spcPts val="0"/>
+              </a:spcBef>
+              <a:spcAft>
+                <a:spcPts val="0"/>
+              </a:spcAft>
+            </a:defPPr>
+            <a:lvl1pPr marL="457200" marR="0" lvl="0" indent="-406400" algn="l" rtl="0">
+              <a:lnSpc>
+                <a:spcPct val="100000"/>
+              </a:lnSpc>
+              <a:spcBef>
+                <a:spcPts val="560"/>
+              </a:spcBef>
+              <a:spcAft>
+                <a:spcPts val="0"/>
+              </a:spcAft>
+              <a:buClr>
+                <a:schemeClr val="accent2"/>
+              </a:buClr>
+              <a:buSzPts val="2800"/>
+              <a:buFont typeface="Noto Sans Symbols"/>
+              <a:buChar char="❖"/>
+              <a:defRPr sz="2800" b="0" i="0" u="none" strike="noStrike" cap="none">
+                <a:solidFill>
+                  <a:schemeClr val="dk1"/>
+                </a:solidFill>
+                <a:latin typeface="Times New Roman"/>
+                <a:ea typeface="Times New Roman"/>
+                <a:cs typeface="Times New Roman"/>
+                <a:sym typeface="Times New Roman"/>
+              </a:defRPr>
+            </a:lvl1pPr>
+            <a:lvl2pPr marL="914400" marR="0" lvl="1" indent="-381000" algn="l" rtl="0">
+              <a:lnSpc>
+                <a:spcPct val="100000"/>
+              </a:lnSpc>
+              <a:spcBef>
+                <a:spcPts val="480"/>
+              </a:spcBef>
+              <a:spcAft>
+                <a:spcPts val="0"/>
+              </a:spcAft>
+              <a:buClr>
+                <a:srgbClr val="FF5050"/>
+              </a:buClr>
+              <a:buSzPts val="2400"/>
+              <a:buFont typeface="Noto Sans Symbols"/>
+              <a:buChar char="▪"/>
+              <a:defRPr sz="2400" b="0" i="0" u="none" strike="noStrike" cap="none">
+                <a:solidFill>
+                  <a:schemeClr val="dk1"/>
+                </a:solidFill>
+                <a:latin typeface="Times New Roman"/>
+                <a:ea typeface="Times New Roman"/>
+                <a:cs typeface="Times New Roman"/>
+                <a:sym typeface="Times New Roman"/>
+              </a:defRPr>
+            </a:lvl2pPr>
+            <a:lvl3pPr marL="1371600" marR="0" lvl="2" indent="-355600" algn="l" rtl="0">
+              <a:lnSpc>
+                <a:spcPct val="100000"/>
+              </a:lnSpc>
+              <a:spcBef>
+                <a:spcPts val="400"/>
+              </a:spcBef>
+              <a:spcAft>
+                <a:spcPts val="0"/>
+              </a:spcAft>
+              <a:buClr>
+                <a:srgbClr val="6699FF"/>
+              </a:buClr>
+              <a:buSzPts val="2000"/>
+              <a:buFont typeface="Times New Roman"/>
+              <a:buChar char="•"/>
+              <a:defRPr sz="2000" b="0" i="0" u="none" strike="noStrike" cap="none">
+                <a:solidFill>
+                  <a:schemeClr val="dk1"/>
+                </a:solidFill>
+                <a:latin typeface="Times New Roman"/>
+                <a:ea typeface="Times New Roman"/>
+                <a:cs typeface="Times New Roman"/>
+                <a:sym typeface="Times New Roman"/>
+              </a:defRPr>
+            </a:lvl3pPr>
+            <a:lvl4pPr marL="1828800" marR="0" lvl="3" indent="-355600" algn="l" rtl="0">
+              <a:lnSpc>
+                <a:spcPct val="100000"/>
+              </a:lnSpc>
+              <a:spcBef>
+                <a:spcPts val="400"/>
+              </a:spcBef>
+              <a:spcAft>
+                <a:spcPts val="0"/>
+              </a:spcAft>
+              <a:buClr>
+                <a:srgbClr val="FF5050"/>
+              </a:buClr>
+              <a:buSzPts val="2000"/>
+              <a:buFont typeface="Times New Roman"/>
+              <a:buChar char="o"/>
+              <a:defRPr sz="2000" b="0" i="0" u="none" strike="noStrike" cap="none">
+                <a:solidFill>
+                  <a:schemeClr val="dk1"/>
+                </a:solidFill>
+                <a:latin typeface="Times New Roman"/>
+                <a:ea typeface="Times New Roman"/>
+                <a:cs typeface="Times New Roman"/>
+                <a:sym typeface="Times New Roman"/>
+              </a:defRPr>
+            </a:lvl4pPr>
+            <a:lvl5pPr marL="2286000" marR="0" lvl="4" indent="-355600" algn="l" rtl="0">
+              <a:lnSpc>
+                <a:spcPct val="100000"/>
+              </a:lnSpc>
+              <a:spcBef>
+                <a:spcPts val="400"/>
+              </a:spcBef>
+              <a:spcAft>
+                <a:spcPts val="0"/>
+              </a:spcAft>
+              <a:buClr>
+                <a:srgbClr val="FF5050"/>
+              </a:buClr>
+              <a:buSzPts val="2000"/>
+              <a:buFont typeface="Times New Roman"/>
+              <a:buChar char="o"/>
+              <a:defRPr sz="2000" b="0" i="0" u="none" strike="noStrike" cap="none">
+                <a:solidFill>
+                  <a:schemeClr val="dk1"/>
+                </a:solidFill>
+                <a:latin typeface="Times New Roman"/>
+                <a:ea typeface="Times New Roman"/>
+                <a:cs typeface="Times New Roman"/>
+                <a:sym typeface="Times New Roman"/>
+              </a:defRPr>
+            </a:lvl5pPr>
+            <a:lvl6pPr marL="2743200" marR="0" lvl="5" indent="-355600" algn="l" rtl="0">
+              <a:lnSpc>
+                <a:spcPct val="100000"/>
+              </a:lnSpc>
+              <a:spcBef>
+                <a:spcPts val="400"/>
+              </a:spcBef>
+              <a:spcAft>
+                <a:spcPts val="0"/>
+              </a:spcAft>
+              <a:buClr>
+                <a:srgbClr val="FF5050"/>
+              </a:buClr>
+              <a:buSzPts val="2000"/>
+              <a:buFont typeface="Times New Roman"/>
+              <a:buChar char="o"/>
+              <a:defRPr sz="2000" b="0" i="0" u="none" strike="noStrike" cap="none">
+                <a:solidFill>
+                  <a:schemeClr val="dk1"/>
+                </a:solidFill>
+                <a:latin typeface="Times New Roman"/>
+                <a:ea typeface="Times New Roman"/>
+                <a:cs typeface="Times New Roman"/>
+                <a:sym typeface="Times New Roman"/>
+              </a:defRPr>
+            </a:lvl6pPr>
+            <a:lvl7pPr marL="3200400" marR="0" lvl="6" indent="-355600" algn="l" rtl="0">
+              <a:lnSpc>
+                <a:spcPct val="100000"/>
+              </a:lnSpc>
+              <a:spcBef>
+                <a:spcPts val="400"/>
+              </a:spcBef>
+              <a:spcAft>
+                <a:spcPts val="0"/>
+              </a:spcAft>
+              <a:buClr>
+                <a:srgbClr val="FF5050"/>
+              </a:buClr>
+              <a:buSzPts val="2000"/>
+              <a:buFont typeface="Times New Roman"/>
+              <a:buChar char="o"/>
+              <a:defRPr sz="2000" b="0" i="0" u="none" strike="noStrike" cap="none">
+                <a:solidFill>
+                  <a:schemeClr val="dk1"/>
+                </a:solidFill>
+                <a:latin typeface="Times New Roman"/>
+                <a:ea typeface="Times New Roman"/>
+                <a:cs typeface="Times New Roman"/>
+                <a:sym typeface="Times New Roman"/>
+              </a:defRPr>
+            </a:lvl7pPr>
+            <a:lvl8pPr marL="3657600" marR="0" lvl="7" indent="-355600" algn="l" rtl="0">
+              <a:lnSpc>
+                <a:spcPct val="100000"/>
+              </a:lnSpc>
+              <a:spcBef>
+                <a:spcPts val="400"/>
+              </a:spcBef>
+              <a:spcAft>
+                <a:spcPts val="0"/>
+              </a:spcAft>
+              <a:buClr>
+                <a:srgbClr val="FF5050"/>
+              </a:buClr>
+              <a:buSzPts val="2000"/>
+              <a:buFont typeface="Times New Roman"/>
+              <a:buChar char="o"/>
+              <a:defRPr sz="2000" b="0" i="0" u="none" strike="noStrike" cap="none">
+                <a:solidFill>
+                  <a:schemeClr val="dk1"/>
+                </a:solidFill>
+                <a:latin typeface="Times New Roman"/>
+                <a:ea typeface="Times New Roman"/>
+                <a:cs typeface="Times New Roman"/>
+                <a:sym typeface="Times New Roman"/>
+              </a:defRPr>
+            </a:lvl8pPr>
+            <a:lvl9pPr marL="4114800" marR="0" lvl="8" indent="-355600" algn="l" rtl="0">
+              <a:lnSpc>
+                <a:spcPct val="100000"/>
+              </a:lnSpc>
+              <a:spcBef>
+                <a:spcPts val="400"/>
+              </a:spcBef>
+              <a:spcAft>
+                <a:spcPts val="0"/>
+              </a:spcAft>
+              <a:buClr>
+                <a:srgbClr val="FF5050"/>
+              </a:buClr>
+              <a:buSzPts val="2000"/>
+              <a:buFont typeface="Times New Roman"/>
+              <a:buChar char="o"/>
+              <a:defRPr sz="2000" b="0" i="0" u="none" strike="noStrike" cap="none">
+                <a:solidFill>
+                  <a:schemeClr val="dk1"/>
+                </a:solidFill>
+                <a:latin typeface="Times New Roman"/>
+                <a:ea typeface="Times New Roman"/>
+                <a:cs typeface="Times New Roman"/>
+                <a:sym typeface="Times New Roman"/>
+              </a:defRPr>
+            </a:lvl9pPr>
+          </a:lstStyle>
+          <a:p>
+            <a:pPr>
+              <a:lnSpc>
+                <a:spcPct val="150000"/>
+              </a:lnSpc>
+            </a:pPr>
+            <a:r>
+              <a:rPr lang="en-US" altLang="zh-TW" sz="2000" dirty="0">
+                <a:solidFill>
+                  <a:schemeClr val="tx1"/>
+                </a:solidFill>
+                <a:latin typeface="Times New Roman" panose="02020603050405020304" pitchFamily="18" charset="0"/>
+                <a:ea typeface="標楷體" panose="03000509000000000000" pitchFamily="65" charset="-120"/>
+                <a:cs typeface="Times New Roman" panose="02020603050405020304" pitchFamily="18" charset="0"/>
+              </a:rPr>
+              <a:t>ICC </a:t>
+            </a:r>
+            <a:r>
+              <a:rPr lang="en-US" altLang="zh-TW" sz="2000" dirty="0" err="1">
+                <a:solidFill>
+                  <a:schemeClr val="tx1"/>
+                </a:solidFill>
+                <a:latin typeface="Times New Roman" panose="02020603050405020304" pitchFamily="18" charset="0"/>
+                <a:ea typeface="標楷體" panose="03000509000000000000" pitchFamily="65" charset="-120"/>
+                <a:cs typeface="Times New Roman" panose="02020603050405020304" pitchFamily="18" charset="0"/>
+              </a:rPr>
+              <a:t>Profiole</a:t>
+            </a:r>
+            <a:r>
+              <a:rPr lang="en-US" altLang="zh-TW" sz="2000" dirty="0">
+                <a:solidFill>
+                  <a:schemeClr val="tx1"/>
+                </a:solidFill>
+                <a:latin typeface="Times New Roman" panose="02020603050405020304" pitchFamily="18" charset="0"/>
+                <a:ea typeface="標楷體" panose="03000509000000000000" pitchFamily="65" charset="-120"/>
+                <a:cs typeface="Times New Roman" panose="02020603050405020304" pitchFamily="18" charset="0"/>
+              </a:rPr>
+              <a:t> Gamma</a:t>
+            </a:r>
+            <a:r>
+              <a:rPr lang="zh-TW" altLang="en-US" sz="2000" dirty="0">
+                <a:solidFill>
+                  <a:schemeClr val="tx1"/>
+                </a:solidFill>
+                <a:latin typeface="Times New Roman" panose="02020603050405020304" pitchFamily="18" charset="0"/>
+                <a:ea typeface="標楷體" panose="03000509000000000000" pitchFamily="65" charset="-120"/>
+                <a:cs typeface="Times New Roman" panose="02020603050405020304" pitchFamily="18" charset="0"/>
+              </a:rPr>
+              <a:t> 與校正曲線量測</a:t>
+            </a:r>
+            <a:endParaRPr lang="en-US" altLang="zh-TW" sz="2000" dirty="0">
+              <a:solidFill>
+                <a:schemeClr val="tx1"/>
+              </a:solidFill>
+              <a:latin typeface="Times New Roman" panose="02020603050405020304" pitchFamily="18" charset="0"/>
+              <a:ea typeface="標楷體" panose="03000509000000000000" pitchFamily="65" charset="-120"/>
+              <a:cs typeface="Times New Roman" panose="02020603050405020304" pitchFamily="18" charset="0"/>
+            </a:endParaRPr>
+          </a:p>
+          <a:p>
+            <a:pPr lvl="1">
+              <a:lnSpc>
+                <a:spcPts val="3000"/>
+              </a:lnSpc>
+            </a:pPr>
+            <a:r>
+              <a:rPr lang="zh-TW" altLang="en-US" sz="1600" dirty="0">
+                <a:solidFill>
+                  <a:schemeClr val="tx1"/>
+                </a:solidFill>
+                <a:latin typeface="Times New Roman" panose="02020603050405020304" pitchFamily="18" charset="0"/>
+                <a:ea typeface="標楷體" panose="03000509000000000000" pitchFamily="65" charset="-120"/>
+                <a:cs typeface="Times New Roman" panose="02020603050405020304" pitchFamily="18" charset="0"/>
+              </a:rPr>
+              <a:t>測試項目</a:t>
+            </a:r>
+            <a:r>
+              <a:rPr lang="en-US" altLang="zh-TW" sz="1600" dirty="0">
+                <a:solidFill>
+                  <a:schemeClr val="tx1"/>
+                </a:solidFill>
+                <a:latin typeface="Times New Roman" panose="02020603050405020304" pitchFamily="18" charset="0"/>
+                <a:ea typeface="標楷體" panose="03000509000000000000" pitchFamily="65" charset="-120"/>
+                <a:cs typeface="Times New Roman" panose="02020603050405020304" pitchFamily="18" charset="0"/>
+              </a:rPr>
+              <a:t>:</a:t>
+            </a:r>
+            <a:r>
+              <a:rPr lang="zh-TW" altLang="en-US" sz="1600" dirty="0">
+                <a:solidFill>
+                  <a:schemeClr val="tx1"/>
+                </a:solidFill>
+                <a:latin typeface="Times New Roman" panose="02020603050405020304" pitchFamily="18" charset="0"/>
+                <a:ea typeface="標楷體" panose="03000509000000000000" pitchFamily="65" charset="-120"/>
+                <a:cs typeface="Times New Roman" panose="02020603050405020304" pitchFamily="18" charset="0"/>
+              </a:rPr>
+              <a:t> </a:t>
+            </a:r>
+            <a:r>
+              <a:rPr lang="en-US" altLang="zh-TW" sz="1600" dirty="0">
+                <a:solidFill>
+                  <a:schemeClr val="tx1"/>
+                </a:solidFill>
+                <a:latin typeface="Times New Roman" panose="02020603050405020304" pitchFamily="18" charset="0"/>
+                <a:ea typeface="標楷體" panose="03000509000000000000" pitchFamily="65" charset="-120"/>
+                <a:cs typeface="Times New Roman" panose="02020603050405020304" pitchFamily="18" charset="0"/>
+              </a:rPr>
+              <a:t>Gamma 1.8 </a:t>
+            </a:r>
+            <a:r>
+              <a:rPr lang="zh-TW" altLang="en-US" sz="1600" dirty="0">
+                <a:solidFill>
+                  <a:schemeClr val="tx1"/>
+                </a:solidFill>
+                <a:latin typeface="Times New Roman" panose="02020603050405020304" pitchFamily="18" charset="0"/>
+                <a:ea typeface="標楷體" panose="03000509000000000000" pitchFamily="65" charset="-120"/>
+                <a:cs typeface="Times New Roman" panose="02020603050405020304" pitchFamily="18" charset="0"/>
+              </a:rPr>
+              <a:t>  </a:t>
+            </a:r>
+            <a:r>
+              <a:rPr lang="en-US" altLang="zh-TW" sz="1600" dirty="0">
+                <a:solidFill>
+                  <a:schemeClr val="tx1"/>
+                </a:solidFill>
+                <a:latin typeface="Times New Roman" panose="02020603050405020304" pitchFamily="18" charset="0"/>
+                <a:ea typeface="標楷體" panose="03000509000000000000" pitchFamily="65" charset="-120"/>
+                <a:cs typeface="Times New Roman" panose="02020603050405020304" pitchFamily="18" charset="0"/>
+              </a:rPr>
+              <a:t>2.0 </a:t>
+            </a:r>
+            <a:r>
+              <a:rPr lang="zh-TW" altLang="en-US" sz="1600" dirty="0">
+                <a:solidFill>
+                  <a:schemeClr val="tx1"/>
+                </a:solidFill>
+                <a:latin typeface="Times New Roman" panose="02020603050405020304" pitchFamily="18" charset="0"/>
+                <a:ea typeface="標楷體" panose="03000509000000000000" pitchFamily="65" charset="-120"/>
+                <a:cs typeface="Times New Roman" panose="02020603050405020304" pitchFamily="18" charset="0"/>
+              </a:rPr>
+              <a:t>  </a:t>
+            </a:r>
+            <a:r>
+              <a:rPr lang="en-US" altLang="zh-TW" sz="1600" dirty="0">
+                <a:solidFill>
+                  <a:schemeClr val="tx1"/>
+                </a:solidFill>
+                <a:latin typeface="Times New Roman" panose="02020603050405020304" pitchFamily="18" charset="0"/>
+                <a:ea typeface="標楷體" panose="03000509000000000000" pitchFamily="65" charset="-120"/>
+                <a:cs typeface="Times New Roman" panose="02020603050405020304" pitchFamily="18" charset="0"/>
+              </a:rPr>
+              <a:t>2.2 </a:t>
+            </a:r>
+            <a:r>
+              <a:rPr lang="zh-TW" altLang="en-US" sz="1600" dirty="0">
+                <a:solidFill>
+                  <a:schemeClr val="tx1"/>
+                </a:solidFill>
+                <a:latin typeface="Times New Roman" panose="02020603050405020304" pitchFamily="18" charset="0"/>
+                <a:ea typeface="標楷體" panose="03000509000000000000" pitchFamily="65" charset="-120"/>
+                <a:cs typeface="Times New Roman" panose="02020603050405020304" pitchFamily="18" charset="0"/>
+              </a:rPr>
+              <a:t>  </a:t>
+            </a:r>
+            <a:r>
+              <a:rPr lang="en-US" altLang="zh-TW" sz="1600" dirty="0">
+                <a:solidFill>
+                  <a:schemeClr val="tx1"/>
+                </a:solidFill>
+                <a:latin typeface="Times New Roman" panose="02020603050405020304" pitchFamily="18" charset="0"/>
+                <a:ea typeface="標楷體" panose="03000509000000000000" pitchFamily="65" charset="-120"/>
+                <a:cs typeface="Times New Roman" panose="02020603050405020304" pitchFamily="18" charset="0"/>
+              </a:rPr>
+              <a:t>2.6</a:t>
+            </a:r>
+            <a:r>
+              <a:rPr lang="zh-TW" altLang="en-US" sz="1600" dirty="0">
+                <a:solidFill>
+                  <a:schemeClr val="tx1"/>
+                </a:solidFill>
+                <a:latin typeface="Times New Roman" panose="02020603050405020304" pitchFamily="18" charset="0"/>
+                <a:ea typeface="標楷體" panose="03000509000000000000" pitchFamily="65" charset="-120"/>
+                <a:cs typeface="Times New Roman" panose="02020603050405020304" pitchFamily="18" charset="0"/>
+              </a:rPr>
+              <a:t>，搭配三組色溫進行測試</a:t>
+            </a:r>
+            <a:endParaRPr lang="en-US" altLang="zh-TW" sz="1200" dirty="0">
+              <a:solidFill>
+                <a:schemeClr val="tx1"/>
+              </a:solidFill>
+              <a:latin typeface="Times New Roman" panose="02020603050405020304" pitchFamily="18" charset="0"/>
+              <a:ea typeface="標楷體" panose="03000509000000000000" pitchFamily="65" charset="-120"/>
+              <a:cs typeface="Times New Roman" panose="02020603050405020304" pitchFamily="18" charset="0"/>
+            </a:endParaRPr>
+          </a:p>
+          <a:p>
+            <a:pPr lvl="1">
+              <a:lnSpc>
+                <a:spcPts val="3000"/>
+              </a:lnSpc>
+            </a:pPr>
+            <a:r>
+              <a:rPr lang="zh-TW" altLang="en-US" sz="1600" dirty="0">
+                <a:solidFill>
+                  <a:schemeClr val="tx1"/>
+                </a:solidFill>
+                <a:latin typeface="Times New Roman" panose="02020603050405020304" pitchFamily="18" charset="0"/>
+                <a:ea typeface="標楷體" panose="03000509000000000000" pitchFamily="65" charset="-120"/>
+                <a:cs typeface="Times New Roman" panose="02020603050405020304" pitchFamily="18" charset="0"/>
+              </a:rPr>
+              <a:t>量測標準</a:t>
+            </a:r>
+            <a:r>
+              <a:rPr lang="en-US" altLang="zh-TW" sz="1600" dirty="0">
+                <a:solidFill>
+                  <a:schemeClr val="tx1"/>
+                </a:solidFill>
+                <a:latin typeface="Times New Roman" panose="02020603050405020304" pitchFamily="18" charset="0"/>
+                <a:ea typeface="標楷體" panose="03000509000000000000" pitchFamily="65" charset="-120"/>
+                <a:cs typeface="Times New Roman" panose="02020603050405020304" pitchFamily="18" charset="0"/>
+              </a:rPr>
+              <a:t>:</a:t>
+            </a:r>
+            <a:r>
+              <a:rPr lang="zh-TW" altLang="en-US" sz="1600" dirty="0">
+                <a:solidFill>
+                  <a:schemeClr val="tx1"/>
+                </a:solidFill>
+                <a:latin typeface="Times New Roman" panose="02020603050405020304" pitchFamily="18" charset="0"/>
+                <a:ea typeface="標楷體" panose="03000509000000000000" pitchFamily="65" charset="-120"/>
+                <a:cs typeface="Times New Roman" panose="02020603050405020304" pitchFamily="18" charset="0"/>
+              </a:rPr>
+              <a:t> </a:t>
+            </a:r>
+            <a:r>
+              <a:rPr lang="en-US" altLang="zh-TW" sz="1600" dirty="0">
+                <a:solidFill>
+                  <a:schemeClr val="tx1"/>
+                </a:solidFill>
+                <a:latin typeface="Times New Roman" panose="02020603050405020304" pitchFamily="18" charset="0"/>
+                <a:ea typeface="標楷體" panose="03000509000000000000" pitchFamily="65" charset="-120"/>
+                <a:cs typeface="Times New Roman" panose="02020603050405020304" pitchFamily="18" charset="0"/>
+              </a:rPr>
+              <a:t>Gamma Target </a:t>
+            </a:r>
+            <a:r>
+              <a:rPr lang="zh-TW" altLang="en-US" sz="1600" dirty="0">
+                <a:solidFill>
+                  <a:schemeClr val="tx1"/>
+                </a:solidFill>
+                <a:latin typeface="Times New Roman" panose="02020603050405020304" pitchFamily="18" charset="0"/>
+                <a:ea typeface="標楷體" panose="03000509000000000000" pitchFamily="65" charset="-120"/>
+                <a:cs typeface="Times New Roman" panose="02020603050405020304" pitchFamily="18" charset="0"/>
+              </a:rPr>
+              <a:t>誤差為 </a:t>
+            </a:r>
+            <a:r>
+              <a:rPr lang="en-US" altLang="zh-TW" sz="1600" dirty="0">
+                <a:solidFill>
+                  <a:schemeClr val="tx1"/>
+                </a:solidFill>
+                <a:latin typeface="Times New Roman" panose="02020603050405020304" pitchFamily="18" charset="0"/>
+                <a:ea typeface="標楷體" panose="03000509000000000000" pitchFamily="65" charset="-120"/>
+                <a:cs typeface="Times New Roman" panose="02020603050405020304" pitchFamily="18" charset="0"/>
+              </a:rPr>
+              <a:t>± 0.05</a:t>
+            </a:r>
+            <a:r>
+              <a:rPr lang="zh-TW" altLang="en-US" sz="1600" dirty="0">
+                <a:solidFill>
+                  <a:schemeClr val="tx1"/>
+                </a:solidFill>
+                <a:latin typeface="Times New Roman" panose="02020603050405020304" pitchFamily="18" charset="0"/>
+                <a:ea typeface="標楷體" panose="03000509000000000000" pitchFamily="65" charset="-120"/>
+                <a:cs typeface="Times New Roman" panose="02020603050405020304" pitchFamily="18" charset="0"/>
+              </a:rPr>
+              <a:t>、色溫誤差為 </a:t>
+            </a:r>
+            <a:r>
+              <a:rPr lang="en-US" altLang="zh-TW" sz="1600" dirty="0">
+                <a:solidFill>
+                  <a:schemeClr val="tx1"/>
+                </a:solidFill>
+                <a:latin typeface="Times New Roman" panose="02020603050405020304" pitchFamily="18" charset="0"/>
+                <a:ea typeface="標楷體" panose="03000509000000000000" pitchFamily="65" charset="-120"/>
+                <a:cs typeface="Times New Roman" panose="02020603050405020304" pitchFamily="18" charset="0"/>
+              </a:rPr>
+              <a:t>± 1000k</a:t>
+            </a:r>
+          </a:p>
+          <a:p>
+            <a:pPr lvl="1">
+              <a:lnSpc>
+                <a:spcPct val="150000"/>
+              </a:lnSpc>
+            </a:pPr>
+            <a:endParaRPr lang="en-US" altLang="zh-TW" sz="1600" dirty="0">
+              <a:solidFill>
+                <a:schemeClr val="tx1"/>
+              </a:solidFill>
+              <a:latin typeface="Times New Roman" panose="02020603050405020304" pitchFamily="18" charset="0"/>
+              <a:ea typeface="標楷體" panose="03000509000000000000" pitchFamily="65" charset="-120"/>
+              <a:cs typeface="Times New Roman" panose="02020603050405020304" pitchFamily="18" charset="0"/>
+            </a:endParaRPr>
+          </a:p>
+        </p:txBody>
+      </p:sp>
     </p:spTree>
     <p:extLst>
       <p:ext uri="{BB962C8B-B14F-4D97-AF65-F5344CB8AC3E}">
-        <p14:creationId xmlns:p14="http://schemas.microsoft.com/office/powerpoint/2010/main" val="2593273609"/>
+        <p14:creationId xmlns:p14="http://schemas.microsoft.com/office/powerpoint/2010/main" val="3284388996"/>
       </p:ext>
     </p:extLst>
   </p:cSld>
@@ -8429,7 +8678,7 @@
 </p:sld>
 </file>
 
-<file path=ppt/slides/slide12.xml><?xml version="1.0" encoding="utf-8"?>
+<file path=ppt/slides/slide11.xml><?xml version="1.0" encoding="utf-8"?>
 <p:sld xmlns:a="http://schemas.openxmlformats.org/drawingml/2006/main" xmlns:r="http://schemas.openxmlformats.org/officeDocument/2006/relationships" xmlns:p="http://schemas.openxmlformats.org/presentationml/2006/main">
   <p:cSld>
     <p:spTree>
@@ -10919,10 +11168,10 @@
       </p:sp>
       <p:pic>
         <p:nvPicPr>
-          <p:cNvPr id="11" name="圖片 10">
+          <p:cNvPr id="5" name="圖片 4">
             <a:extLst>
               <a:ext uri="{FF2B5EF4-FFF2-40B4-BE49-F238E27FC236}">
-                <a16:creationId xmlns:a16="http://schemas.microsoft.com/office/drawing/2014/main" id="{E50734FE-F79B-7A14-5FC4-91B42BCDD347}"/>
+                <a16:creationId xmlns:a16="http://schemas.microsoft.com/office/drawing/2014/main" id="{AEF40E0A-D220-62E9-2407-BDEBBBC48F41}"/>
               </a:ext>
             </a:extLst>
           </p:cNvPr>
@@ -10939,18 +11188,355 @@
         </p:blipFill>
         <p:spPr>
           <a:xfrm>
-            <a:off x="1123512" y="1395673"/>
-            <a:ext cx="7658975" cy="4768060"/>
+            <a:off x="1621912" y="1717678"/>
+            <a:ext cx="7064890" cy="4985915"/>
           </a:xfrm>
           <a:prstGeom prst="rect">
             <a:avLst/>
           </a:prstGeom>
         </p:spPr>
       </p:pic>
+      <p:sp>
+        <p:nvSpPr>
+          <p:cNvPr id="2" name="文字版面配置區 6">
+            <a:extLst>
+              <a:ext uri="{FF2B5EF4-FFF2-40B4-BE49-F238E27FC236}">
+                <a16:creationId xmlns:a16="http://schemas.microsoft.com/office/drawing/2014/main" id="{FEDFB633-2563-4B81-6A49-DCC452247D25}"/>
+              </a:ext>
+            </a:extLst>
+          </p:cNvPr>
+          <p:cNvSpPr txBox="1"/>
+          <p:nvPr/>
+        </p:nvSpPr>
+        <p:spPr>
+          <a:xfrm>
+            <a:off x="609602" y="935857"/>
+            <a:ext cx="8686796" cy="4700685"/>
+          </a:xfrm>
+          <a:prstGeom prst="rect">
+            <a:avLst/>
+          </a:prstGeom>
+          <a:noFill/>
+          <a:ln>
+            <a:noFill/>
+          </a:ln>
+        </p:spPr>
+        <p:txBody>
+          <a:bodyPr spcFirstLastPara="1" wrap="square" lIns="91425" tIns="45700" rIns="91425" bIns="45700" anchor="t" anchorCtr="0">
+            <a:noAutofit/>
+          </a:bodyPr>
+          <a:lstStyle>
+            <a:defPPr marR="0" lvl="0" algn="l" rtl="0">
+              <a:lnSpc>
+                <a:spcPct val="100000"/>
+              </a:lnSpc>
+              <a:spcBef>
+                <a:spcPts val="0"/>
+              </a:spcBef>
+              <a:spcAft>
+                <a:spcPts val="0"/>
+              </a:spcAft>
+            </a:defPPr>
+            <a:lvl1pPr marL="457200" marR="0" lvl="0" indent="-406400" algn="l" rtl="0">
+              <a:lnSpc>
+                <a:spcPct val="100000"/>
+              </a:lnSpc>
+              <a:spcBef>
+                <a:spcPts val="560"/>
+              </a:spcBef>
+              <a:spcAft>
+                <a:spcPts val="0"/>
+              </a:spcAft>
+              <a:buClr>
+                <a:schemeClr val="accent2"/>
+              </a:buClr>
+              <a:buSzPts val="2800"/>
+              <a:buFont typeface="Noto Sans Symbols"/>
+              <a:buChar char="❖"/>
+              <a:defRPr sz="2800" b="0" i="0" u="none" strike="noStrike" cap="none">
+                <a:solidFill>
+                  <a:schemeClr val="dk1"/>
+                </a:solidFill>
+                <a:latin typeface="Times New Roman"/>
+                <a:ea typeface="Times New Roman"/>
+                <a:cs typeface="Times New Roman"/>
+                <a:sym typeface="Times New Roman"/>
+              </a:defRPr>
+            </a:lvl1pPr>
+            <a:lvl2pPr marL="914400" marR="0" lvl="1" indent="-381000" algn="l" rtl="0">
+              <a:lnSpc>
+                <a:spcPct val="100000"/>
+              </a:lnSpc>
+              <a:spcBef>
+                <a:spcPts val="480"/>
+              </a:spcBef>
+              <a:spcAft>
+                <a:spcPts val="0"/>
+              </a:spcAft>
+              <a:buClr>
+                <a:srgbClr val="FF5050"/>
+              </a:buClr>
+              <a:buSzPts val="2400"/>
+              <a:buFont typeface="Noto Sans Symbols"/>
+              <a:buChar char="▪"/>
+              <a:defRPr sz="2400" b="0" i="0" u="none" strike="noStrike" cap="none">
+                <a:solidFill>
+                  <a:schemeClr val="dk1"/>
+                </a:solidFill>
+                <a:latin typeface="Times New Roman"/>
+                <a:ea typeface="Times New Roman"/>
+                <a:cs typeface="Times New Roman"/>
+                <a:sym typeface="Times New Roman"/>
+              </a:defRPr>
+            </a:lvl2pPr>
+            <a:lvl3pPr marL="1371600" marR="0" lvl="2" indent="-355600" algn="l" rtl="0">
+              <a:lnSpc>
+                <a:spcPct val="100000"/>
+              </a:lnSpc>
+              <a:spcBef>
+                <a:spcPts val="400"/>
+              </a:spcBef>
+              <a:spcAft>
+                <a:spcPts val="0"/>
+              </a:spcAft>
+              <a:buClr>
+                <a:srgbClr val="6699FF"/>
+              </a:buClr>
+              <a:buSzPts val="2000"/>
+              <a:buFont typeface="Times New Roman"/>
+              <a:buChar char="•"/>
+              <a:defRPr sz="2000" b="0" i="0" u="none" strike="noStrike" cap="none">
+                <a:solidFill>
+                  <a:schemeClr val="dk1"/>
+                </a:solidFill>
+                <a:latin typeface="Times New Roman"/>
+                <a:ea typeface="Times New Roman"/>
+                <a:cs typeface="Times New Roman"/>
+                <a:sym typeface="Times New Roman"/>
+              </a:defRPr>
+            </a:lvl3pPr>
+            <a:lvl4pPr marL="1828800" marR="0" lvl="3" indent="-355600" algn="l" rtl="0">
+              <a:lnSpc>
+                <a:spcPct val="100000"/>
+              </a:lnSpc>
+              <a:spcBef>
+                <a:spcPts val="400"/>
+              </a:spcBef>
+              <a:spcAft>
+                <a:spcPts val="0"/>
+              </a:spcAft>
+              <a:buClr>
+                <a:srgbClr val="FF5050"/>
+              </a:buClr>
+              <a:buSzPts val="2000"/>
+              <a:buFont typeface="Times New Roman"/>
+              <a:buChar char="o"/>
+              <a:defRPr sz="2000" b="0" i="0" u="none" strike="noStrike" cap="none">
+                <a:solidFill>
+                  <a:schemeClr val="dk1"/>
+                </a:solidFill>
+                <a:latin typeface="Times New Roman"/>
+                <a:ea typeface="Times New Roman"/>
+                <a:cs typeface="Times New Roman"/>
+                <a:sym typeface="Times New Roman"/>
+              </a:defRPr>
+            </a:lvl4pPr>
+            <a:lvl5pPr marL="2286000" marR="0" lvl="4" indent="-355600" algn="l" rtl="0">
+              <a:lnSpc>
+                <a:spcPct val="100000"/>
+              </a:lnSpc>
+              <a:spcBef>
+                <a:spcPts val="400"/>
+              </a:spcBef>
+              <a:spcAft>
+                <a:spcPts val="0"/>
+              </a:spcAft>
+              <a:buClr>
+                <a:srgbClr val="FF5050"/>
+              </a:buClr>
+              <a:buSzPts val="2000"/>
+              <a:buFont typeface="Times New Roman"/>
+              <a:buChar char="o"/>
+              <a:defRPr sz="2000" b="0" i="0" u="none" strike="noStrike" cap="none">
+                <a:solidFill>
+                  <a:schemeClr val="dk1"/>
+                </a:solidFill>
+                <a:latin typeface="Times New Roman"/>
+                <a:ea typeface="Times New Roman"/>
+                <a:cs typeface="Times New Roman"/>
+                <a:sym typeface="Times New Roman"/>
+              </a:defRPr>
+            </a:lvl5pPr>
+            <a:lvl6pPr marL="2743200" marR="0" lvl="5" indent="-355600" algn="l" rtl="0">
+              <a:lnSpc>
+                <a:spcPct val="100000"/>
+              </a:lnSpc>
+              <a:spcBef>
+                <a:spcPts val="400"/>
+              </a:spcBef>
+              <a:spcAft>
+                <a:spcPts val="0"/>
+              </a:spcAft>
+              <a:buClr>
+                <a:srgbClr val="FF5050"/>
+              </a:buClr>
+              <a:buSzPts val="2000"/>
+              <a:buFont typeface="Times New Roman"/>
+              <a:buChar char="o"/>
+              <a:defRPr sz="2000" b="0" i="0" u="none" strike="noStrike" cap="none">
+                <a:solidFill>
+                  <a:schemeClr val="dk1"/>
+                </a:solidFill>
+                <a:latin typeface="Times New Roman"/>
+                <a:ea typeface="Times New Roman"/>
+                <a:cs typeface="Times New Roman"/>
+                <a:sym typeface="Times New Roman"/>
+              </a:defRPr>
+            </a:lvl6pPr>
+            <a:lvl7pPr marL="3200400" marR="0" lvl="6" indent="-355600" algn="l" rtl="0">
+              <a:lnSpc>
+                <a:spcPct val="100000"/>
+              </a:lnSpc>
+              <a:spcBef>
+                <a:spcPts val="400"/>
+              </a:spcBef>
+              <a:spcAft>
+                <a:spcPts val="0"/>
+              </a:spcAft>
+              <a:buClr>
+                <a:srgbClr val="FF5050"/>
+              </a:buClr>
+              <a:buSzPts val="2000"/>
+              <a:buFont typeface="Times New Roman"/>
+              <a:buChar char="o"/>
+              <a:defRPr sz="2000" b="0" i="0" u="none" strike="noStrike" cap="none">
+                <a:solidFill>
+                  <a:schemeClr val="dk1"/>
+                </a:solidFill>
+                <a:latin typeface="Times New Roman"/>
+                <a:ea typeface="Times New Roman"/>
+                <a:cs typeface="Times New Roman"/>
+                <a:sym typeface="Times New Roman"/>
+              </a:defRPr>
+            </a:lvl7pPr>
+            <a:lvl8pPr marL="3657600" marR="0" lvl="7" indent="-355600" algn="l" rtl="0">
+              <a:lnSpc>
+                <a:spcPct val="100000"/>
+              </a:lnSpc>
+              <a:spcBef>
+                <a:spcPts val="400"/>
+              </a:spcBef>
+              <a:spcAft>
+                <a:spcPts val="0"/>
+              </a:spcAft>
+              <a:buClr>
+                <a:srgbClr val="FF5050"/>
+              </a:buClr>
+              <a:buSzPts val="2000"/>
+              <a:buFont typeface="Times New Roman"/>
+              <a:buChar char="o"/>
+              <a:defRPr sz="2000" b="0" i="0" u="none" strike="noStrike" cap="none">
+                <a:solidFill>
+                  <a:schemeClr val="dk1"/>
+                </a:solidFill>
+                <a:latin typeface="Times New Roman"/>
+                <a:ea typeface="Times New Roman"/>
+                <a:cs typeface="Times New Roman"/>
+                <a:sym typeface="Times New Roman"/>
+              </a:defRPr>
+            </a:lvl8pPr>
+            <a:lvl9pPr marL="4114800" marR="0" lvl="8" indent="-355600" algn="l" rtl="0">
+              <a:lnSpc>
+                <a:spcPct val="100000"/>
+              </a:lnSpc>
+              <a:spcBef>
+                <a:spcPts val="400"/>
+              </a:spcBef>
+              <a:spcAft>
+                <a:spcPts val="0"/>
+              </a:spcAft>
+              <a:buClr>
+                <a:srgbClr val="FF5050"/>
+              </a:buClr>
+              <a:buSzPts val="2000"/>
+              <a:buFont typeface="Times New Roman"/>
+              <a:buChar char="o"/>
+              <a:defRPr sz="2000" b="0" i="0" u="none" strike="noStrike" cap="none">
+                <a:solidFill>
+                  <a:schemeClr val="dk1"/>
+                </a:solidFill>
+                <a:latin typeface="Times New Roman"/>
+                <a:ea typeface="Times New Roman"/>
+                <a:cs typeface="Times New Roman"/>
+                <a:sym typeface="Times New Roman"/>
+              </a:defRPr>
+            </a:lvl9pPr>
+          </a:lstStyle>
+          <a:p>
+            <a:pPr>
+              <a:lnSpc>
+                <a:spcPct val="150000"/>
+              </a:lnSpc>
+            </a:pPr>
+            <a:r>
+              <a:rPr lang="zh-TW" altLang="en-US" sz="2000" dirty="0">
+                <a:solidFill>
+                  <a:schemeClr val="tx1"/>
+                </a:solidFill>
+                <a:latin typeface="Times New Roman" panose="02020603050405020304" pitchFamily="18" charset="0"/>
+                <a:ea typeface="標楷體" panose="03000509000000000000" pitchFamily="65" charset="-120"/>
+                <a:cs typeface="Times New Roman" panose="02020603050405020304" pitchFamily="18" charset="0"/>
+              </a:rPr>
+              <a:t> </a:t>
+            </a:r>
+            <a:r>
+              <a:rPr lang="en-US" altLang="zh-TW" sz="2000" dirty="0" err="1">
+                <a:solidFill>
+                  <a:schemeClr val="tx1"/>
+                </a:solidFill>
+                <a:latin typeface="Times New Roman" panose="02020603050405020304" pitchFamily="18" charset="0"/>
+                <a:ea typeface="標楷體" panose="03000509000000000000" pitchFamily="65" charset="-120"/>
+                <a:cs typeface="Times New Roman" panose="02020603050405020304" pitchFamily="18" charset="0"/>
+              </a:rPr>
+              <a:t>DisplayCAL</a:t>
+            </a:r>
+            <a:r>
+              <a:rPr lang="en-US" altLang="zh-TW" sz="2000" dirty="0">
+                <a:solidFill>
+                  <a:schemeClr val="tx1"/>
+                </a:solidFill>
+                <a:latin typeface="Times New Roman" panose="02020603050405020304" pitchFamily="18" charset="0"/>
+                <a:ea typeface="標楷體" panose="03000509000000000000" pitchFamily="65" charset="-120"/>
+                <a:cs typeface="Times New Roman" panose="02020603050405020304" pitchFamily="18" charset="0"/>
+              </a:rPr>
+              <a:t> </a:t>
+            </a:r>
+            <a:r>
+              <a:rPr lang="zh-TW" altLang="en-US" sz="2000" dirty="0">
+                <a:solidFill>
+                  <a:schemeClr val="tx1"/>
+                </a:solidFill>
+                <a:latin typeface="Times New Roman" panose="02020603050405020304" pitchFamily="18" charset="0"/>
+                <a:ea typeface="標楷體" panose="03000509000000000000" pitchFamily="65" charset="-120"/>
+                <a:cs typeface="Times New Roman" panose="02020603050405020304" pitchFamily="18" charset="0"/>
+              </a:rPr>
+              <a:t>軟體校正流程</a:t>
+            </a:r>
+            <a:endParaRPr lang="en-US" altLang="zh-TW" sz="1400" dirty="0">
+              <a:solidFill>
+                <a:schemeClr val="tx1"/>
+              </a:solidFill>
+              <a:latin typeface="Times New Roman" panose="02020603050405020304" pitchFamily="18" charset="0"/>
+              <a:ea typeface="標楷體" panose="03000509000000000000" pitchFamily="65" charset="-120"/>
+              <a:cs typeface="Times New Roman" panose="02020603050405020304" pitchFamily="18" charset="0"/>
+            </a:endParaRPr>
+          </a:p>
+        </p:txBody>
+      </p:sp>
     </p:spTree>
     <p:extLst>
       <p:ext uri="{BB962C8B-B14F-4D97-AF65-F5344CB8AC3E}">
-        <p14:creationId xmlns:p14="http://schemas.microsoft.com/office/powerpoint/2010/main" val="1758025262"/>
+        <p14:creationId xmlns:p14="http://schemas.microsoft.com/office/powerpoint/2010/main" val="1488158986"/>
       </p:ext>
     </p:extLst>
   </p:cSld>
@@ -11026,7 +11612,15 @@
                 <a:ea typeface="標楷體" panose="03000509000000000000" pitchFamily="65" charset="-120"/>
                 <a:cs typeface="Times New Roman" panose="02020603050405020304" pitchFamily="18" charset="0"/>
               </a:rPr>
-              <a:t>:</a:t>
+              <a:t>: </a:t>
+            </a:r>
+            <a:r>
+              <a:rPr lang="en-US" altLang="zh-TW" dirty="0" err="1">
+                <a:latin typeface="Times New Roman" panose="02020603050405020304" pitchFamily="18" charset="0"/>
+                <a:ea typeface="標楷體" panose="03000509000000000000" pitchFamily="65" charset="-120"/>
+                <a:cs typeface="Times New Roman" panose="02020603050405020304" pitchFamily="18" charset="0"/>
+              </a:rPr>
+              <a:t>DisplayCAL</a:t>
             </a:r>
             <a:r>
               <a:rPr lang="zh-TW" altLang="en-US" dirty="0">
@@ -11036,19 +11630,6 @@
               </a:rPr>
               <a:t> </a:t>
             </a:r>
-            <a:r>
-              <a:rPr lang="en-US" altLang="zh-TW" dirty="0" err="1">
-                <a:latin typeface="Times New Roman" panose="02020603050405020304" pitchFamily="18" charset="0"/>
-                <a:ea typeface="標楷體" panose="03000509000000000000" pitchFamily="65" charset="-120"/>
-                <a:cs typeface="Times New Roman" panose="02020603050405020304" pitchFamily="18" charset="0"/>
-              </a:rPr>
-              <a:t>DisplayCAL</a:t>
-            </a:r>
-            <a:endParaRPr lang="zh-TW" altLang="en-US" dirty="0">
-              <a:latin typeface="Times New Roman" panose="02020603050405020304" pitchFamily="18" charset="0"/>
-              <a:ea typeface="標楷體" panose="03000509000000000000" pitchFamily="65" charset="-120"/>
-              <a:cs typeface="Times New Roman" panose="02020603050405020304" pitchFamily="18" charset="0"/>
-            </a:endParaRPr>
           </a:p>
         </p:txBody>
       </p:sp>
@@ -11057,7 +11638,7 @@
           <p:cNvPr id="3" name="圖片 2">
             <a:extLst>
               <a:ext uri="{FF2B5EF4-FFF2-40B4-BE49-F238E27FC236}">
-                <a16:creationId xmlns:a16="http://schemas.microsoft.com/office/drawing/2014/main" id="{632C21D7-F9F2-2E89-A087-8457F49D4C55}"/>
+                <a16:creationId xmlns:a16="http://schemas.microsoft.com/office/drawing/2014/main" id="{538617A3-BEC8-75FF-D84E-E2B6A66A65A9}"/>
               </a:ext>
             </a:extLst>
           </p:cNvPr>
@@ -11074,18 +11655,385 @@
         </p:blipFill>
         <p:spPr>
           <a:xfrm>
-            <a:off x="664633" y="1563501"/>
-            <a:ext cx="8576733" cy="4194876"/>
+            <a:off x="1268138" y="1625404"/>
+            <a:ext cx="3193796" cy="4228109"/>
           </a:xfrm>
           <a:prstGeom prst="rect">
             <a:avLst/>
           </a:prstGeom>
         </p:spPr>
       </p:pic>
+      <p:pic>
+        <p:nvPicPr>
+          <p:cNvPr id="7" name="圖片 6">
+            <a:extLst>
+              <a:ext uri="{FF2B5EF4-FFF2-40B4-BE49-F238E27FC236}">
+                <a16:creationId xmlns:a16="http://schemas.microsoft.com/office/drawing/2014/main" id="{CCF60E74-4101-FA8D-693A-DF8294D76226}"/>
+              </a:ext>
+            </a:extLst>
+          </p:cNvPr>
+          <p:cNvPicPr>
+            <a:picLocks noChangeAspect="1"/>
+          </p:cNvPicPr>
+          <p:nvPr/>
+        </p:nvPicPr>
+        <p:blipFill>
+          <a:blip r:embed="rId4"/>
+          <a:stretch>
+            <a:fillRect/>
+          </a:stretch>
+        </p:blipFill>
+        <p:spPr>
+          <a:xfrm>
+            <a:off x="5190067" y="2582333"/>
+            <a:ext cx="3725332" cy="2793999"/>
+          </a:xfrm>
+          <a:prstGeom prst="rect">
+            <a:avLst/>
+          </a:prstGeom>
+        </p:spPr>
+      </p:pic>
+      <p:sp>
+        <p:nvSpPr>
+          <p:cNvPr id="8" name="文字版面配置區 6">
+            <a:extLst>
+              <a:ext uri="{FF2B5EF4-FFF2-40B4-BE49-F238E27FC236}">
+                <a16:creationId xmlns:a16="http://schemas.microsoft.com/office/drawing/2014/main" id="{04762C2E-A366-4946-68C1-E6D802A969FA}"/>
+              </a:ext>
+            </a:extLst>
+          </p:cNvPr>
+          <p:cNvSpPr txBox="1"/>
+          <p:nvPr/>
+        </p:nvSpPr>
+        <p:spPr>
+          <a:xfrm>
+            <a:off x="609602" y="935857"/>
+            <a:ext cx="8686796" cy="4700685"/>
+          </a:xfrm>
+          <a:prstGeom prst="rect">
+            <a:avLst/>
+          </a:prstGeom>
+          <a:noFill/>
+          <a:ln>
+            <a:noFill/>
+          </a:ln>
+        </p:spPr>
+        <p:txBody>
+          <a:bodyPr spcFirstLastPara="1" wrap="square" lIns="91425" tIns="45700" rIns="91425" bIns="45700" anchor="t" anchorCtr="0">
+            <a:noAutofit/>
+          </a:bodyPr>
+          <a:lstStyle>
+            <a:defPPr marR="0" lvl="0" algn="l" rtl="0">
+              <a:lnSpc>
+                <a:spcPct val="100000"/>
+              </a:lnSpc>
+              <a:spcBef>
+                <a:spcPts val="0"/>
+              </a:spcBef>
+              <a:spcAft>
+                <a:spcPts val="0"/>
+              </a:spcAft>
+            </a:defPPr>
+            <a:lvl1pPr marL="457200" marR="0" lvl="0" indent="-406400" algn="l" rtl="0">
+              <a:lnSpc>
+                <a:spcPct val="100000"/>
+              </a:lnSpc>
+              <a:spcBef>
+                <a:spcPts val="560"/>
+              </a:spcBef>
+              <a:spcAft>
+                <a:spcPts val="0"/>
+              </a:spcAft>
+              <a:buClr>
+                <a:schemeClr val="accent2"/>
+              </a:buClr>
+              <a:buSzPts val="2800"/>
+              <a:buFont typeface="Noto Sans Symbols"/>
+              <a:buChar char="❖"/>
+              <a:defRPr sz="2800" b="0" i="0" u="none" strike="noStrike" cap="none">
+                <a:solidFill>
+                  <a:schemeClr val="dk1"/>
+                </a:solidFill>
+                <a:latin typeface="Times New Roman"/>
+                <a:ea typeface="Times New Roman"/>
+                <a:cs typeface="Times New Roman"/>
+                <a:sym typeface="Times New Roman"/>
+              </a:defRPr>
+            </a:lvl1pPr>
+            <a:lvl2pPr marL="914400" marR="0" lvl="1" indent="-381000" algn="l" rtl="0">
+              <a:lnSpc>
+                <a:spcPct val="100000"/>
+              </a:lnSpc>
+              <a:spcBef>
+                <a:spcPts val="480"/>
+              </a:spcBef>
+              <a:spcAft>
+                <a:spcPts val="0"/>
+              </a:spcAft>
+              <a:buClr>
+                <a:srgbClr val="FF5050"/>
+              </a:buClr>
+              <a:buSzPts val="2400"/>
+              <a:buFont typeface="Noto Sans Symbols"/>
+              <a:buChar char="▪"/>
+              <a:defRPr sz="2400" b="0" i="0" u="none" strike="noStrike" cap="none">
+                <a:solidFill>
+                  <a:schemeClr val="dk1"/>
+                </a:solidFill>
+                <a:latin typeface="Times New Roman"/>
+                <a:ea typeface="Times New Roman"/>
+                <a:cs typeface="Times New Roman"/>
+                <a:sym typeface="Times New Roman"/>
+              </a:defRPr>
+            </a:lvl2pPr>
+            <a:lvl3pPr marL="1371600" marR="0" lvl="2" indent="-355600" algn="l" rtl="0">
+              <a:lnSpc>
+                <a:spcPct val="100000"/>
+              </a:lnSpc>
+              <a:spcBef>
+                <a:spcPts val="400"/>
+              </a:spcBef>
+              <a:spcAft>
+                <a:spcPts val="0"/>
+              </a:spcAft>
+              <a:buClr>
+                <a:srgbClr val="6699FF"/>
+              </a:buClr>
+              <a:buSzPts val="2000"/>
+              <a:buFont typeface="Times New Roman"/>
+              <a:buChar char="•"/>
+              <a:defRPr sz="2000" b="0" i="0" u="none" strike="noStrike" cap="none">
+                <a:solidFill>
+                  <a:schemeClr val="dk1"/>
+                </a:solidFill>
+                <a:latin typeface="Times New Roman"/>
+                <a:ea typeface="Times New Roman"/>
+                <a:cs typeface="Times New Roman"/>
+                <a:sym typeface="Times New Roman"/>
+              </a:defRPr>
+            </a:lvl3pPr>
+            <a:lvl4pPr marL="1828800" marR="0" lvl="3" indent="-355600" algn="l" rtl="0">
+              <a:lnSpc>
+                <a:spcPct val="100000"/>
+              </a:lnSpc>
+              <a:spcBef>
+                <a:spcPts val="400"/>
+              </a:spcBef>
+              <a:spcAft>
+                <a:spcPts val="0"/>
+              </a:spcAft>
+              <a:buClr>
+                <a:srgbClr val="FF5050"/>
+              </a:buClr>
+              <a:buSzPts val="2000"/>
+              <a:buFont typeface="Times New Roman"/>
+              <a:buChar char="o"/>
+              <a:defRPr sz="2000" b="0" i="0" u="none" strike="noStrike" cap="none">
+                <a:solidFill>
+                  <a:schemeClr val="dk1"/>
+                </a:solidFill>
+                <a:latin typeface="Times New Roman"/>
+                <a:ea typeface="Times New Roman"/>
+                <a:cs typeface="Times New Roman"/>
+                <a:sym typeface="Times New Roman"/>
+              </a:defRPr>
+            </a:lvl4pPr>
+            <a:lvl5pPr marL="2286000" marR="0" lvl="4" indent="-355600" algn="l" rtl="0">
+              <a:lnSpc>
+                <a:spcPct val="100000"/>
+              </a:lnSpc>
+              <a:spcBef>
+                <a:spcPts val="400"/>
+              </a:spcBef>
+              <a:spcAft>
+                <a:spcPts val="0"/>
+              </a:spcAft>
+              <a:buClr>
+                <a:srgbClr val="FF5050"/>
+              </a:buClr>
+              <a:buSzPts val="2000"/>
+              <a:buFont typeface="Times New Roman"/>
+              <a:buChar char="o"/>
+              <a:defRPr sz="2000" b="0" i="0" u="none" strike="noStrike" cap="none">
+                <a:solidFill>
+                  <a:schemeClr val="dk1"/>
+                </a:solidFill>
+                <a:latin typeface="Times New Roman"/>
+                <a:ea typeface="Times New Roman"/>
+                <a:cs typeface="Times New Roman"/>
+                <a:sym typeface="Times New Roman"/>
+              </a:defRPr>
+            </a:lvl5pPr>
+            <a:lvl6pPr marL="2743200" marR="0" lvl="5" indent="-355600" algn="l" rtl="0">
+              <a:lnSpc>
+                <a:spcPct val="100000"/>
+              </a:lnSpc>
+              <a:spcBef>
+                <a:spcPts val="400"/>
+              </a:spcBef>
+              <a:spcAft>
+                <a:spcPts val="0"/>
+              </a:spcAft>
+              <a:buClr>
+                <a:srgbClr val="FF5050"/>
+              </a:buClr>
+              <a:buSzPts val="2000"/>
+              <a:buFont typeface="Times New Roman"/>
+              <a:buChar char="o"/>
+              <a:defRPr sz="2000" b="0" i="0" u="none" strike="noStrike" cap="none">
+                <a:solidFill>
+                  <a:schemeClr val="dk1"/>
+                </a:solidFill>
+                <a:latin typeface="Times New Roman"/>
+                <a:ea typeface="Times New Roman"/>
+                <a:cs typeface="Times New Roman"/>
+                <a:sym typeface="Times New Roman"/>
+              </a:defRPr>
+            </a:lvl6pPr>
+            <a:lvl7pPr marL="3200400" marR="0" lvl="6" indent="-355600" algn="l" rtl="0">
+              <a:lnSpc>
+                <a:spcPct val="100000"/>
+              </a:lnSpc>
+              <a:spcBef>
+                <a:spcPts val="400"/>
+              </a:spcBef>
+              <a:spcAft>
+                <a:spcPts val="0"/>
+              </a:spcAft>
+              <a:buClr>
+                <a:srgbClr val="FF5050"/>
+              </a:buClr>
+              <a:buSzPts val="2000"/>
+              <a:buFont typeface="Times New Roman"/>
+              <a:buChar char="o"/>
+              <a:defRPr sz="2000" b="0" i="0" u="none" strike="noStrike" cap="none">
+                <a:solidFill>
+                  <a:schemeClr val="dk1"/>
+                </a:solidFill>
+                <a:latin typeface="Times New Roman"/>
+                <a:ea typeface="Times New Roman"/>
+                <a:cs typeface="Times New Roman"/>
+                <a:sym typeface="Times New Roman"/>
+              </a:defRPr>
+            </a:lvl7pPr>
+            <a:lvl8pPr marL="3657600" marR="0" lvl="7" indent="-355600" algn="l" rtl="0">
+              <a:lnSpc>
+                <a:spcPct val="100000"/>
+              </a:lnSpc>
+              <a:spcBef>
+                <a:spcPts val="400"/>
+              </a:spcBef>
+              <a:spcAft>
+                <a:spcPts val="0"/>
+              </a:spcAft>
+              <a:buClr>
+                <a:srgbClr val="FF5050"/>
+              </a:buClr>
+              <a:buSzPts val="2000"/>
+              <a:buFont typeface="Times New Roman"/>
+              <a:buChar char="o"/>
+              <a:defRPr sz="2000" b="0" i="0" u="none" strike="noStrike" cap="none">
+                <a:solidFill>
+                  <a:schemeClr val="dk1"/>
+                </a:solidFill>
+                <a:latin typeface="Times New Roman"/>
+                <a:ea typeface="Times New Roman"/>
+                <a:cs typeface="Times New Roman"/>
+                <a:sym typeface="Times New Roman"/>
+              </a:defRPr>
+            </a:lvl8pPr>
+            <a:lvl9pPr marL="4114800" marR="0" lvl="8" indent="-355600" algn="l" rtl="0">
+              <a:lnSpc>
+                <a:spcPct val="100000"/>
+              </a:lnSpc>
+              <a:spcBef>
+                <a:spcPts val="400"/>
+              </a:spcBef>
+              <a:spcAft>
+                <a:spcPts val="0"/>
+              </a:spcAft>
+              <a:buClr>
+                <a:srgbClr val="FF5050"/>
+              </a:buClr>
+              <a:buSzPts val="2000"/>
+              <a:buFont typeface="Times New Roman"/>
+              <a:buChar char="o"/>
+              <a:defRPr sz="2000" b="0" i="0" u="none" strike="noStrike" cap="none">
+                <a:solidFill>
+                  <a:schemeClr val="dk1"/>
+                </a:solidFill>
+                <a:latin typeface="Times New Roman"/>
+                <a:ea typeface="Times New Roman"/>
+                <a:cs typeface="Times New Roman"/>
+                <a:sym typeface="Times New Roman"/>
+              </a:defRPr>
+            </a:lvl9pPr>
+          </a:lstStyle>
+          <a:p>
+            <a:pPr>
+              <a:lnSpc>
+                <a:spcPct val="150000"/>
+              </a:lnSpc>
+            </a:pPr>
+            <a:r>
+              <a:rPr lang="zh-TW" altLang="en-US" sz="2000" dirty="0">
+                <a:solidFill>
+                  <a:schemeClr val="tx1"/>
+                </a:solidFill>
+                <a:latin typeface="Times New Roman" panose="02020603050405020304" pitchFamily="18" charset="0"/>
+                <a:ea typeface="標楷體" panose="03000509000000000000" pitchFamily="65" charset="-120"/>
+                <a:cs typeface="Times New Roman" panose="02020603050405020304" pitchFamily="18" charset="0"/>
+              </a:rPr>
+              <a:t> </a:t>
+            </a:r>
+            <a:r>
+              <a:rPr lang="en-US" altLang="zh-TW" sz="2000" dirty="0" err="1">
+                <a:solidFill>
+                  <a:schemeClr val="tx1"/>
+                </a:solidFill>
+                <a:latin typeface="Times New Roman" panose="02020603050405020304" pitchFamily="18" charset="0"/>
+                <a:ea typeface="標楷體" panose="03000509000000000000" pitchFamily="65" charset="-120"/>
+                <a:cs typeface="Times New Roman" panose="02020603050405020304" pitchFamily="18" charset="0"/>
+              </a:rPr>
+              <a:t>DisplayCAL</a:t>
+            </a:r>
+            <a:r>
+              <a:rPr lang="en-US" altLang="zh-TW" sz="2000" dirty="0">
+                <a:solidFill>
+                  <a:schemeClr val="tx1"/>
+                </a:solidFill>
+                <a:latin typeface="Times New Roman" panose="02020603050405020304" pitchFamily="18" charset="0"/>
+                <a:ea typeface="標楷體" panose="03000509000000000000" pitchFamily="65" charset="-120"/>
+                <a:cs typeface="Times New Roman" panose="02020603050405020304" pitchFamily="18" charset="0"/>
+              </a:rPr>
+              <a:t> </a:t>
+            </a:r>
+            <a:r>
+              <a:rPr lang="zh-TW" altLang="en-US" sz="2000" dirty="0">
+                <a:solidFill>
+                  <a:schemeClr val="tx1"/>
+                </a:solidFill>
+                <a:latin typeface="Times New Roman" panose="02020603050405020304" pitchFamily="18" charset="0"/>
+                <a:ea typeface="標楷體" panose="03000509000000000000" pitchFamily="65" charset="-120"/>
+                <a:cs typeface="Times New Roman" panose="02020603050405020304" pitchFamily="18" charset="0"/>
+              </a:rPr>
+              <a:t>軟體校正流程</a:t>
+            </a:r>
+            <a:endParaRPr lang="en-US" altLang="zh-TW" sz="1400" dirty="0">
+              <a:solidFill>
+                <a:schemeClr val="tx1"/>
+              </a:solidFill>
+              <a:latin typeface="Times New Roman" panose="02020603050405020304" pitchFamily="18" charset="0"/>
+              <a:ea typeface="標楷體" panose="03000509000000000000" pitchFamily="65" charset="-120"/>
+              <a:cs typeface="Times New Roman" panose="02020603050405020304" pitchFamily="18" charset="0"/>
+            </a:endParaRPr>
+          </a:p>
+        </p:txBody>
+      </p:sp>
     </p:spTree>
     <p:extLst>
       <p:ext uri="{BB962C8B-B14F-4D97-AF65-F5344CB8AC3E}">
-        <p14:creationId xmlns:p14="http://schemas.microsoft.com/office/powerpoint/2010/main" val="3770445275"/>
+        <p14:creationId xmlns:p14="http://schemas.microsoft.com/office/powerpoint/2010/main" val="2593273609"/>
       </p:ext>
     </p:extLst>
   </p:cSld>
@@ -11161,7 +12109,15 @@
                 <a:ea typeface="標楷體" panose="03000509000000000000" pitchFamily="65" charset="-120"/>
                 <a:cs typeface="Times New Roman" panose="02020603050405020304" pitchFamily="18" charset="0"/>
               </a:rPr>
-              <a:t>:</a:t>
+              <a:t>: </a:t>
+            </a:r>
+            <a:r>
+              <a:rPr lang="en-US" altLang="zh-TW" dirty="0" err="1">
+                <a:latin typeface="Times New Roman" panose="02020603050405020304" pitchFamily="18" charset="0"/>
+                <a:ea typeface="標楷體" panose="03000509000000000000" pitchFamily="65" charset="-120"/>
+                <a:cs typeface="Times New Roman" panose="02020603050405020304" pitchFamily="18" charset="0"/>
+              </a:rPr>
+              <a:t>DisplayCAL</a:t>
             </a:r>
             <a:r>
               <a:rPr lang="zh-TW" altLang="en-US" dirty="0">
@@ -11171,28 +12127,15 @@
               </a:rPr>
               <a:t> </a:t>
             </a:r>
-            <a:r>
-              <a:rPr lang="en-US" altLang="zh-TW" dirty="0" err="1">
-                <a:latin typeface="Times New Roman" panose="02020603050405020304" pitchFamily="18" charset="0"/>
-                <a:ea typeface="標楷體" panose="03000509000000000000" pitchFamily="65" charset="-120"/>
-                <a:cs typeface="Times New Roman" panose="02020603050405020304" pitchFamily="18" charset="0"/>
-              </a:rPr>
-              <a:t>DisplayCAL</a:t>
-            </a:r>
-            <a:endParaRPr lang="zh-TW" altLang="en-US" dirty="0">
-              <a:latin typeface="Times New Roman" panose="02020603050405020304" pitchFamily="18" charset="0"/>
-              <a:ea typeface="標楷體" panose="03000509000000000000" pitchFamily="65" charset="-120"/>
-              <a:cs typeface="Times New Roman" panose="02020603050405020304" pitchFamily="18" charset="0"/>
-            </a:endParaRPr>
           </a:p>
         </p:txBody>
       </p:sp>
       <p:pic>
         <p:nvPicPr>
-          <p:cNvPr id="3" name="圖片 2">
+          <p:cNvPr id="4" name="圖片 3">
             <a:extLst>
               <a:ext uri="{FF2B5EF4-FFF2-40B4-BE49-F238E27FC236}">
-                <a16:creationId xmlns:a16="http://schemas.microsoft.com/office/drawing/2014/main" id="{F659FC18-5835-84BA-E507-82D126A8BE9D}"/>
+                <a16:creationId xmlns:a16="http://schemas.microsoft.com/office/drawing/2014/main" id="{D8AC69FA-5C57-F0EF-7AE0-AE2A31882B9B}"/>
               </a:ext>
             </a:extLst>
           </p:cNvPr>
@@ -11209,18 +12152,384 @@
         </p:blipFill>
         <p:spPr>
           <a:xfrm>
-            <a:off x="429952" y="1430866"/>
-            <a:ext cx="9046096" cy="4621880"/>
+            <a:off x="393702" y="1735666"/>
+            <a:ext cx="5316217" cy="4156251"/>
           </a:xfrm>
           <a:prstGeom prst="rect">
             <a:avLst/>
           </a:prstGeom>
         </p:spPr>
       </p:pic>
+      <p:pic>
+        <p:nvPicPr>
+          <p:cNvPr id="6" name="圖片 5">
+            <a:extLst>
+              <a:ext uri="{FF2B5EF4-FFF2-40B4-BE49-F238E27FC236}">
+                <a16:creationId xmlns:a16="http://schemas.microsoft.com/office/drawing/2014/main" id="{08823F74-5748-23F9-AC33-67798B568E4B}"/>
+              </a:ext>
+            </a:extLst>
+          </p:cNvPr>
+          <p:cNvPicPr>
+            <a:picLocks noChangeAspect="1"/>
+          </p:cNvPicPr>
+          <p:nvPr/>
+        </p:nvPicPr>
+        <p:blipFill>
+          <a:blip r:embed="rId4"/>
+          <a:srcRect t="4792"/>
+          <a:stretch/>
+        </p:blipFill>
+        <p:spPr>
+          <a:xfrm>
+            <a:off x="5811083" y="1837267"/>
+            <a:ext cx="3874074" cy="4054650"/>
+          </a:xfrm>
+          <a:prstGeom prst="rect">
+            <a:avLst/>
+          </a:prstGeom>
+        </p:spPr>
+      </p:pic>
+      <p:sp>
+        <p:nvSpPr>
+          <p:cNvPr id="8" name="文字版面配置區 6">
+            <a:extLst>
+              <a:ext uri="{FF2B5EF4-FFF2-40B4-BE49-F238E27FC236}">
+                <a16:creationId xmlns:a16="http://schemas.microsoft.com/office/drawing/2014/main" id="{4826348D-7537-F592-05B2-0DD97B1B3C79}"/>
+              </a:ext>
+            </a:extLst>
+          </p:cNvPr>
+          <p:cNvSpPr txBox="1"/>
+          <p:nvPr/>
+        </p:nvSpPr>
+        <p:spPr>
+          <a:xfrm>
+            <a:off x="609602" y="935857"/>
+            <a:ext cx="8686796" cy="4700685"/>
+          </a:xfrm>
+          <a:prstGeom prst="rect">
+            <a:avLst/>
+          </a:prstGeom>
+          <a:noFill/>
+          <a:ln>
+            <a:noFill/>
+          </a:ln>
+        </p:spPr>
+        <p:txBody>
+          <a:bodyPr spcFirstLastPara="1" wrap="square" lIns="91425" tIns="45700" rIns="91425" bIns="45700" anchor="t" anchorCtr="0">
+            <a:noAutofit/>
+          </a:bodyPr>
+          <a:lstStyle>
+            <a:defPPr marR="0" lvl="0" algn="l" rtl="0">
+              <a:lnSpc>
+                <a:spcPct val="100000"/>
+              </a:lnSpc>
+              <a:spcBef>
+                <a:spcPts val="0"/>
+              </a:spcBef>
+              <a:spcAft>
+                <a:spcPts val="0"/>
+              </a:spcAft>
+            </a:defPPr>
+            <a:lvl1pPr marL="457200" marR="0" lvl="0" indent="-406400" algn="l" rtl="0">
+              <a:lnSpc>
+                <a:spcPct val="100000"/>
+              </a:lnSpc>
+              <a:spcBef>
+                <a:spcPts val="560"/>
+              </a:spcBef>
+              <a:spcAft>
+                <a:spcPts val="0"/>
+              </a:spcAft>
+              <a:buClr>
+                <a:schemeClr val="accent2"/>
+              </a:buClr>
+              <a:buSzPts val="2800"/>
+              <a:buFont typeface="Noto Sans Symbols"/>
+              <a:buChar char="❖"/>
+              <a:defRPr sz="2800" b="0" i="0" u="none" strike="noStrike" cap="none">
+                <a:solidFill>
+                  <a:schemeClr val="dk1"/>
+                </a:solidFill>
+                <a:latin typeface="Times New Roman"/>
+                <a:ea typeface="Times New Roman"/>
+                <a:cs typeface="Times New Roman"/>
+                <a:sym typeface="Times New Roman"/>
+              </a:defRPr>
+            </a:lvl1pPr>
+            <a:lvl2pPr marL="914400" marR="0" lvl="1" indent="-381000" algn="l" rtl="0">
+              <a:lnSpc>
+                <a:spcPct val="100000"/>
+              </a:lnSpc>
+              <a:spcBef>
+                <a:spcPts val="480"/>
+              </a:spcBef>
+              <a:spcAft>
+                <a:spcPts val="0"/>
+              </a:spcAft>
+              <a:buClr>
+                <a:srgbClr val="FF5050"/>
+              </a:buClr>
+              <a:buSzPts val="2400"/>
+              <a:buFont typeface="Noto Sans Symbols"/>
+              <a:buChar char="▪"/>
+              <a:defRPr sz="2400" b="0" i="0" u="none" strike="noStrike" cap="none">
+                <a:solidFill>
+                  <a:schemeClr val="dk1"/>
+                </a:solidFill>
+                <a:latin typeface="Times New Roman"/>
+                <a:ea typeface="Times New Roman"/>
+                <a:cs typeface="Times New Roman"/>
+                <a:sym typeface="Times New Roman"/>
+              </a:defRPr>
+            </a:lvl2pPr>
+            <a:lvl3pPr marL="1371600" marR="0" lvl="2" indent="-355600" algn="l" rtl="0">
+              <a:lnSpc>
+                <a:spcPct val="100000"/>
+              </a:lnSpc>
+              <a:spcBef>
+                <a:spcPts val="400"/>
+              </a:spcBef>
+              <a:spcAft>
+                <a:spcPts val="0"/>
+              </a:spcAft>
+              <a:buClr>
+                <a:srgbClr val="6699FF"/>
+              </a:buClr>
+              <a:buSzPts val="2000"/>
+              <a:buFont typeface="Times New Roman"/>
+              <a:buChar char="•"/>
+              <a:defRPr sz="2000" b="0" i="0" u="none" strike="noStrike" cap="none">
+                <a:solidFill>
+                  <a:schemeClr val="dk1"/>
+                </a:solidFill>
+                <a:latin typeface="Times New Roman"/>
+                <a:ea typeface="Times New Roman"/>
+                <a:cs typeface="Times New Roman"/>
+                <a:sym typeface="Times New Roman"/>
+              </a:defRPr>
+            </a:lvl3pPr>
+            <a:lvl4pPr marL="1828800" marR="0" lvl="3" indent="-355600" algn="l" rtl="0">
+              <a:lnSpc>
+                <a:spcPct val="100000"/>
+              </a:lnSpc>
+              <a:spcBef>
+                <a:spcPts val="400"/>
+              </a:spcBef>
+              <a:spcAft>
+                <a:spcPts val="0"/>
+              </a:spcAft>
+              <a:buClr>
+                <a:srgbClr val="FF5050"/>
+              </a:buClr>
+              <a:buSzPts val="2000"/>
+              <a:buFont typeface="Times New Roman"/>
+              <a:buChar char="o"/>
+              <a:defRPr sz="2000" b="0" i="0" u="none" strike="noStrike" cap="none">
+                <a:solidFill>
+                  <a:schemeClr val="dk1"/>
+                </a:solidFill>
+                <a:latin typeface="Times New Roman"/>
+                <a:ea typeface="Times New Roman"/>
+                <a:cs typeface="Times New Roman"/>
+                <a:sym typeface="Times New Roman"/>
+              </a:defRPr>
+            </a:lvl4pPr>
+            <a:lvl5pPr marL="2286000" marR="0" lvl="4" indent="-355600" algn="l" rtl="0">
+              <a:lnSpc>
+                <a:spcPct val="100000"/>
+              </a:lnSpc>
+              <a:spcBef>
+                <a:spcPts val="400"/>
+              </a:spcBef>
+              <a:spcAft>
+                <a:spcPts val="0"/>
+              </a:spcAft>
+              <a:buClr>
+                <a:srgbClr val="FF5050"/>
+              </a:buClr>
+              <a:buSzPts val="2000"/>
+              <a:buFont typeface="Times New Roman"/>
+              <a:buChar char="o"/>
+              <a:defRPr sz="2000" b="0" i="0" u="none" strike="noStrike" cap="none">
+                <a:solidFill>
+                  <a:schemeClr val="dk1"/>
+                </a:solidFill>
+                <a:latin typeface="Times New Roman"/>
+                <a:ea typeface="Times New Roman"/>
+                <a:cs typeface="Times New Roman"/>
+                <a:sym typeface="Times New Roman"/>
+              </a:defRPr>
+            </a:lvl5pPr>
+            <a:lvl6pPr marL="2743200" marR="0" lvl="5" indent="-355600" algn="l" rtl="0">
+              <a:lnSpc>
+                <a:spcPct val="100000"/>
+              </a:lnSpc>
+              <a:spcBef>
+                <a:spcPts val="400"/>
+              </a:spcBef>
+              <a:spcAft>
+                <a:spcPts val="0"/>
+              </a:spcAft>
+              <a:buClr>
+                <a:srgbClr val="FF5050"/>
+              </a:buClr>
+              <a:buSzPts val="2000"/>
+              <a:buFont typeface="Times New Roman"/>
+              <a:buChar char="o"/>
+              <a:defRPr sz="2000" b="0" i="0" u="none" strike="noStrike" cap="none">
+                <a:solidFill>
+                  <a:schemeClr val="dk1"/>
+                </a:solidFill>
+                <a:latin typeface="Times New Roman"/>
+                <a:ea typeface="Times New Roman"/>
+                <a:cs typeface="Times New Roman"/>
+                <a:sym typeface="Times New Roman"/>
+              </a:defRPr>
+            </a:lvl6pPr>
+            <a:lvl7pPr marL="3200400" marR="0" lvl="6" indent="-355600" algn="l" rtl="0">
+              <a:lnSpc>
+                <a:spcPct val="100000"/>
+              </a:lnSpc>
+              <a:spcBef>
+                <a:spcPts val="400"/>
+              </a:spcBef>
+              <a:spcAft>
+                <a:spcPts val="0"/>
+              </a:spcAft>
+              <a:buClr>
+                <a:srgbClr val="FF5050"/>
+              </a:buClr>
+              <a:buSzPts val="2000"/>
+              <a:buFont typeface="Times New Roman"/>
+              <a:buChar char="o"/>
+              <a:defRPr sz="2000" b="0" i="0" u="none" strike="noStrike" cap="none">
+                <a:solidFill>
+                  <a:schemeClr val="dk1"/>
+                </a:solidFill>
+                <a:latin typeface="Times New Roman"/>
+                <a:ea typeface="Times New Roman"/>
+                <a:cs typeface="Times New Roman"/>
+                <a:sym typeface="Times New Roman"/>
+              </a:defRPr>
+            </a:lvl7pPr>
+            <a:lvl8pPr marL="3657600" marR="0" lvl="7" indent="-355600" algn="l" rtl="0">
+              <a:lnSpc>
+                <a:spcPct val="100000"/>
+              </a:lnSpc>
+              <a:spcBef>
+                <a:spcPts val="400"/>
+              </a:spcBef>
+              <a:spcAft>
+                <a:spcPts val="0"/>
+              </a:spcAft>
+              <a:buClr>
+                <a:srgbClr val="FF5050"/>
+              </a:buClr>
+              <a:buSzPts val="2000"/>
+              <a:buFont typeface="Times New Roman"/>
+              <a:buChar char="o"/>
+              <a:defRPr sz="2000" b="0" i="0" u="none" strike="noStrike" cap="none">
+                <a:solidFill>
+                  <a:schemeClr val="dk1"/>
+                </a:solidFill>
+                <a:latin typeface="Times New Roman"/>
+                <a:ea typeface="Times New Roman"/>
+                <a:cs typeface="Times New Roman"/>
+                <a:sym typeface="Times New Roman"/>
+              </a:defRPr>
+            </a:lvl8pPr>
+            <a:lvl9pPr marL="4114800" marR="0" lvl="8" indent="-355600" algn="l" rtl="0">
+              <a:lnSpc>
+                <a:spcPct val="100000"/>
+              </a:lnSpc>
+              <a:spcBef>
+                <a:spcPts val="400"/>
+              </a:spcBef>
+              <a:spcAft>
+                <a:spcPts val="0"/>
+              </a:spcAft>
+              <a:buClr>
+                <a:srgbClr val="FF5050"/>
+              </a:buClr>
+              <a:buSzPts val="2000"/>
+              <a:buFont typeface="Times New Roman"/>
+              <a:buChar char="o"/>
+              <a:defRPr sz="2000" b="0" i="0" u="none" strike="noStrike" cap="none">
+                <a:solidFill>
+                  <a:schemeClr val="dk1"/>
+                </a:solidFill>
+                <a:latin typeface="Times New Roman"/>
+                <a:ea typeface="Times New Roman"/>
+                <a:cs typeface="Times New Roman"/>
+                <a:sym typeface="Times New Roman"/>
+              </a:defRPr>
+            </a:lvl9pPr>
+          </a:lstStyle>
+          <a:p>
+            <a:pPr>
+              <a:lnSpc>
+                <a:spcPct val="150000"/>
+              </a:lnSpc>
+            </a:pPr>
+            <a:r>
+              <a:rPr lang="zh-TW" altLang="en-US" sz="2000" dirty="0">
+                <a:solidFill>
+                  <a:schemeClr val="tx1"/>
+                </a:solidFill>
+                <a:latin typeface="Times New Roman" panose="02020603050405020304" pitchFamily="18" charset="0"/>
+                <a:ea typeface="標楷體" panose="03000509000000000000" pitchFamily="65" charset="-120"/>
+                <a:cs typeface="Times New Roman" panose="02020603050405020304" pitchFamily="18" charset="0"/>
+              </a:rPr>
+              <a:t> </a:t>
+            </a:r>
+            <a:r>
+              <a:rPr lang="en-US" altLang="zh-TW" sz="2000" dirty="0" err="1">
+                <a:solidFill>
+                  <a:schemeClr val="tx1"/>
+                </a:solidFill>
+                <a:latin typeface="Times New Roman" panose="02020603050405020304" pitchFamily="18" charset="0"/>
+                <a:ea typeface="標楷體" panose="03000509000000000000" pitchFamily="65" charset="-120"/>
+                <a:cs typeface="Times New Roman" panose="02020603050405020304" pitchFamily="18" charset="0"/>
+              </a:rPr>
+              <a:t>DisplayCAL</a:t>
+            </a:r>
+            <a:r>
+              <a:rPr lang="en-US" altLang="zh-TW" sz="2000" dirty="0">
+                <a:solidFill>
+                  <a:schemeClr val="tx1"/>
+                </a:solidFill>
+                <a:latin typeface="Times New Roman" panose="02020603050405020304" pitchFamily="18" charset="0"/>
+                <a:ea typeface="標楷體" panose="03000509000000000000" pitchFamily="65" charset="-120"/>
+                <a:cs typeface="Times New Roman" panose="02020603050405020304" pitchFamily="18" charset="0"/>
+              </a:rPr>
+              <a:t> </a:t>
+            </a:r>
+            <a:r>
+              <a:rPr lang="zh-TW" altLang="en-US" sz="2000" dirty="0">
+                <a:solidFill>
+                  <a:schemeClr val="tx1"/>
+                </a:solidFill>
+                <a:latin typeface="Times New Roman" panose="02020603050405020304" pitchFamily="18" charset="0"/>
+                <a:ea typeface="標楷體" panose="03000509000000000000" pitchFamily="65" charset="-120"/>
+                <a:cs typeface="Times New Roman" panose="02020603050405020304" pitchFamily="18" charset="0"/>
+              </a:rPr>
+              <a:t>軟體校正流程</a:t>
+            </a:r>
+            <a:endParaRPr lang="en-US" altLang="zh-TW" sz="1400" dirty="0">
+              <a:solidFill>
+                <a:schemeClr val="tx1"/>
+              </a:solidFill>
+              <a:latin typeface="Times New Roman" panose="02020603050405020304" pitchFamily="18" charset="0"/>
+              <a:ea typeface="標楷體" panose="03000509000000000000" pitchFamily="65" charset="-120"/>
+              <a:cs typeface="Times New Roman" panose="02020603050405020304" pitchFamily="18" charset="0"/>
+            </a:endParaRPr>
+          </a:p>
+        </p:txBody>
+      </p:sp>
     </p:spTree>
     <p:extLst>
       <p:ext uri="{BB962C8B-B14F-4D97-AF65-F5344CB8AC3E}">
-        <p14:creationId xmlns:p14="http://schemas.microsoft.com/office/powerpoint/2010/main" val="2009003809"/>
+        <p14:creationId xmlns:p14="http://schemas.microsoft.com/office/powerpoint/2010/main" val="1853472209"/>
       </p:ext>
     </p:extLst>
   </p:cSld>
@@ -11253,6 +12562,523 @@
           <a:chExt cx="0" cy="0"/>
         </a:xfrm>
       </p:grpSpPr>
+      <p:sp>
+        <p:nvSpPr>
+          <p:cNvPr id="7" name="文字版面配置區 6">
+            <a:extLst>
+              <a:ext uri="{FF2B5EF4-FFF2-40B4-BE49-F238E27FC236}">
+                <a16:creationId xmlns:a16="http://schemas.microsoft.com/office/drawing/2014/main" id="{B361B4DF-3145-D829-F41F-4DFE4B01E588}"/>
+              </a:ext>
+            </a:extLst>
+          </p:cNvPr>
+          <p:cNvSpPr txBox="1"/>
+          <p:nvPr/>
+        </p:nvSpPr>
+        <p:spPr>
+          <a:xfrm>
+            <a:off x="609602" y="935857"/>
+            <a:ext cx="8686796" cy="4700685"/>
+          </a:xfrm>
+          <a:prstGeom prst="rect">
+            <a:avLst/>
+          </a:prstGeom>
+          <a:noFill/>
+          <a:ln>
+            <a:noFill/>
+          </a:ln>
+        </p:spPr>
+        <p:txBody>
+          <a:bodyPr spcFirstLastPara="1" wrap="square" lIns="91425" tIns="45700" rIns="91425" bIns="45700" anchor="t" anchorCtr="0">
+            <a:noAutofit/>
+          </a:bodyPr>
+          <a:lstStyle>
+            <a:defPPr marR="0" lvl="0" algn="l" rtl="0">
+              <a:lnSpc>
+                <a:spcPct val="100000"/>
+              </a:lnSpc>
+              <a:spcBef>
+                <a:spcPts val="0"/>
+              </a:spcBef>
+              <a:spcAft>
+                <a:spcPts val="0"/>
+              </a:spcAft>
+            </a:defPPr>
+            <a:lvl1pPr marL="457200" marR="0" lvl="0" indent="-406400" algn="l" rtl="0">
+              <a:lnSpc>
+                <a:spcPct val="100000"/>
+              </a:lnSpc>
+              <a:spcBef>
+                <a:spcPts val="560"/>
+              </a:spcBef>
+              <a:spcAft>
+                <a:spcPts val="0"/>
+              </a:spcAft>
+              <a:buClr>
+                <a:schemeClr val="accent2"/>
+              </a:buClr>
+              <a:buSzPts val="2800"/>
+              <a:buFont typeface="Noto Sans Symbols"/>
+              <a:buChar char="❖"/>
+              <a:defRPr sz="2800" b="0" i="0" u="none" strike="noStrike" cap="none">
+                <a:solidFill>
+                  <a:schemeClr val="dk1"/>
+                </a:solidFill>
+                <a:latin typeface="Times New Roman"/>
+                <a:ea typeface="Times New Roman"/>
+                <a:cs typeface="Times New Roman"/>
+                <a:sym typeface="Times New Roman"/>
+              </a:defRPr>
+            </a:lvl1pPr>
+            <a:lvl2pPr marL="914400" marR="0" lvl="1" indent="-381000" algn="l" rtl="0">
+              <a:lnSpc>
+                <a:spcPct val="100000"/>
+              </a:lnSpc>
+              <a:spcBef>
+                <a:spcPts val="480"/>
+              </a:spcBef>
+              <a:spcAft>
+                <a:spcPts val="0"/>
+              </a:spcAft>
+              <a:buClr>
+                <a:srgbClr val="FF5050"/>
+              </a:buClr>
+              <a:buSzPts val="2400"/>
+              <a:buFont typeface="Noto Sans Symbols"/>
+              <a:buChar char="▪"/>
+              <a:defRPr sz="2400" b="0" i="0" u="none" strike="noStrike" cap="none">
+                <a:solidFill>
+                  <a:schemeClr val="dk1"/>
+                </a:solidFill>
+                <a:latin typeface="Times New Roman"/>
+                <a:ea typeface="Times New Roman"/>
+                <a:cs typeface="Times New Roman"/>
+                <a:sym typeface="Times New Roman"/>
+              </a:defRPr>
+            </a:lvl2pPr>
+            <a:lvl3pPr marL="1371600" marR="0" lvl="2" indent="-355600" algn="l" rtl="0">
+              <a:lnSpc>
+                <a:spcPct val="100000"/>
+              </a:lnSpc>
+              <a:spcBef>
+                <a:spcPts val="400"/>
+              </a:spcBef>
+              <a:spcAft>
+                <a:spcPts val="0"/>
+              </a:spcAft>
+              <a:buClr>
+                <a:srgbClr val="6699FF"/>
+              </a:buClr>
+              <a:buSzPts val="2000"/>
+              <a:buFont typeface="Times New Roman"/>
+              <a:buChar char="•"/>
+              <a:defRPr sz="2000" b="0" i="0" u="none" strike="noStrike" cap="none">
+                <a:solidFill>
+                  <a:schemeClr val="dk1"/>
+                </a:solidFill>
+                <a:latin typeface="Times New Roman"/>
+                <a:ea typeface="Times New Roman"/>
+                <a:cs typeface="Times New Roman"/>
+                <a:sym typeface="Times New Roman"/>
+              </a:defRPr>
+            </a:lvl3pPr>
+            <a:lvl4pPr marL="1828800" marR="0" lvl="3" indent="-355600" algn="l" rtl="0">
+              <a:lnSpc>
+                <a:spcPct val="100000"/>
+              </a:lnSpc>
+              <a:spcBef>
+                <a:spcPts val="400"/>
+              </a:spcBef>
+              <a:spcAft>
+                <a:spcPts val="0"/>
+              </a:spcAft>
+              <a:buClr>
+                <a:srgbClr val="FF5050"/>
+              </a:buClr>
+              <a:buSzPts val="2000"/>
+              <a:buFont typeface="Times New Roman"/>
+              <a:buChar char="o"/>
+              <a:defRPr sz="2000" b="0" i="0" u="none" strike="noStrike" cap="none">
+                <a:solidFill>
+                  <a:schemeClr val="dk1"/>
+                </a:solidFill>
+                <a:latin typeface="Times New Roman"/>
+                <a:ea typeface="Times New Roman"/>
+                <a:cs typeface="Times New Roman"/>
+                <a:sym typeface="Times New Roman"/>
+              </a:defRPr>
+            </a:lvl4pPr>
+            <a:lvl5pPr marL="2286000" marR="0" lvl="4" indent="-355600" algn="l" rtl="0">
+              <a:lnSpc>
+                <a:spcPct val="100000"/>
+              </a:lnSpc>
+              <a:spcBef>
+                <a:spcPts val="400"/>
+              </a:spcBef>
+              <a:spcAft>
+                <a:spcPts val="0"/>
+              </a:spcAft>
+              <a:buClr>
+                <a:srgbClr val="FF5050"/>
+              </a:buClr>
+              <a:buSzPts val="2000"/>
+              <a:buFont typeface="Times New Roman"/>
+              <a:buChar char="o"/>
+              <a:defRPr sz="2000" b="0" i="0" u="none" strike="noStrike" cap="none">
+                <a:solidFill>
+                  <a:schemeClr val="dk1"/>
+                </a:solidFill>
+                <a:latin typeface="Times New Roman"/>
+                <a:ea typeface="Times New Roman"/>
+                <a:cs typeface="Times New Roman"/>
+                <a:sym typeface="Times New Roman"/>
+              </a:defRPr>
+            </a:lvl5pPr>
+            <a:lvl6pPr marL="2743200" marR="0" lvl="5" indent="-355600" algn="l" rtl="0">
+              <a:lnSpc>
+                <a:spcPct val="100000"/>
+              </a:lnSpc>
+              <a:spcBef>
+                <a:spcPts val="400"/>
+              </a:spcBef>
+              <a:spcAft>
+                <a:spcPts val="0"/>
+              </a:spcAft>
+              <a:buClr>
+                <a:srgbClr val="FF5050"/>
+              </a:buClr>
+              <a:buSzPts val="2000"/>
+              <a:buFont typeface="Times New Roman"/>
+              <a:buChar char="o"/>
+              <a:defRPr sz="2000" b="0" i="0" u="none" strike="noStrike" cap="none">
+                <a:solidFill>
+                  <a:schemeClr val="dk1"/>
+                </a:solidFill>
+                <a:latin typeface="Times New Roman"/>
+                <a:ea typeface="Times New Roman"/>
+                <a:cs typeface="Times New Roman"/>
+                <a:sym typeface="Times New Roman"/>
+              </a:defRPr>
+            </a:lvl6pPr>
+            <a:lvl7pPr marL="3200400" marR="0" lvl="6" indent="-355600" algn="l" rtl="0">
+              <a:lnSpc>
+                <a:spcPct val="100000"/>
+              </a:lnSpc>
+              <a:spcBef>
+                <a:spcPts val="400"/>
+              </a:spcBef>
+              <a:spcAft>
+                <a:spcPts val="0"/>
+              </a:spcAft>
+              <a:buClr>
+                <a:srgbClr val="FF5050"/>
+              </a:buClr>
+              <a:buSzPts val="2000"/>
+              <a:buFont typeface="Times New Roman"/>
+              <a:buChar char="o"/>
+              <a:defRPr sz="2000" b="0" i="0" u="none" strike="noStrike" cap="none">
+                <a:solidFill>
+                  <a:schemeClr val="dk1"/>
+                </a:solidFill>
+                <a:latin typeface="Times New Roman"/>
+                <a:ea typeface="Times New Roman"/>
+                <a:cs typeface="Times New Roman"/>
+                <a:sym typeface="Times New Roman"/>
+              </a:defRPr>
+            </a:lvl7pPr>
+            <a:lvl8pPr marL="3657600" marR="0" lvl="7" indent="-355600" algn="l" rtl="0">
+              <a:lnSpc>
+                <a:spcPct val="100000"/>
+              </a:lnSpc>
+              <a:spcBef>
+                <a:spcPts val="400"/>
+              </a:spcBef>
+              <a:spcAft>
+                <a:spcPts val="0"/>
+              </a:spcAft>
+              <a:buClr>
+                <a:srgbClr val="FF5050"/>
+              </a:buClr>
+              <a:buSzPts val="2000"/>
+              <a:buFont typeface="Times New Roman"/>
+              <a:buChar char="o"/>
+              <a:defRPr sz="2000" b="0" i="0" u="none" strike="noStrike" cap="none">
+                <a:solidFill>
+                  <a:schemeClr val="dk1"/>
+                </a:solidFill>
+                <a:latin typeface="Times New Roman"/>
+                <a:ea typeface="Times New Roman"/>
+                <a:cs typeface="Times New Roman"/>
+                <a:sym typeface="Times New Roman"/>
+              </a:defRPr>
+            </a:lvl8pPr>
+            <a:lvl9pPr marL="4114800" marR="0" lvl="8" indent="-355600" algn="l" rtl="0">
+              <a:lnSpc>
+                <a:spcPct val="100000"/>
+              </a:lnSpc>
+              <a:spcBef>
+                <a:spcPts val="400"/>
+              </a:spcBef>
+              <a:spcAft>
+                <a:spcPts val="0"/>
+              </a:spcAft>
+              <a:buClr>
+                <a:srgbClr val="FF5050"/>
+              </a:buClr>
+              <a:buSzPts val="2000"/>
+              <a:buFont typeface="Times New Roman"/>
+              <a:buChar char="o"/>
+              <a:defRPr sz="2000" b="0" i="0" u="none" strike="noStrike" cap="none">
+                <a:solidFill>
+                  <a:schemeClr val="dk1"/>
+                </a:solidFill>
+                <a:latin typeface="Times New Roman"/>
+                <a:ea typeface="Times New Roman"/>
+                <a:cs typeface="Times New Roman"/>
+                <a:sym typeface="Times New Roman"/>
+              </a:defRPr>
+            </a:lvl9pPr>
+          </a:lstStyle>
+          <a:p>
+            <a:pPr>
+              <a:lnSpc>
+                <a:spcPct val="150000"/>
+              </a:lnSpc>
+            </a:pPr>
+            <a:r>
+              <a:rPr lang="zh-TW" altLang="en-US" sz="2400" dirty="0">
+                <a:solidFill>
+                  <a:schemeClr val="tx1"/>
+                </a:solidFill>
+                <a:latin typeface="Times New Roman" panose="02020603050405020304" pitchFamily="18" charset="0"/>
+                <a:ea typeface="標楷體" panose="03000509000000000000" pitchFamily="65" charset="-120"/>
+                <a:cs typeface="Times New Roman" panose="02020603050405020304" pitchFamily="18" charset="0"/>
+              </a:rPr>
+              <a:t> </a:t>
+            </a:r>
+            <a:r>
+              <a:rPr lang="zh-TW" altLang="en-US" sz="2000" dirty="0">
+                <a:solidFill>
+                  <a:schemeClr val="tx1"/>
+                </a:solidFill>
+                <a:latin typeface="Times New Roman" panose="02020603050405020304" pitchFamily="18" charset="0"/>
+                <a:ea typeface="標楷體" panose="03000509000000000000" pitchFamily="65" charset="-120"/>
+                <a:cs typeface="Times New Roman" panose="02020603050405020304" pitchFamily="18" charset="0"/>
+              </a:rPr>
+              <a:t>測試這 </a:t>
+            </a:r>
+            <a:r>
+              <a:rPr lang="en-US" altLang="zh-TW" sz="2000" dirty="0">
+                <a:solidFill>
+                  <a:schemeClr val="tx1"/>
+                </a:solidFill>
+                <a:latin typeface="Times New Roman" panose="02020603050405020304" pitchFamily="18" charset="0"/>
+                <a:ea typeface="標楷體" panose="03000509000000000000" pitchFamily="65" charset="-120"/>
+                <a:cs typeface="Times New Roman" panose="02020603050405020304" pitchFamily="18" charset="0"/>
+              </a:rPr>
+              <a:t>12</a:t>
+            </a:r>
+            <a:r>
+              <a:rPr lang="zh-TW" altLang="en-US" sz="2000" dirty="0">
+                <a:solidFill>
+                  <a:schemeClr val="tx1"/>
+                </a:solidFill>
+                <a:latin typeface="Times New Roman" panose="02020603050405020304" pitchFamily="18" charset="0"/>
+                <a:ea typeface="標楷體" panose="03000509000000000000" pitchFamily="65" charset="-120"/>
+                <a:cs typeface="Times New Roman" panose="02020603050405020304" pitchFamily="18" charset="0"/>
+              </a:rPr>
+              <a:t> 個 </a:t>
+            </a:r>
+            <a:r>
+              <a:rPr lang="en-US" altLang="zh-TW" sz="2000" dirty="0">
+                <a:solidFill>
+                  <a:schemeClr val="tx1"/>
+                </a:solidFill>
+                <a:latin typeface="Times New Roman" panose="02020603050405020304" pitchFamily="18" charset="0"/>
+                <a:ea typeface="標楷體" panose="03000509000000000000" pitchFamily="65" charset="-120"/>
+                <a:cs typeface="Times New Roman" panose="02020603050405020304" pitchFamily="18" charset="0"/>
+              </a:rPr>
+              <a:t>ICC Profile </a:t>
+            </a:r>
+            <a:r>
+              <a:rPr lang="zh-TW" altLang="en-US" sz="2000" dirty="0">
+                <a:solidFill>
+                  <a:schemeClr val="tx1"/>
+                </a:solidFill>
+                <a:latin typeface="Times New Roman" panose="02020603050405020304" pitchFamily="18" charset="0"/>
+                <a:ea typeface="標楷體" panose="03000509000000000000" pitchFamily="65" charset="-120"/>
+                <a:cs typeface="Times New Roman" panose="02020603050405020304" pitchFamily="18" charset="0"/>
+              </a:rPr>
+              <a:t>的色溫</a:t>
+            </a:r>
+            <a:endParaRPr lang="en-US" altLang="zh-TW" sz="2000" dirty="0">
+              <a:solidFill>
+                <a:schemeClr val="tx1"/>
+              </a:solidFill>
+              <a:latin typeface="Times New Roman" panose="02020603050405020304" pitchFamily="18" charset="0"/>
+              <a:ea typeface="標楷體" panose="03000509000000000000" pitchFamily="65" charset="-120"/>
+              <a:cs typeface="Times New Roman" panose="02020603050405020304" pitchFamily="18" charset="0"/>
+            </a:endParaRPr>
+          </a:p>
+          <a:p>
+            <a:pPr lvl="1">
+              <a:lnSpc>
+                <a:spcPts val="3000"/>
+              </a:lnSpc>
+            </a:pPr>
+            <a:r>
+              <a:rPr lang="zh-TW" altLang="en-US" sz="1600" dirty="0">
+                <a:solidFill>
+                  <a:schemeClr val="tx1"/>
+                </a:solidFill>
+                <a:latin typeface="Times New Roman" panose="02020603050405020304" pitchFamily="18" charset="0"/>
+                <a:ea typeface="標楷體" panose="03000509000000000000" pitchFamily="65" charset="-120"/>
+                <a:cs typeface="Times New Roman" panose="02020603050405020304" pitchFamily="18" charset="0"/>
+              </a:rPr>
+              <a:t>測試項目：</a:t>
+            </a:r>
+            <a:r>
+              <a:rPr lang="en-US" altLang="zh-TW" sz="1600" dirty="0">
+                <a:solidFill>
+                  <a:schemeClr val="tx1"/>
+                </a:solidFill>
+                <a:latin typeface="Times New Roman" panose="02020603050405020304" pitchFamily="18" charset="0"/>
+                <a:ea typeface="標楷體" panose="03000509000000000000" pitchFamily="65" charset="-120"/>
+                <a:cs typeface="Times New Roman" panose="02020603050405020304" pitchFamily="18" charset="0"/>
+              </a:rPr>
+              <a:t>Gamma 1.8 </a:t>
+            </a:r>
+            <a:r>
+              <a:rPr lang="zh-TW" altLang="en-US" sz="1600" dirty="0">
+                <a:solidFill>
+                  <a:schemeClr val="tx1"/>
+                </a:solidFill>
+                <a:latin typeface="Times New Roman" panose="02020603050405020304" pitchFamily="18" charset="0"/>
+                <a:ea typeface="標楷體" panose="03000509000000000000" pitchFamily="65" charset="-120"/>
+                <a:cs typeface="Times New Roman" panose="02020603050405020304" pitchFamily="18" charset="0"/>
+              </a:rPr>
+              <a:t>  </a:t>
+            </a:r>
+            <a:r>
+              <a:rPr lang="en-US" altLang="zh-TW" sz="1600" dirty="0">
+                <a:solidFill>
+                  <a:schemeClr val="tx1"/>
+                </a:solidFill>
+                <a:latin typeface="Times New Roman" panose="02020603050405020304" pitchFamily="18" charset="0"/>
+                <a:ea typeface="標楷體" panose="03000509000000000000" pitchFamily="65" charset="-120"/>
+                <a:cs typeface="Times New Roman" panose="02020603050405020304" pitchFamily="18" charset="0"/>
+              </a:rPr>
+              <a:t>2.0 </a:t>
+            </a:r>
+            <a:r>
+              <a:rPr lang="zh-TW" altLang="en-US" sz="1600" dirty="0">
+                <a:solidFill>
+                  <a:schemeClr val="tx1"/>
+                </a:solidFill>
+                <a:latin typeface="Times New Roman" panose="02020603050405020304" pitchFamily="18" charset="0"/>
+                <a:ea typeface="標楷體" panose="03000509000000000000" pitchFamily="65" charset="-120"/>
+                <a:cs typeface="Times New Roman" panose="02020603050405020304" pitchFamily="18" charset="0"/>
+              </a:rPr>
+              <a:t>  </a:t>
+            </a:r>
+            <a:r>
+              <a:rPr lang="en-US" altLang="zh-TW" sz="1600" dirty="0">
+                <a:solidFill>
+                  <a:schemeClr val="tx1"/>
+                </a:solidFill>
+                <a:latin typeface="Times New Roman" panose="02020603050405020304" pitchFamily="18" charset="0"/>
+                <a:ea typeface="標楷體" panose="03000509000000000000" pitchFamily="65" charset="-120"/>
+                <a:cs typeface="Times New Roman" panose="02020603050405020304" pitchFamily="18" charset="0"/>
+              </a:rPr>
+              <a:t>2.2 </a:t>
+            </a:r>
+            <a:r>
+              <a:rPr lang="zh-TW" altLang="en-US" sz="1600" dirty="0">
+                <a:solidFill>
+                  <a:schemeClr val="tx1"/>
+                </a:solidFill>
+                <a:latin typeface="Times New Roman" panose="02020603050405020304" pitchFamily="18" charset="0"/>
+                <a:ea typeface="標楷體" panose="03000509000000000000" pitchFamily="65" charset="-120"/>
+                <a:cs typeface="Times New Roman" panose="02020603050405020304" pitchFamily="18" charset="0"/>
+              </a:rPr>
+              <a:t>  </a:t>
+            </a:r>
+            <a:r>
+              <a:rPr lang="en-US" altLang="zh-TW" sz="1600" dirty="0">
+                <a:solidFill>
+                  <a:schemeClr val="tx1"/>
+                </a:solidFill>
+                <a:latin typeface="Times New Roman" panose="02020603050405020304" pitchFamily="18" charset="0"/>
+                <a:ea typeface="標楷體" panose="03000509000000000000" pitchFamily="65" charset="-120"/>
+                <a:cs typeface="Times New Roman" panose="02020603050405020304" pitchFamily="18" charset="0"/>
+              </a:rPr>
+              <a:t>2.6</a:t>
+            </a:r>
+            <a:r>
+              <a:rPr lang="zh-TW" altLang="en-US" sz="1600" dirty="0">
+                <a:solidFill>
+                  <a:schemeClr val="tx1"/>
+                </a:solidFill>
+                <a:latin typeface="Times New Roman" panose="02020603050405020304" pitchFamily="18" charset="0"/>
+                <a:ea typeface="標楷體" panose="03000509000000000000" pitchFamily="65" charset="-120"/>
+                <a:cs typeface="Times New Roman" panose="02020603050405020304" pitchFamily="18" charset="0"/>
+              </a:rPr>
+              <a:t>，搭配三組色溫進行測試</a:t>
+            </a:r>
+            <a:endParaRPr lang="en-US" altLang="zh-TW" sz="1200" dirty="0">
+              <a:solidFill>
+                <a:schemeClr val="tx1"/>
+              </a:solidFill>
+              <a:latin typeface="Times New Roman" panose="02020603050405020304" pitchFamily="18" charset="0"/>
+              <a:ea typeface="標楷體" panose="03000509000000000000" pitchFamily="65" charset="-120"/>
+              <a:cs typeface="Times New Roman" panose="02020603050405020304" pitchFamily="18" charset="0"/>
+            </a:endParaRPr>
+          </a:p>
+          <a:p>
+            <a:pPr lvl="1">
+              <a:lnSpc>
+                <a:spcPts val="3000"/>
+              </a:lnSpc>
+            </a:pPr>
+            <a:r>
+              <a:rPr lang="zh-TW" altLang="en-US" sz="1600" dirty="0">
+                <a:solidFill>
+                  <a:schemeClr val="tx1"/>
+                </a:solidFill>
+                <a:latin typeface="Times New Roman" panose="02020603050405020304" pitchFamily="18" charset="0"/>
+                <a:ea typeface="標楷體" panose="03000509000000000000" pitchFamily="65" charset="-120"/>
+                <a:cs typeface="Times New Roman" panose="02020603050405020304" pitchFamily="18" charset="0"/>
+              </a:rPr>
+              <a:t>量測標準：色溫誤差為 </a:t>
+            </a:r>
+            <a:r>
+              <a:rPr lang="en-US" altLang="zh-TW" sz="1600" dirty="0">
+                <a:solidFill>
+                  <a:schemeClr val="tx1"/>
+                </a:solidFill>
+                <a:latin typeface="Times New Roman" panose="02020603050405020304" pitchFamily="18" charset="0"/>
+                <a:ea typeface="標楷體" panose="03000509000000000000" pitchFamily="65" charset="-120"/>
+                <a:cs typeface="Times New Roman" panose="02020603050405020304" pitchFamily="18" charset="0"/>
+              </a:rPr>
+              <a:t>± 1000k</a:t>
+            </a:r>
+          </a:p>
+          <a:p>
+            <a:pPr lvl="1">
+              <a:lnSpc>
+                <a:spcPct val="150000"/>
+              </a:lnSpc>
+            </a:pPr>
+            <a:endParaRPr lang="en-US" altLang="zh-TW" sz="1600" dirty="0">
+              <a:solidFill>
+                <a:schemeClr val="tx1"/>
+              </a:solidFill>
+              <a:latin typeface="Times New Roman" panose="02020603050405020304" pitchFamily="18" charset="0"/>
+              <a:ea typeface="標楷體" panose="03000509000000000000" pitchFamily="65" charset="-120"/>
+              <a:cs typeface="Times New Roman" panose="02020603050405020304" pitchFamily="18" charset="0"/>
+            </a:endParaRPr>
+          </a:p>
+        </p:txBody>
+      </p:sp>
       <p:sp>
         <p:nvSpPr>
           <p:cNvPr id="15" name="標題 1">
@@ -11296,7 +13122,15 @@
                 <a:ea typeface="標楷體" panose="03000509000000000000" pitchFamily="65" charset="-120"/>
                 <a:cs typeface="Times New Roman" panose="02020603050405020304" pitchFamily="18" charset="0"/>
               </a:rPr>
-              <a:t>:</a:t>
+              <a:t>: </a:t>
+            </a:r>
+            <a:r>
+              <a:rPr lang="en-US" altLang="zh-TW" dirty="0" err="1">
+                <a:latin typeface="Times New Roman" panose="02020603050405020304" pitchFamily="18" charset="0"/>
+                <a:ea typeface="標楷體" panose="03000509000000000000" pitchFamily="65" charset="-120"/>
+                <a:cs typeface="Times New Roman" panose="02020603050405020304" pitchFamily="18" charset="0"/>
+              </a:rPr>
+              <a:t>DisplayCAL</a:t>
             </a:r>
             <a:r>
               <a:rPr lang="zh-TW" altLang="en-US" dirty="0">
@@ -11306,56 +13140,1704 @@
               </a:rPr>
               <a:t> </a:t>
             </a:r>
-            <a:r>
-              <a:rPr lang="en-US" altLang="zh-TW" dirty="0" err="1">
-                <a:latin typeface="Times New Roman" panose="02020603050405020304" pitchFamily="18" charset="0"/>
-                <a:ea typeface="標楷體" panose="03000509000000000000" pitchFamily="65" charset="-120"/>
-                <a:cs typeface="Times New Roman" panose="02020603050405020304" pitchFamily="18" charset="0"/>
-              </a:rPr>
-              <a:t>DisplayCAL</a:t>
-            </a:r>
-            <a:endParaRPr lang="zh-TW" altLang="en-US" dirty="0">
-              <a:latin typeface="Times New Roman" panose="02020603050405020304" pitchFamily="18" charset="0"/>
-              <a:ea typeface="標楷體" panose="03000509000000000000" pitchFamily="65" charset="-120"/>
-              <a:cs typeface="Times New Roman" panose="02020603050405020304" pitchFamily="18" charset="0"/>
-            </a:endParaRPr>
           </a:p>
         </p:txBody>
       </p:sp>
-      <p:pic>
-        <p:nvPicPr>
-          <p:cNvPr id="10" name="圖片 9">
+      <p:graphicFrame>
+        <p:nvGraphicFramePr>
+          <p:cNvPr id="6" name="表格 5">
             <a:extLst>
               <a:ext uri="{FF2B5EF4-FFF2-40B4-BE49-F238E27FC236}">
-                <a16:creationId xmlns:a16="http://schemas.microsoft.com/office/drawing/2014/main" id="{40843149-7062-BFDD-E31E-041AF4BEDB92}"/>
+                <a16:creationId xmlns:a16="http://schemas.microsoft.com/office/drawing/2014/main" id="{E7007B64-5068-9DCF-2AF2-9BFF81565394}"/>
               </a:ext>
             </a:extLst>
           </p:cNvPr>
-          <p:cNvPicPr>
-            <a:picLocks noChangeAspect="1"/>
-          </p:cNvPicPr>
-          <p:nvPr/>
-        </p:nvPicPr>
-        <p:blipFill>
-          <a:blip r:embed="rId3"/>
-          <a:stretch>
-            <a:fillRect/>
-          </a:stretch>
-        </p:blipFill>
-        <p:spPr>
-          <a:xfrm>
-            <a:off x="1521611" y="1312692"/>
-            <a:ext cx="6862778" cy="5011907"/>
-          </a:xfrm>
-          <a:prstGeom prst="rect">
-            <a:avLst/>
-          </a:prstGeom>
-        </p:spPr>
-      </p:pic>
+          <p:cNvGraphicFramePr>
+            <a:graphicFrameLocks noGrp="1"/>
+          </p:cNvGraphicFramePr>
+          <p:nvPr>
+            <p:extLst>
+              <p:ext uri="{D42A27DB-BD31-4B8C-83A1-F6EECF244321}">
+                <p14:modId xmlns:p14="http://schemas.microsoft.com/office/powerpoint/2010/main" val="246023639"/>
+              </p:ext>
+            </p:extLst>
+          </p:nvPr>
+        </p:nvGraphicFramePr>
+        <p:xfrm>
+          <a:off x="2578179" y="2554587"/>
+          <a:ext cx="4749641" cy="4152873"/>
+        </p:xfrm>
+        <a:graphic>
+          <a:graphicData uri="http://schemas.openxmlformats.org/drawingml/2006/table">
+            <a:tbl>
+              <a:tblPr firstRow="1" firstCol="1" bandRow="1">
+                <a:tableStyleId>{21E4AEA4-8DFA-4A89-87EB-49C32662AFE0}</a:tableStyleId>
+              </a:tblPr>
+              <a:tblGrid>
+                <a:gridCol w="915595">
+                  <a:extLst>
+                    <a:ext uri="{9D8B030D-6E8A-4147-A177-3AD203B41FA5}">
+                      <a16:colId xmlns:a16="http://schemas.microsoft.com/office/drawing/2014/main" val="3290470944"/>
+                    </a:ext>
+                  </a:extLst>
+                </a:gridCol>
+                <a:gridCol w="1258941">
+                  <a:extLst>
+                    <a:ext uri="{9D8B030D-6E8A-4147-A177-3AD203B41FA5}">
+                      <a16:colId xmlns:a16="http://schemas.microsoft.com/office/drawing/2014/main" val="1708128821"/>
+                    </a:ext>
+                  </a:extLst>
+                </a:gridCol>
+                <a:gridCol w="1316164">
+                  <a:extLst>
+                    <a:ext uri="{9D8B030D-6E8A-4147-A177-3AD203B41FA5}">
+                      <a16:colId xmlns:a16="http://schemas.microsoft.com/office/drawing/2014/main" val="881486529"/>
+                    </a:ext>
+                  </a:extLst>
+                </a:gridCol>
+                <a:gridCol w="1258941">
+                  <a:extLst>
+                    <a:ext uri="{9D8B030D-6E8A-4147-A177-3AD203B41FA5}">
+                      <a16:colId xmlns:a16="http://schemas.microsoft.com/office/drawing/2014/main" val="1566819237"/>
+                    </a:ext>
+                  </a:extLst>
+                </a:gridCol>
+              </a:tblGrid>
+              <a:tr h="608673">
+                <a:tc>
+                  <a:txBody>
+                    <a:bodyPr/>
+                    <a:lstStyle/>
+                    <a:p>
+                      <a:pPr algn="ctr">
+                        <a:lnSpc>
+                          <a:spcPct val="115000"/>
+                        </a:lnSpc>
+                        <a:spcAft>
+                          <a:spcPts val="800"/>
+                        </a:spcAft>
+                      </a:pPr>
+                      <a:r>
+                        <a:rPr lang="en-US" sz="1400" kern="0" dirty="0">
+                          <a:effectLst/>
+                          <a:latin typeface="Times New Roman" panose="02020603050405020304" pitchFamily="18" charset="0"/>
+                          <a:ea typeface="標楷體" panose="03000509000000000000" pitchFamily="65" charset="-120"/>
+                          <a:cs typeface="Times New Roman" panose="02020603050405020304" pitchFamily="18" charset="0"/>
+                        </a:rPr>
+                        <a:t>Gamma</a:t>
+                      </a:r>
+                      <a:endParaRPr lang="zh-TW" sz="1400" kern="100" dirty="0">
+                        <a:effectLst/>
+                        <a:latin typeface="Times New Roman" panose="02020603050405020304" pitchFamily="18" charset="0"/>
+                        <a:ea typeface="標楷體" panose="03000509000000000000" pitchFamily="65" charset="-120"/>
+                        <a:cs typeface="Times New Roman" panose="02020603050405020304" pitchFamily="18" charset="0"/>
+                      </a:endParaRPr>
+                    </a:p>
+                  </a:txBody>
+                  <a:tcPr marL="110965" marR="110965" marT="0" marB="0" anchor="ctr"/>
+                </a:tc>
+                <a:tc>
+                  <a:txBody>
+                    <a:bodyPr/>
+                    <a:lstStyle/>
+                    <a:p>
+                      <a:pPr algn="ctr">
+                        <a:lnSpc>
+                          <a:spcPct val="115000"/>
+                        </a:lnSpc>
+                        <a:spcAft>
+                          <a:spcPts val="800"/>
+                        </a:spcAft>
+                      </a:pPr>
+                      <a:r>
+                        <a:rPr lang="zh-TW" sz="1700" kern="0">
+                          <a:effectLst/>
+                          <a:latin typeface="Times New Roman" panose="02020603050405020304" pitchFamily="18" charset="0"/>
+                          <a:ea typeface="標楷體" panose="03000509000000000000" pitchFamily="65" charset="-120"/>
+                          <a:cs typeface="Times New Roman" panose="02020603050405020304" pitchFamily="18" charset="0"/>
+                        </a:rPr>
+                        <a:t>色溫</a:t>
+                      </a:r>
+                      <a:endParaRPr lang="zh-TW" sz="1700" kern="100">
+                        <a:effectLst/>
+                        <a:latin typeface="Times New Roman" panose="02020603050405020304" pitchFamily="18" charset="0"/>
+                        <a:ea typeface="標楷體" panose="03000509000000000000" pitchFamily="65" charset="-120"/>
+                        <a:cs typeface="Times New Roman" panose="02020603050405020304" pitchFamily="18" charset="0"/>
+                      </a:endParaRPr>
+                    </a:p>
+                  </a:txBody>
+                  <a:tcPr marL="110965" marR="110965" marT="0" marB="0" anchor="ctr"/>
+                </a:tc>
+                <a:tc>
+                  <a:txBody>
+                    <a:bodyPr/>
+                    <a:lstStyle/>
+                    <a:p>
+                      <a:pPr algn="ctr">
+                        <a:lnSpc>
+                          <a:spcPct val="115000"/>
+                        </a:lnSpc>
+                        <a:spcAft>
+                          <a:spcPts val="800"/>
+                        </a:spcAft>
+                      </a:pPr>
+                      <a:r>
+                        <a:rPr lang="zh-TW" sz="1700" kern="0">
+                          <a:effectLst/>
+                          <a:latin typeface="Times New Roman" panose="02020603050405020304" pitchFamily="18" charset="0"/>
+                          <a:ea typeface="標楷體" panose="03000509000000000000" pitchFamily="65" charset="-120"/>
+                          <a:cs typeface="Times New Roman" panose="02020603050405020304" pitchFamily="18" charset="0"/>
+                        </a:rPr>
+                        <a:t>量測色溫</a:t>
+                      </a:r>
+                      <a:endParaRPr lang="zh-TW" sz="1700" kern="100">
+                        <a:effectLst/>
+                        <a:latin typeface="Times New Roman" panose="02020603050405020304" pitchFamily="18" charset="0"/>
+                        <a:ea typeface="標楷體" panose="03000509000000000000" pitchFamily="65" charset="-120"/>
+                        <a:cs typeface="Times New Roman" panose="02020603050405020304" pitchFamily="18" charset="0"/>
+                      </a:endParaRPr>
+                    </a:p>
+                  </a:txBody>
+                  <a:tcPr marL="110965" marR="110965" marT="0" marB="0" anchor="ctr"/>
+                </a:tc>
+                <a:tc>
+                  <a:txBody>
+                    <a:bodyPr/>
+                    <a:lstStyle/>
+                    <a:p>
+                      <a:pPr algn="ctr">
+                        <a:lnSpc>
+                          <a:spcPct val="115000"/>
+                        </a:lnSpc>
+                        <a:spcAft>
+                          <a:spcPts val="800"/>
+                        </a:spcAft>
+                      </a:pPr>
+                      <a:r>
+                        <a:rPr lang="zh-TW" sz="1700" kern="0">
+                          <a:effectLst/>
+                          <a:latin typeface="Times New Roman" panose="02020603050405020304" pitchFamily="18" charset="0"/>
+                          <a:ea typeface="標楷體" panose="03000509000000000000" pitchFamily="65" charset="-120"/>
+                          <a:cs typeface="Times New Roman" panose="02020603050405020304" pitchFamily="18" charset="0"/>
+                        </a:rPr>
+                        <a:t>誤差</a:t>
+                      </a:r>
+                      <a:endParaRPr lang="zh-TW" sz="1700" kern="100">
+                        <a:effectLst/>
+                        <a:latin typeface="Times New Roman" panose="02020603050405020304" pitchFamily="18" charset="0"/>
+                        <a:ea typeface="標楷體" panose="03000509000000000000" pitchFamily="65" charset="-120"/>
+                        <a:cs typeface="Times New Roman" panose="02020603050405020304" pitchFamily="18" charset="0"/>
+                      </a:endParaRPr>
+                    </a:p>
+                  </a:txBody>
+                  <a:tcPr marL="110965" marR="110965" marT="0" marB="0" anchor="ctr"/>
+                </a:tc>
+                <a:extLst>
+                  <a:ext uri="{0D108BD9-81ED-4DB2-BD59-A6C34878D82A}">
+                    <a16:rowId xmlns:a16="http://schemas.microsoft.com/office/drawing/2014/main" val="2915106299"/>
+                  </a:ext>
+                </a:extLst>
+              </a:tr>
+              <a:tr h="295350">
+                <a:tc>
+                  <a:txBody>
+                    <a:bodyPr/>
+                    <a:lstStyle/>
+                    <a:p>
+                      <a:pPr algn="ctr">
+                        <a:lnSpc>
+                          <a:spcPct val="115000"/>
+                        </a:lnSpc>
+                        <a:spcAft>
+                          <a:spcPts val="800"/>
+                        </a:spcAft>
+                      </a:pPr>
+                      <a:r>
+                        <a:rPr lang="en-US" sz="1700" kern="0">
+                          <a:effectLst/>
+                          <a:latin typeface="Times New Roman" panose="02020603050405020304" pitchFamily="18" charset="0"/>
+                          <a:ea typeface="標楷體" panose="03000509000000000000" pitchFamily="65" charset="-120"/>
+                          <a:cs typeface="Times New Roman" panose="02020603050405020304" pitchFamily="18" charset="0"/>
+                        </a:rPr>
+                        <a:t>1.8</a:t>
+                      </a:r>
+                      <a:endParaRPr lang="zh-TW" sz="1700" kern="100">
+                        <a:effectLst/>
+                        <a:latin typeface="Times New Roman" panose="02020603050405020304" pitchFamily="18" charset="0"/>
+                        <a:ea typeface="標楷體" panose="03000509000000000000" pitchFamily="65" charset="-120"/>
+                        <a:cs typeface="Times New Roman" panose="02020603050405020304" pitchFamily="18" charset="0"/>
+                      </a:endParaRPr>
+                    </a:p>
+                  </a:txBody>
+                  <a:tcPr marL="110965" marR="110965" marT="0" marB="0" anchor="ctr"/>
+                </a:tc>
+                <a:tc>
+                  <a:txBody>
+                    <a:bodyPr/>
+                    <a:lstStyle/>
+                    <a:p>
+                      <a:pPr algn="ctr">
+                        <a:lnSpc>
+                          <a:spcPct val="115000"/>
+                        </a:lnSpc>
+                        <a:spcAft>
+                          <a:spcPts val="800"/>
+                        </a:spcAft>
+                      </a:pPr>
+                      <a:r>
+                        <a:rPr lang="en-US" sz="1700" kern="0" dirty="0">
+                          <a:effectLst/>
+                          <a:latin typeface="Times New Roman" panose="02020603050405020304" pitchFamily="18" charset="0"/>
+                          <a:ea typeface="標楷體" panose="03000509000000000000" pitchFamily="65" charset="-120"/>
+                          <a:cs typeface="Times New Roman" panose="02020603050405020304" pitchFamily="18" charset="0"/>
+                        </a:rPr>
+                        <a:t>5400</a:t>
+                      </a:r>
+                      <a:endParaRPr lang="zh-TW" sz="1700" kern="100" dirty="0">
+                        <a:effectLst/>
+                        <a:latin typeface="Times New Roman" panose="02020603050405020304" pitchFamily="18" charset="0"/>
+                        <a:ea typeface="標楷體" panose="03000509000000000000" pitchFamily="65" charset="-120"/>
+                        <a:cs typeface="Times New Roman" panose="02020603050405020304" pitchFamily="18" charset="0"/>
+                      </a:endParaRPr>
+                    </a:p>
+                  </a:txBody>
+                  <a:tcPr marL="110965" marR="110965" marT="0" marB="0" anchor="ctr"/>
+                </a:tc>
+                <a:tc>
+                  <a:txBody>
+                    <a:bodyPr/>
+                    <a:lstStyle/>
+                    <a:p>
+                      <a:pPr algn="ctr">
+                        <a:lnSpc>
+                          <a:spcPct val="115000"/>
+                        </a:lnSpc>
+                        <a:spcAft>
+                          <a:spcPts val="800"/>
+                        </a:spcAft>
+                      </a:pPr>
+                      <a:r>
+                        <a:rPr lang="en-US" sz="1700" kern="0">
+                          <a:effectLst/>
+                          <a:latin typeface="Times New Roman" panose="02020603050405020304" pitchFamily="18" charset="0"/>
+                          <a:ea typeface="標楷體" panose="03000509000000000000" pitchFamily="65" charset="-120"/>
+                          <a:cs typeface="Times New Roman" panose="02020603050405020304" pitchFamily="18" charset="0"/>
+                        </a:rPr>
+                        <a:t>5352</a:t>
+                      </a:r>
+                      <a:endParaRPr lang="zh-TW" sz="1700" kern="100">
+                        <a:effectLst/>
+                        <a:latin typeface="Times New Roman" panose="02020603050405020304" pitchFamily="18" charset="0"/>
+                        <a:ea typeface="標楷體" panose="03000509000000000000" pitchFamily="65" charset="-120"/>
+                        <a:cs typeface="Times New Roman" panose="02020603050405020304" pitchFamily="18" charset="0"/>
+                      </a:endParaRPr>
+                    </a:p>
+                  </a:txBody>
+                  <a:tcPr marL="110965" marR="110965" marT="0" marB="0" anchor="ctr"/>
+                </a:tc>
+                <a:tc>
+                  <a:txBody>
+                    <a:bodyPr/>
+                    <a:lstStyle/>
+                    <a:p>
+                      <a:pPr algn="ctr">
+                        <a:lnSpc>
+                          <a:spcPct val="115000"/>
+                        </a:lnSpc>
+                        <a:spcAft>
+                          <a:spcPts val="800"/>
+                        </a:spcAft>
+                      </a:pPr>
+                      <a:r>
+                        <a:rPr lang="en-US" sz="1700" kern="0">
+                          <a:effectLst/>
+                          <a:latin typeface="Times New Roman" panose="02020603050405020304" pitchFamily="18" charset="0"/>
+                          <a:ea typeface="標楷體" panose="03000509000000000000" pitchFamily="65" charset="-120"/>
+                          <a:cs typeface="Times New Roman" panose="02020603050405020304" pitchFamily="18" charset="0"/>
+                        </a:rPr>
+                        <a:t>48</a:t>
+                      </a:r>
+                      <a:endParaRPr lang="zh-TW" sz="1700" kern="100">
+                        <a:effectLst/>
+                        <a:latin typeface="Times New Roman" panose="02020603050405020304" pitchFamily="18" charset="0"/>
+                        <a:ea typeface="標楷體" panose="03000509000000000000" pitchFamily="65" charset="-120"/>
+                        <a:cs typeface="Times New Roman" panose="02020603050405020304" pitchFamily="18" charset="0"/>
+                      </a:endParaRPr>
+                    </a:p>
+                  </a:txBody>
+                  <a:tcPr marL="110965" marR="110965" marT="0" marB="0" anchor="ctr"/>
+                </a:tc>
+                <a:extLst>
+                  <a:ext uri="{0D108BD9-81ED-4DB2-BD59-A6C34878D82A}">
+                    <a16:rowId xmlns:a16="http://schemas.microsoft.com/office/drawing/2014/main" val="3578564214"/>
+                  </a:ext>
+                </a:extLst>
+              </a:tr>
+              <a:tr h="295350">
+                <a:tc>
+                  <a:txBody>
+                    <a:bodyPr/>
+                    <a:lstStyle/>
+                    <a:p>
+                      <a:pPr algn="ctr"/>
+                      <a:endParaRPr lang="zh-TW" sz="1700" kern="100">
+                        <a:effectLst/>
+                        <a:latin typeface="Times New Roman" panose="02020603050405020304" pitchFamily="18" charset="0"/>
+                        <a:ea typeface="標楷體" panose="03000509000000000000" pitchFamily="65" charset="-120"/>
+                        <a:cs typeface="Times New Roman" panose="02020603050405020304" pitchFamily="18" charset="0"/>
+                      </a:endParaRPr>
+                    </a:p>
+                  </a:txBody>
+                  <a:tcPr marL="110965" marR="110965" marT="0" marB="0" anchor="ctr"/>
+                </a:tc>
+                <a:tc>
+                  <a:txBody>
+                    <a:bodyPr/>
+                    <a:lstStyle/>
+                    <a:p>
+                      <a:pPr algn="ctr">
+                        <a:lnSpc>
+                          <a:spcPct val="115000"/>
+                        </a:lnSpc>
+                        <a:spcAft>
+                          <a:spcPts val="800"/>
+                        </a:spcAft>
+                      </a:pPr>
+                      <a:r>
+                        <a:rPr lang="en-US" sz="1700" kern="0">
+                          <a:effectLst/>
+                          <a:latin typeface="Times New Roman" panose="02020603050405020304" pitchFamily="18" charset="0"/>
+                          <a:ea typeface="標楷體" panose="03000509000000000000" pitchFamily="65" charset="-120"/>
+                          <a:cs typeface="Times New Roman" panose="02020603050405020304" pitchFamily="18" charset="0"/>
+                        </a:rPr>
+                        <a:t>6500</a:t>
+                      </a:r>
+                      <a:endParaRPr lang="zh-TW" sz="1700" kern="100">
+                        <a:effectLst/>
+                        <a:latin typeface="Times New Roman" panose="02020603050405020304" pitchFamily="18" charset="0"/>
+                        <a:ea typeface="標楷體" panose="03000509000000000000" pitchFamily="65" charset="-120"/>
+                        <a:cs typeface="Times New Roman" panose="02020603050405020304" pitchFamily="18" charset="0"/>
+                      </a:endParaRPr>
+                    </a:p>
+                  </a:txBody>
+                  <a:tcPr marL="110965" marR="110965" marT="0" marB="0" anchor="ctr"/>
+                </a:tc>
+                <a:tc>
+                  <a:txBody>
+                    <a:bodyPr/>
+                    <a:lstStyle/>
+                    <a:p>
+                      <a:pPr algn="ctr">
+                        <a:lnSpc>
+                          <a:spcPct val="115000"/>
+                        </a:lnSpc>
+                        <a:spcAft>
+                          <a:spcPts val="800"/>
+                        </a:spcAft>
+                      </a:pPr>
+                      <a:r>
+                        <a:rPr lang="en-US" sz="1700" kern="0">
+                          <a:effectLst/>
+                          <a:latin typeface="Times New Roman" panose="02020603050405020304" pitchFamily="18" charset="0"/>
+                          <a:ea typeface="標楷體" panose="03000509000000000000" pitchFamily="65" charset="-120"/>
+                          <a:cs typeface="Times New Roman" panose="02020603050405020304" pitchFamily="18" charset="0"/>
+                        </a:rPr>
+                        <a:t>6419</a:t>
+                      </a:r>
+                      <a:endParaRPr lang="zh-TW" sz="1700" kern="100">
+                        <a:effectLst/>
+                        <a:latin typeface="Times New Roman" panose="02020603050405020304" pitchFamily="18" charset="0"/>
+                        <a:ea typeface="標楷體" panose="03000509000000000000" pitchFamily="65" charset="-120"/>
+                        <a:cs typeface="Times New Roman" panose="02020603050405020304" pitchFamily="18" charset="0"/>
+                      </a:endParaRPr>
+                    </a:p>
+                  </a:txBody>
+                  <a:tcPr marL="110965" marR="110965" marT="0" marB="0" anchor="ctr"/>
+                </a:tc>
+                <a:tc>
+                  <a:txBody>
+                    <a:bodyPr/>
+                    <a:lstStyle/>
+                    <a:p>
+                      <a:pPr algn="ctr">
+                        <a:lnSpc>
+                          <a:spcPct val="115000"/>
+                        </a:lnSpc>
+                        <a:spcAft>
+                          <a:spcPts val="800"/>
+                        </a:spcAft>
+                      </a:pPr>
+                      <a:r>
+                        <a:rPr lang="en-US" sz="1700" kern="0">
+                          <a:effectLst/>
+                          <a:latin typeface="Times New Roman" panose="02020603050405020304" pitchFamily="18" charset="0"/>
+                          <a:ea typeface="標楷體" panose="03000509000000000000" pitchFamily="65" charset="-120"/>
+                          <a:cs typeface="Times New Roman" panose="02020603050405020304" pitchFamily="18" charset="0"/>
+                        </a:rPr>
+                        <a:t>81</a:t>
+                      </a:r>
+                      <a:endParaRPr lang="zh-TW" sz="1700" kern="100">
+                        <a:effectLst/>
+                        <a:latin typeface="Times New Roman" panose="02020603050405020304" pitchFamily="18" charset="0"/>
+                        <a:ea typeface="標楷體" panose="03000509000000000000" pitchFamily="65" charset="-120"/>
+                        <a:cs typeface="Times New Roman" panose="02020603050405020304" pitchFamily="18" charset="0"/>
+                      </a:endParaRPr>
+                    </a:p>
+                  </a:txBody>
+                  <a:tcPr marL="110965" marR="110965" marT="0" marB="0" anchor="ctr"/>
+                </a:tc>
+                <a:extLst>
+                  <a:ext uri="{0D108BD9-81ED-4DB2-BD59-A6C34878D82A}">
+                    <a16:rowId xmlns:a16="http://schemas.microsoft.com/office/drawing/2014/main" val="3794258469"/>
+                  </a:ext>
+                </a:extLst>
+              </a:tr>
+              <a:tr h="295350">
+                <a:tc>
+                  <a:txBody>
+                    <a:bodyPr/>
+                    <a:lstStyle/>
+                    <a:p>
+                      <a:pPr algn="ctr"/>
+                      <a:endParaRPr lang="zh-TW" sz="1700" kern="100">
+                        <a:effectLst/>
+                        <a:latin typeface="Times New Roman" panose="02020603050405020304" pitchFamily="18" charset="0"/>
+                        <a:ea typeface="標楷體" panose="03000509000000000000" pitchFamily="65" charset="-120"/>
+                        <a:cs typeface="Times New Roman" panose="02020603050405020304" pitchFamily="18" charset="0"/>
+                      </a:endParaRPr>
+                    </a:p>
+                  </a:txBody>
+                  <a:tcPr marL="110965" marR="110965" marT="0" marB="0" anchor="ctr"/>
+                </a:tc>
+                <a:tc>
+                  <a:txBody>
+                    <a:bodyPr/>
+                    <a:lstStyle/>
+                    <a:p>
+                      <a:pPr algn="ctr">
+                        <a:lnSpc>
+                          <a:spcPct val="115000"/>
+                        </a:lnSpc>
+                        <a:spcAft>
+                          <a:spcPts val="800"/>
+                        </a:spcAft>
+                      </a:pPr>
+                      <a:r>
+                        <a:rPr lang="en-US" sz="1700" kern="0">
+                          <a:effectLst/>
+                          <a:latin typeface="Times New Roman" panose="02020603050405020304" pitchFamily="18" charset="0"/>
+                          <a:ea typeface="標楷體" panose="03000509000000000000" pitchFamily="65" charset="-120"/>
+                          <a:cs typeface="Times New Roman" panose="02020603050405020304" pitchFamily="18" charset="0"/>
+                        </a:rPr>
+                        <a:t>9300</a:t>
+                      </a:r>
+                      <a:endParaRPr lang="zh-TW" sz="1700" kern="100">
+                        <a:effectLst/>
+                        <a:latin typeface="Times New Roman" panose="02020603050405020304" pitchFamily="18" charset="0"/>
+                        <a:ea typeface="標楷體" panose="03000509000000000000" pitchFamily="65" charset="-120"/>
+                        <a:cs typeface="Times New Roman" panose="02020603050405020304" pitchFamily="18" charset="0"/>
+                      </a:endParaRPr>
+                    </a:p>
+                  </a:txBody>
+                  <a:tcPr marL="110965" marR="110965" marT="0" marB="0" anchor="ctr"/>
+                </a:tc>
+                <a:tc>
+                  <a:txBody>
+                    <a:bodyPr/>
+                    <a:lstStyle/>
+                    <a:p>
+                      <a:pPr algn="ctr">
+                        <a:lnSpc>
+                          <a:spcPct val="115000"/>
+                        </a:lnSpc>
+                        <a:spcAft>
+                          <a:spcPts val="800"/>
+                        </a:spcAft>
+                      </a:pPr>
+                      <a:r>
+                        <a:rPr lang="en-US" sz="1700" kern="0">
+                          <a:effectLst/>
+                          <a:latin typeface="Times New Roman" panose="02020603050405020304" pitchFamily="18" charset="0"/>
+                          <a:ea typeface="標楷體" panose="03000509000000000000" pitchFamily="65" charset="-120"/>
+                          <a:cs typeface="Times New Roman" panose="02020603050405020304" pitchFamily="18" charset="0"/>
+                        </a:rPr>
+                        <a:t>9046</a:t>
+                      </a:r>
+                      <a:endParaRPr lang="zh-TW" sz="1700" kern="100">
+                        <a:effectLst/>
+                        <a:latin typeface="Times New Roman" panose="02020603050405020304" pitchFamily="18" charset="0"/>
+                        <a:ea typeface="標楷體" panose="03000509000000000000" pitchFamily="65" charset="-120"/>
+                        <a:cs typeface="Times New Roman" panose="02020603050405020304" pitchFamily="18" charset="0"/>
+                      </a:endParaRPr>
+                    </a:p>
+                  </a:txBody>
+                  <a:tcPr marL="110965" marR="110965" marT="0" marB="0" anchor="ctr"/>
+                </a:tc>
+                <a:tc>
+                  <a:txBody>
+                    <a:bodyPr/>
+                    <a:lstStyle/>
+                    <a:p>
+                      <a:pPr algn="ctr">
+                        <a:lnSpc>
+                          <a:spcPct val="115000"/>
+                        </a:lnSpc>
+                        <a:spcAft>
+                          <a:spcPts val="800"/>
+                        </a:spcAft>
+                      </a:pPr>
+                      <a:r>
+                        <a:rPr lang="en-US" sz="1700" kern="0">
+                          <a:effectLst/>
+                          <a:latin typeface="Times New Roman" panose="02020603050405020304" pitchFamily="18" charset="0"/>
+                          <a:ea typeface="標楷體" panose="03000509000000000000" pitchFamily="65" charset="-120"/>
+                          <a:cs typeface="Times New Roman" panose="02020603050405020304" pitchFamily="18" charset="0"/>
+                        </a:rPr>
+                        <a:t>254</a:t>
+                      </a:r>
+                      <a:endParaRPr lang="zh-TW" sz="1700" kern="100">
+                        <a:effectLst/>
+                        <a:latin typeface="Times New Roman" panose="02020603050405020304" pitchFamily="18" charset="0"/>
+                        <a:ea typeface="標楷體" panose="03000509000000000000" pitchFamily="65" charset="-120"/>
+                        <a:cs typeface="Times New Roman" panose="02020603050405020304" pitchFamily="18" charset="0"/>
+                      </a:endParaRPr>
+                    </a:p>
+                  </a:txBody>
+                  <a:tcPr marL="110965" marR="110965" marT="0" marB="0" anchor="ctr"/>
+                </a:tc>
+                <a:extLst>
+                  <a:ext uri="{0D108BD9-81ED-4DB2-BD59-A6C34878D82A}">
+                    <a16:rowId xmlns:a16="http://schemas.microsoft.com/office/drawing/2014/main" val="3965229014"/>
+                  </a:ext>
+                </a:extLst>
+              </a:tr>
+              <a:tr h="295350">
+                <a:tc>
+                  <a:txBody>
+                    <a:bodyPr/>
+                    <a:lstStyle/>
+                    <a:p>
+                      <a:pPr algn="ctr">
+                        <a:lnSpc>
+                          <a:spcPct val="115000"/>
+                        </a:lnSpc>
+                        <a:spcAft>
+                          <a:spcPts val="800"/>
+                        </a:spcAft>
+                      </a:pPr>
+                      <a:r>
+                        <a:rPr lang="en-US" sz="1700" kern="0">
+                          <a:effectLst/>
+                          <a:latin typeface="Times New Roman" panose="02020603050405020304" pitchFamily="18" charset="0"/>
+                          <a:ea typeface="標楷體" panose="03000509000000000000" pitchFamily="65" charset="-120"/>
+                          <a:cs typeface="Times New Roman" panose="02020603050405020304" pitchFamily="18" charset="0"/>
+                        </a:rPr>
+                        <a:t>2.0 </a:t>
+                      </a:r>
+                      <a:endParaRPr lang="zh-TW" sz="1700" kern="100">
+                        <a:effectLst/>
+                        <a:latin typeface="Times New Roman" panose="02020603050405020304" pitchFamily="18" charset="0"/>
+                        <a:ea typeface="標楷體" panose="03000509000000000000" pitchFamily="65" charset="-120"/>
+                        <a:cs typeface="Times New Roman" panose="02020603050405020304" pitchFamily="18" charset="0"/>
+                      </a:endParaRPr>
+                    </a:p>
+                  </a:txBody>
+                  <a:tcPr marL="110965" marR="110965" marT="0" marB="0" anchor="ctr"/>
+                </a:tc>
+                <a:tc>
+                  <a:txBody>
+                    <a:bodyPr/>
+                    <a:lstStyle/>
+                    <a:p>
+                      <a:pPr algn="ctr">
+                        <a:lnSpc>
+                          <a:spcPct val="115000"/>
+                        </a:lnSpc>
+                        <a:spcAft>
+                          <a:spcPts val="800"/>
+                        </a:spcAft>
+                      </a:pPr>
+                      <a:r>
+                        <a:rPr lang="en-US" sz="1700" kern="0">
+                          <a:effectLst/>
+                          <a:latin typeface="Times New Roman" panose="02020603050405020304" pitchFamily="18" charset="0"/>
+                          <a:ea typeface="標楷體" panose="03000509000000000000" pitchFamily="65" charset="-120"/>
+                          <a:cs typeface="Times New Roman" panose="02020603050405020304" pitchFamily="18" charset="0"/>
+                        </a:rPr>
+                        <a:t>5400</a:t>
+                      </a:r>
+                      <a:endParaRPr lang="zh-TW" sz="1700" kern="100">
+                        <a:effectLst/>
+                        <a:latin typeface="Times New Roman" panose="02020603050405020304" pitchFamily="18" charset="0"/>
+                        <a:ea typeface="標楷體" panose="03000509000000000000" pitchFamily="65" charset="-120"/>
+                        <a:cs typeface="Times New Roman" panose="02020603050405020304" pitchFamily="18" charset="0"/>
+                      </a:endParaRPr>
+                    </a:p>
+                  </a:txBody>
+                  <a:tcPr marL="110965" marR="110965" marT="0" marB="0" anchor="ctr"/>
+                </a:tc>
+                <a:tc>
+                  <a:txBody>
+                    <a:bodyPr/>
+                    <a:lstStyle/>
+                    <a:p>
+                      <a:pPr algn="ctr">
+                        <a:lnSpc>
+                          <a:spcPct val="115000"/>
+                        </a:lnSpc>
+                        <a:spcAft>
+                          <a:spcPts val="800"/>
+                        </a:spcAft>
+                      </a:pPr>
+                      <a:r>
+                        <a:rPr lang="en-US" sz="1700" kern="0">
+                          <a:effectLst/>
+                          <a:latin typeface="Times New Roman" panose="02020603050405020304" pitchFamily="18" charset="0"/>
+                          <a:ea typeface="標楷體" panose="03000509000000000000" pitchFamily="65" charset="-120"/>
+                          <a:cs typeface="Times New Roman" panose="02020603050405020304" pitchFamily="18" charset="0"/>
+                        </a:rPr>
+                        <a:t>5351</a:t>
+                      </a:r>
+                      <a:endParaRPr lang="zh-TW" sz="1700" kern="100">
+                        <a:effectLst/>
+                        <a:latin typeface="Times New Roman" panose="02020603050405020304" pitchFamily="18" charset="0"/>
+                        <a:ea typeface="標楷體" panose="03000509000000000000" pitchFamily="65" charset="-120"/>
+                        <a:cs typeface="Times New Roman" panose="02020603050405020304" pitchFamily="18" charset="0"/>
+                      </a:endParaRPr>
+                    </a:p>
+                  </a:txBody>
+                  <a:tcPr marL="110965" marR="110965" marT="0" marB="0" anchor="ctr"/>
+                </a:tc>
+                <a:tc>
+                  <a:txBody>
+                    <a:bodyPr/>
+                    <a:lstStyle/>
+                    <a:p>
+                      <a:pPr algn="ctr">
+                        <a:lnSpc>
+                          <a:spcPct val="115000"/>
+                        </a:lnSpc>
+                        <a:spcAft>
+                          <a:spcPts val="800"/>
+                        </a:spcAft>
+                      </a:pPr>
+                      <a:r>
+                        <a:rPr lang="en-US" sz="1700" kern="0">
+                          <a:effectLst/>
+                          <a:latin typeface="Times New Roman" panose="02020603050405020304" pitchFamily="18" charset="0"/>
+                          <a:ea typeface="標楷體" panose="03000509000000000000" pitchFamily="65" charset="-120"/>
+                          <a:cs typeface="Times New Roman" panose="02020603050405020304" pitchFamily="18" charset="0"/>
+                        </a:rPr>
+                        <a:t>49</a:t>
+                      </a:r>
+                      <a:endParaRPr lang="zh-TW" sz="1700" kern="100">
+                        <a:effectLst/>
+                        <a:latin typeface="Times New Roman" panose="02020603050405020304" pitchFamily="18" charset="0"/>
+                        <a:ea typeface="標楷體" panose="03000509000000000000" pitchFamily="65" charset="-120"/>
+                        <a:cs typeface="Times New Roman" panose="02020603050405020304" pitchFamily="18" charset="0"/>
+                      </a:endParaRPr>
+                    </a:p>
+                  </a:txBody>
+                  <a:tcPr marL="110965" marR="110965" marT="0" marB="0" anchor="ctr"/>
+                </a:tc>
+                <a:extLst>
+                  <a:ext uri="{0D108BD9-81ED-4DB2-BD59-A6C34878D82A}">
+                    <a16:rowId xmlns:a16="http://schemas.microsoft.com/office/drawing/2014/main" val="1742282556"/>
+                  </a:ext>
+                </a:extLst>
+              </a:tr>
+              <a:tr h="295350">
+                <a:tc>
+                  <a:txBody>
+                    <a:bodyPr/>
+                    <a:lstStyle/>
+                    <a:p>
+                      <a:pPr algn="ctr"/>
+                      <a:endParaRPr lang="zh-TW" sz="1700" kern="100">
+                        <a:effectLst/>
+                        <a:latin typeface="Times New Roman" panose="02020603050405020304" pitchFamily="18" charset="0"/>
+                        <a:ea typeface="標楷體" panose="03000509000000000000" pitchFamily="65" charset="-120"/>
+                        <a:cs typeface="Times New Roman" panose="02020603050405020304" pitchFamily="18" charset="0"/>
+                      </a:endParaRPr>
+                    </a:p>
+                  </a:txBody>
+                  <a:tcPr marL="110965" marR="110965" marT="0" marB="0" anchor="ctr"/>
+                </a:tc>
+                <a:tc>
+                  <a:txBody>
+                    <a:bodyPr/>
+                    <a:lstStyle/>
+                    <a:p>
+                      <a:pPr algn="ctr">
+                        <a:lnSpc>
+                          <a:spcPct val="115000"/>
+                        </a:lnSpc>
+                        <a:spcAft>
+                          <a:spcPts val="800"/>
+                        </a:spcAft>
+                      </a:pPr>
+                      <a:r>
+                        <a:rPr lang="en-US" sz="1700" kern="0">
+                          <a:effectLst/>
+                          <a:latin typeface="Times New Roman" panose="02020603050405020304" pitchFamily="18" charset="0"/>
+                          <a:ea typeface="標楷體" panose="03000509000000000000" pitchFamily="65" charset="-120"/>
+                          <a:cs typeface="Times New Roman" panose="02020603050405020304" pitchFamily="18" charset="0"/>
+                        </a:rPr>
+                        <a:t>6500</a:t>
+                      </a:r>
+                      <a:endParaRPr lang="zh-TW" sz="1700" kern="100">
+                        <a:effectLst/>
+                        <a:latin typeface="Times New Roman" panose="02020603050405020304" pitchFamily="18" charset="0"/>
+                        <a:ea typeface="標楷體" panose="03000509000000000000" pitchFamily="65" charset="-120"/>
+                        <a:cs typeface="Times New Roman" panose="02020603050405020304" pitchFamily="18" charset="0"/>
+                      </a:endParaRPr>
+                    </a:p>
+                  </a:txBody>
+                  <a:tcPr marL="110965" marR="110965" marT="0" marB="0" anchor="ctr"/>
+                </a:tc>
+                <a:tc>
+                  <a:txBody>
+                    <a:bodyPr/>
+                    <a:lstStyle/>
+                    <a:p>
+                      <a:pPr algn="ctr">
+                        <a:lnSpc>
+                          <a:spcPct val="115000"/>
+                        </a:lnSpc>
+                        <a:spcAft>
+                          <a:spcPts val="800"/>
+                        </a:spcAft>
+                      </a:pPr>
+                      <a:r>
+                        <a:rPr lang="en-US" sz="1700" kern="0" dirty="0">
+                          <a:effectLst/>
+                          <a:latin typeface="Times New Roman" panose="02020603050405020304" pitchFamily="18" charset="0"/>
+                          <a:ea typeface="標楷體" panose="03000509000000000000" pitchFamily="65" charset="-120"/>
+                          <a:cs typeface="Times New Roman" panose="02020603050405020304" pitchFamily="18" charset="0"/>
+                        </a:rPr>
+                        <a:t>6545</a:t>
+                      </a:r>
+                      <a:endParaRPr lang="zh-TW" sz="1700" kern="100" dirty="0">
+                        <a:effectLst/>
+                        <a:latin typeface="Times New Roman" panose="02020603050405020304" pitchFamily="18" charset="0"/>
+                        <a:ea typeface="標楷體" panose="03000509000000000000" pitchFamily="65" charset="-120"/>
+                        <a:cs typeface="Times New Roman" panose="02020603050405020304" pitchFamily="18" charset="0"/>
+                      </a:endParaRPr>
+                    </a:p>
+                  </a:txBody>
+                  <a:tcPr marL="110965" marR="110965" marT="0" marB="0" anchor="ctr"/>
+                </a:tc>
+                <a:tc>
+                  <a:txBody>
+                    <a:bodyPr/>
+                    <a:lstStyle/>
+                    <a:p>
+                      <a:pPr algn="ctr">
+                        <a:lnSpc>
+                          <a:spcPct val="115000"/>
+                        </a:lnSpc>
+                        <a:spcAft>
+                          <a:spcPts val="800"/>
+                        </a:spcAft>
+                      </a:pPr>
+                      <a:r>
+                        <a:rPr lang="en-US" sz="1700" kern="0">
+                          <a:effectLst/>
+                          <a:latin typeface="Times New Roman" panose="02020603050405020304" pitchFamily="18" charset="0"/>
+                          <a:ea typeface="標楷體" panose="03000509000000000000" pitchFamily="65" charset="-120"/>
+                          <a:cs typeface="Times New Roman" panose="02020603050405020304" pitchFamily="18" charset="0"/>
+                        </a:rPr>
+                        <a:t>-45</a:t>
+                      </a:r>
+                      <a:endParaRPr lang="zh-TW" sz="1700" kern="100">
+                        <a:effectLst/>
+                        <a:latin typeface="Times New Roman" panose="02020603050405020304" pitchFamily="18" charset="0"/>
+                        <a:ea typeface="標楷體" panose="03000509000000000000" pitchFamily="65" charset="-120"/>
+                        <a:cs typeface="Times New Roman" panose="02020603050405020304" pitchFamily="18" charset="0"/>
+                      </a:endParaRPr>
+                    </a:p>
+                  </a:txBody>
+                  <a:tcPr marL="110965" marR="110965" marT="0" marB="0" anchor="ctr"/>
+                </a:tc>
+                <a:extLst>
+                  <a:ext uri="{0D108BD9-81ED-4DB2-BD59-A6C34878D82A}">
+                    <a16:rowId xmlns:a16="http://schemas.microsoft.com/office/drawing/2014/main" val="2034024837"/>
+                  </a:ext>
+                </a:extLst>
+              </a:tr>
+              <a:tr h="295350">
+                <a:tc>
+                  <a:txBody>
+                    <a:bodyPr/>
+                    <a:lstStyle/>
+                    <a:p>
+                      <a:pPr algn="ctr"/>
+                      <a:endParaRPr lang="zh-TW" sz="1700" kern="100">
+                        <a:effectLst/>
+                        <a:latin typeface="Times New Roman" panose="02020603050405020304" pitchFamily="18" charset="0"/>
+                        <a:ea typeface="標楷體" panose="03000509000000000000" pitchFamily="65" charset="-120"/>
+                        <a:cs typeface="Times New Roman" panose="02020603050405020304" pitchFamily="18" charset="0"/>
+                      </a:endParaRPr>
+                    </a:p>
+                  </a:txBody>
+                  <a:tcPr marL="110965" marR="110965" marT="0" marB="0" anchor="ctr"/>
+                </a:tc>
+                <a:tc>
+                  <a:txBody>
+                    <a:bodyPr/>
+                    <a:lstStyle/>
+                    <a:p>
+                      <a:pPr algn="ctr">
+                        <a:lnSpc>
+                          <a:spcPct val="115000"/>
+                        </a:lnSpc>
+                        <a:spcAft>
+                          <a:spcPts val="800"/>
+                        </a:spcAft>
+                      </a:pPr>
+                      <a:r>
+                        <a:rPr lang="en-US" sz="1700" kern="0">
+                          <a:effectLst/>
+                          <a:latin typeface="Times New Roman" panose="02020603050405020304" pitchFamily="18" charset="0"/>
+                          <a:ea typeface="標楷體" panose="03000509000000000000" pitchFamily="65" charset="-120"/>
+                          <a:cs typeface="Times New Roman" panose="02020603050405020304" pitchFamily="18" charset="0"/>
+                        </a:rPr>
+                        <a:t>9300</a:t>
+                      </a:r>
+                      <a:endParaRPr lang="zh-TW" sz="1700" kern="100">
+                        <a:effectLst/>
+                        <a:latin typeface="Times New Roman" panose="02020603050405020304" pitchFamily="18" charset="0"/>
+                        <a:ea typeface="標楷體" panose="03000509000000000000" pitchFamily="65" charset="-120"/>
+                        <a:cs typeface="Times New Roman" panose="02020603050405020304" pitchFamily="18" charset="0"/>
+                      </a:endParaRPr>
+                    </a:p>
+                  </a:txBody>
+                  <a:tcPr marL="110965" marR="110965" marT="0" marB="0" anchor="ctr"/>
+                </a:tc>
+                <a:tc>
+                  <a:txBody>
+                    <a:bodyPr/>
+                    <a:lstStyle/>
+                    <a:p>
+                      <a:pPr algn="ctr">
+                        <a:lnSpc>
+                          <a:spcPct val="115000"/>
+                        </a:lnSpc>
+                        <a:spcAft>
+                          <a:spcPts val="800"/>
+                        </a:spcAft>
+                      </a:pPr>
+                      <a:r>
+                        <a:rPr lang="en-US" sz="1700" kern="0" dirty="0">
+                          <a:effectLst/>
+                          <a:latin typeface="Times New Roman" panose="02020603050405020304" pitchFamily="18" charset="0"/>
+                          <a:ea typeface="標楷體" panose="03000509000000000000" pitchFamily="65" charset="-120"/>
+                          <a:cs typeface="Times New Roman" panose="02020603050405020304" pitchFamily="18" charset="0"/>
+                        </a:rPr>
+                        <a:t>9045</a:t>
+                      </a:r>
+                      <a:endParaRPr lang="zh-TW" sz="1700" kern="100" dirty="0">
+                        <a:effectLst/>
+                        <a:latin typeface="Times New Roman" panose="02020603050405020304" pitchFamily="18" charset="0"/>
+                        <a:ea typeface="標楷體" panose="03000509000000000000" pitchFamily="65" charset="-120"/>
+                        <a:cs typeface="Times New Roman" panose="02020603050405020304" pitchFamily="18" charset="0"/>
+                      </a:endParaRPr>
+                    </a:p>
+                  </a:txBody>
+                  <a:tcPr marL="110965" marR="110965" marT="0" marB="0" anchor="ctr"/>
+                </a:tc>
+                <a:tc>
+                  <a:txBody>
+                    <a:bodyPr/>
+                    <a:lstStyle/>
+                    <a:p>
+                      <a:pPr algn="ctr">
+                        <a:lnSpc>
+                          <a:spcPct val="115000"/>
+                        </a:lnSpc>
+                        <a:spcAft>
+                          <a:spcPts val="800"/>
+                        </a:spcAft>
+                      </a:pPr>
+                      <a:r>
+                        <a:rPr lang="en-US" sz="1700" kern="0">
+                          <a:effectLst/>
+                          <a:latin typeface="Times New Roman" panose="02020603050405020304" pitchFamily="18" charset="0"/>
+                          <a:ea typeface="標楷體" panose="03000509000000000000" pitchFamily="65" charset="-120"/>
+                          <a:cs typeface="Times New Roman" panose="02020603050405020304" pitchFamily="18" charset="0"/>
+                        </a:rPr>
+                        <a:t>255</a:t>
+                      </a:r>
+                      <a:endParaRPr lang="zh-TW" sz="1700" kern="100">
+                        <a:effectLst/>
+                        <a:latin typeface="Times New Roman" panose="02020603050405020304" pitchFamily="18" charset="0"/>
+                        <a:ea typeface="標楷體" panose="03000509000000000000" pitchFamily="65" charset="-120"/>
+                        <a:cs typeface="Times New Roman" panose="02020603050405020304" pitchFamily="18" charset="0"/>
+                      </a:endParaRPr>
+                    </a:p>
+                  </a:txBody>
+                  <a:tcPr marL="110965" marR="110965" marT="0" marB="0" anchor="ctr"/>
+                </a:tc>
+                <a:extLst>
+                  <a:ext uri="{0D108BD9-81ED-4DB2-BD59-A6C34878D82A}">
+                    <a16:rowId xmlns:a16="http://schemas.microsoft.com/office/drawing/2014/main" val="3803486922"/>
+                  </a:ext>
+                </a:extLst>
+              </a:tr>
+              <a:tr h="295350">
+                <a:tc>
+                  <a:txBody>
+                    <a:bodyPr/>
+                    <a:lstStyle/>
+                    <a:p>
+                      <a:pPr algn="ctr">
+                        <a:lnSpc>
+                          <a:spcPct val="115000"/>
+                        </a:lnSpc>
+                        <a:spcAft>
+                          <a:spcPts val="800"/>
+                        </a:spcAft>
+                      </a:pPr>
+                      <a:r>
+                        <a:rPr lang="en-US" sz="1700" kern="0">
+                          <a:effectLst/>
+                          <a:latin typeface="Times New Roman" panose="02020603050405020304" pitchFamily="18" charset="0"/>
+                          <a:ea typeface="標楷體" panose="03000509000000000000" pitchFamily="65" charset="-120"/>
+                          <a:cs typeface="Times New Roman" panose="02020603050405020304" pitchFamily="18" charset="0"/>
+                        </a:rPr>
+                        <a:t>2.2</a:t>
+                      </a:r>
+                      <a:endParaRPr lang="zh-TW" sz="1700" kern="100">
+                        <a:effectLst/>
+                        <a:latin typeface="Times New Roman" panose="02020603050405020304" pitchFamily="18" charset="0"/>
+                        <a:ea typeface="標楷體" panose="03000509000000000000" pitchFamily="65" charset="-120"/>
+                        <a:cs typeface="Times New Roman" panose="02020603050405020304" pitchFamily="18" charset="0"/>
+                      </a:endParaRPr>
+                    </a:p>
+                  </a:txBody>
+                  <a:tcPr marL="110965" marR="110965" marT="0" marB="0" anchor="ctr"/>
+                </a:tc>
+                <a:tc>
+                  <a:txBody>
+                    <a:bodyPr/>
+                    <a:lstStyle/>
+                    <a:p>
+                      <a:pPr algn="ctr">
+                        <a:lnSpc>
+                          <a:spcPct val="115000"/>
+                        </a:lnSpc>
+                        <a:spcAft>
+                          <a:spcPts val="800"/>
+                        </a:spcAft>
+                      </a:pPr>
+                      <a:r>
+                        <a:rPr lang="en-US" sz="1700" kern="0">
+                          <a:effectLst/>
+                          <a:latin typeface="Times New Roman" panose="02020603050405020304" pitchFamily="18" charset="0"/>
+                          <a:ea typeface="標楷體" panose="03000509000000000000" pitchFamily="65" charset="-120"/>
+                          <a:cs typeface="Times New Roman" panose="02020603050405020304" pitchFamily="18" charset="0"/>
+                        </a:rPr>
+                        <a:t>5400</a:t>
+                      </a:r>
+                      <a:endParaRPr lang="zh-TW" sz="1700" kern="100">
+                        <a:effectLst/>
+                        <a:latin typeface="Times New Roman" panose="02020603050405020304" pitchFamily="18" charset="0"/>
+                        <a:ea typeface="標楷體" panose="03000509000000000000" pitchFamily="65" charset="-120"/>
+                        <a:cs typeface="Times New Roman" panose="02020603050405020304" pitchFamily="18" charset="0"/>
+                      </a:endParaRPr>
+                    </a:p>
+                  </a:txBody>
+                  <a:tcPr marL="110965" marR="110965" marT="0" marB="0" anchor="ctr"/>
+                </a:tc>
+                <a:tc>
+                  <a:txBody>
+                    <a:bodyPr/>
+                    <a:lstStyle/>
+                    <a:p>
+                      <a:pPr algn="ctr">
+                        <a:lnSpc>
+                          <a:spcPct val="115000"/>
+                        </a:lnSpc>
+                        <a:spcAft>
+                          <a:spcPts val="800"/>
+                        </a:spcAft>
+                      </a:pPr>
+                      <a:r>
+                        <a:rPr lang="en-US" sz="1700" kern="0">
+                          <a:effectLst/>
+                          <a:latin typeface="Times New Roman" panose="02020603050405020304" pitchFamily="18" charset="0"/>
+                          <a:ea typeface="標楷體" panose="03000509000000000000" pitchFamily="65" charset="-120"/>
+                          <a:cs typeface="Times New Roman" panose="02020603050405020304" pitchFamily="18" charset="0"/>
+                        </a:rPr>
+                        <a:t>5314</a:t>
+                      </a:r>
+                      <a:endParaRPr lang="zh-TW" sz="1700" kern="100">
+                        <a:effectLst/>
+                        <a:latin typeface="Times New Roman" panose="02020603050405020304" pitchFamily="18" charset="0"/>
+                        <a:ea typeface="標楷體" panose="03000509000000000000" pitchFamily="65" charset="-120"/>
+                        <a:cs typeface="Times New Roman" panose="02020603050405020304" pitchFamily="18" charset="0"/>
+                      </a:endParaRPr>
+                    </a:p>
+                  </a:txBody>
+                  <a:tcPr marL="110965" marR="110965" marT="0" marB="0" anchor="ctr"/>
+                </a:tc>
+                <a:tc>
+                  <a:txBody>
+                    <a:bodyPr/>
+                    <a:lstStyle/>
+                    <a:p>
+                      <a:pPr algn="ctr">
+                        <a:lnSpc>
+                          <a:spcPct val="115000"/>
+                        </a:lnSpc>
+                        <a:spcAft>
+                          <a:spcPts val="800"/>
+                        </a:spcAft>
+                      </a:pPr>
+                      <a:r>
+                        <a:rPr lang="en-US" sz="1700" kern="0">
+                          <a:effectLst/>
+                          <a:latin typeface="Times New Roman" panose="02020603050405020304" pitchFamily="18" charset="0"/>
+                          <a:ea typeface="標楷體" panose="03000509000000000000" pitchFamily="65" charset="-120"/>
+                          <a:cs typeface="Times New Roman" panose="02020603050405020304" pitchFamily="18" charset="0"/>
+                        </a:rPr>
+                        <a:t>86</a:t>
+                      </a:r>
+                      <a:endParaRPr lang="zh-TW" sz="1700" kern="100">
+                        <a:effectLst/>
+                        <a:latin typeface="Times New Roman" panose="02020603050405020304" pitchFamily="18" charset="0"/>
+                        <a:ea typeface="標楷體" panose="03000509000000000000" pitchFamily="65" charset="-120"/>
+                        <a:cs typeface="Times New Roman" panose="02020603050405020304" pitchFamily="18" charset="0"/>
+                      </a:endParaRPr>
+                    </a:p>
+                  </a:txBody>
+                  <a:tcPr marL="110965" marR="110965" marT="0" marB="0" anchor="ctr"/>
+                </a:tc>
+                <a:extLst>
+                  <a:ext uri="{0D108BD9-81ED-4DB2-BD59-A6C34878D82A}">
+                    <a16:rowId xmlns:a16="http://schemas.microsoft.com/office/drawing/2014/main" val="582280423"/>
+                  </a:ext>
+                </a:extLst>
+              </a:tr>
+              <a:tr h="295350">
+                <a:tc>
+                  <a:txBody>
+                    <a:bodyPr/>
+                    <a:lstStyle/>
+                    <a:p>
+                      <a:pPr algn="ctr"/>
+                      <a:endParaRPr lang="zh-TW" sz="1700" kern="100">
+                        <a:effectLst/>
+                        <a:latin typeface="Times New Roman" panose="02020603050405020304" pitchFamily="18" charset="0"/>
+                        <a:ea typeface="標楷體" panose="03000509000000000000" pitchFamily="65" charset="-120"/>
+                        <a:cs typeface="Times New Roman" panose="02020603050405020304" pitchFamily="18" charset="0"/>
+                      </a:endParaRPr>
+                    </a:p>
+                  </a:txBody>
+                  <a:tcPr marL="110965" marR="110965" marT="0" marB="0" anchor="ctr"/>
+                </a:tc>
+                <a:tc>
+                  <a:txBody>
+                    <a:bodyPr/>
+                    <a:lstStyle/>
+                    <a:p>
+                      <a:pPr algn="ctr">
+                        <a:lnSpc>
+                          <a:spcPct val="115000"/>
+                        </a:lnSpc>
+                        <a:spcAft>
+                          <a:spcPts val="800"/>
+                        </a:spcAft>
+                      </a:pPr>
+                      <a:r>
+                        <a:rPr lang="en-US" sz="1700" kern="0">
+                          <a:effectLst/>
+                          <a:latin typeface="Times New Roman" panose="02020603050405020304" pitchFamily="18" charset="0"/>
+                          <a:ea typeface="標楷體" panose="03000509000000000000" pitchFamily="65" charset="-120"/>
+                          <a:cs typeface="Times New Roman" panose="02020603050405020304" pitchFamily="18" charset="0"/>
+                        </a:rPr>
+                        <a:t>6500</a:t>
+                      </a:r>
+                      <a:endParaRPr lang="zh-TW" sz="1700" kern="100">
+                        <a:effectLst/>
+                        <a:latin typeface="Times New Roman" panose="02020603050405020304" pitchFamily="18" charset="0"/>
+                        <a:ea typeface="標楷體" panose="03000509000000000000" pitchFamily="65" charset="-120"/>
+                        <a:cs typeface="Times New Roman" panose="02020603050405020304" pitchFamily="18" charset="0"/>
+                      </a:endParaRPr>
+                    </a:p>
+                  </a:txBody>
+                  <a:tcPr marL="110965" marR="110965" marT="0" marB="0" anchor="ctr"/>
+                </a:tc>
+                <a:tc>
+                  <a:txBody>
+                    <a:bodyPr/>
+                    <a:lstStyle/>
+                    <a:p>
+                      <a:pPr algn="ctr">
+                        <a:lnSpc>
+                          <a:spcPct val="115000"/>
+                        </a:lnSpc>
+                        <a:spcAft>
+                          <a:spcPts val="800"/>
+                        </a:spcAft>
+                      </a:pPr>
+                      <a:r>
+                        <a:rPr lang="en-US" sz="1700" kern="0">
+                          <a:effectLst/>
+                          <a:latin typeface="Times New Roman" panose="02020603050405020304" pitchFamily="18" charset="0"/>
+                          <a:ea typeface="標楷體" panose="03000509000000000000" pitchFamily="65" charset="-120"/>
+                          <a:cs typeface="Times New Roman" panose="02020603050405020304" pitchFamily="18" charset="0"/>
+                        </a:rPr>
+                        <a:t>6452</a:t>
+                      </a:r>
+                      <a:endParaRPr lang="zh-TW" sz="1700" kern="100">
+                        <a:effectLst/>
+                        <a:latin typeface="Times New Roman" panose="02020603050405020304" pitchFamily="18" charset="0"/>
+                        <a:ea typeface="標楷體" panose="03000509000000000000" pitchFamily="65" charset="-120"/>
+                        <a:cs typeface="Times New Roman" panose="02020603050405020304" pitchFamily="18" charset="0"/>
+                      </a:endParaRPr>
+                    </a:p>
+                  </a:txBody>
+                  <a:tcPr marL="110965" marR="110965" marT="0" marB="0" anchor="ctr"/>
+                </a:tc>
+                <a:tc>
+                  <a:txBody>
+                    <a:bodyPr/>
+                    <a:lstStyle/>
+                    <a:p>
+                      <a:pPr algn="ctr">
+                        <a:lnSpc>
+                          <a:spcPct val="115000"/>
+                        </a:lnSpc>
+                        <a:spcAft>
+                          <a:spcPts val="800"/>
+                        </a:spcAft>
+                      </a:pPr>
+                      <a:r>
+                        <a:rPr lang="en-US" sz="1700" kern="0">
+                          <a:effectLst/>
+                          <a:latin typeface="Times New Roman" panose="02020603050405020304" pitchFamily="18" charset="0"/>
+                          <a:ea typeface="標楷體" panose="03000509000000000000" pitchFamily="65" charset="-120"/>
+                          <a:cs typeface="Times New Roman" panose="02020603050405020304" pitchFamily="18" charset="0"/>
+                        </a:rPr>
+                        <a:t>48</a:t>
+                      </a:r>
+                      <a:endParaRPr lang="zh-TW" sz="1700" kern="100">
+                        <a:effectLst/>
+                        <a:latin typeface="Times New Roman" panose="02020603050405020304" pitchFamily="18" charset="0"/>
+                        <a:ea typeface="標楷體" panose="03000509000000000000" pitchFamily="65" charset="-120"/>
+                        <a:cs typeface="Times New Roman" panose="02020603050405020304" pitchFamily="18" charset="0"/>
+                      </a:endParaRPr>
+                    </a:p>
+                  </a:txBody>
+                  <a:tcPr marL="110965" marR="110965" marT="0" marB="0" anchor="ctr"/>
+                </a:tc>
+                <a:extLst>
+                  <a:ext uri="{0D108BD9-81ED-4DB2-BD59-A6C34878D82A}">
+                    <a16:rowId xmlns:a16="http://schemas.microsoft.com/office/drawing/2014/main" val="2802978759"/>
+                  </a:ext>
+                </a:extLst>
+              </a:tr>
+              <a:tr h="295350">
+                <a:tc>
+                  <a:txBody>
+                    <a:bodyPr/>
+                    <a:lstStyle/>
+                    <a:p>
+                      <a:pPr algn="ctr"/>
+                      <a:endParaRPr lang="zh-TW" sz="1700" kern="100">
+                        <a:effectLst/>
+                        <a:latin typeface="Times New Roman" panose="02020603050405020304" pitchFamily="18" charset="0"/>
+                        <a:ea typeface="標楷體" panose="03000509000000000000" pitchFamily="65" charset="-120"/>
+                        <a:cs typeface="Times New Roman" panose="02020603050405020304" pitchFamily="18" charset="0"/>
+                      </a:endParaRPr>
+                    </a:p>
+                  </a:txBody>
+                  <a:tcPr marL="110965" marR="110965" marT="0" marB="0" anchor="ctr"/>
+                </a:tc>
+                <a:tc>
+                  <a:txBody>
+                    <a:bodyPr/>
+                    <a:lstStyle/>
+                    <a:p>
+                      <a:pPr algn="ctr">
+                        <a:lnSpc>
+                          <a:spcPct val="115000"/>
+                        </a:lnSpc>
+                        <a:spcAft>
+                          <a:spcPts val="800"/>
+                        </a:spcAft>
+                      </a:pPr>
+                      <a:r>
+                        <a:rPr lang="en-US" sz="1700" kern="0">
+                          <a:effectLst/>
+                          <a:latin typeface="Times New Roman" panose="02020603050405020304" pitchFamily="18" charset="0"/>
+                          <a:ea typeface="標楷體" panose="03000509000000000000" pitchFamily="65" charset="-120"/>
+                          <a:cs typeface="Times New Roman" panose="02020603050405020304" pitchFamily="18" charset="0"/>
+                        </a:rPr>
+                        <a:t>9300</a:t>
+                      </a:r>
+                      <a:endParaRPr lang="zh-TW" sz="1700" kern="100">
+                        <a:effectLst/>
+                        <a:latin typeface="Times New Roman" panose="02020603050405020304" pitchFamily="18" charset="0"/>
+                        <a:ea typeface="標楷體" panose="03000509000000000000" pitchFamily="65" charset="-120"/>
+                        <a:cs typeface="Times New Roman" panose="02020603050405020304" pitchFamily="18" charset="0"/>
+                      </a:endParaRPr>
+                    </a:p>
+                  </a:txBody>
+                  <a:tcPr marL="110965" marR="110965" marT="0" marB="0" anchor="ctr"/>
+                </a:tc>
+                <a:tc>
+                  <a:txBody>
+                    <a:bodyPr/>
+                    <a:lstStyle/>
+                    <a:p>
+                      <a:pPr algn="ctr">
+                        <a:lnSpc>
+                          <a:spcPct val="115000"/>
+                        </a:lnSpc>
+                        <a:spcAft>
+                          <a:spcPts val="800"/>
+                        </a:spcAft>
+                      </a:pPr>
+                      <a:r>
+                        <a:rPr lang="en-US" sz="1700" kern="0">
+                          <a:effectLst/>
+                          <a:latin typeface="Times New Roman" panose="02020603050405020304" pitchFamily="18" charset="0"/>
+                          <a:ea typeface="標楷體" panose="03000509000000000000" pitchFamily="65" charset="-120"/>
+                          <a:cs typeface="Times New Roman" panose="02020603050405020304" pitchFamily="18" charset="0"/>
+                        </a:rPr>
+                        <a:t>9047</a:t>
+                      </a:r>
+                      <a:endParaRPr lang="zh-TW" sz="1700" kern="100">
+                        <a:effectLst/>
+                        <a:latin typeface="Times New Roman" panose="02020603050405020304" pitchFamily="18" charset="0"/>
+                        <a:ea typeface="標楷體" panose="03000509000000000000" pitchFamily="65" charset="-120"/>
+                        <a:cs typeface="Times New Roman" panose="02020603050405020304" pitchFamily="18" charset="0"/>
+                      </a:endParaRPr>
+                    </a:p>
+                  </a:txBody>
+                  <a:tcPr marL="110965" marR="110965" marT="0" marB="0" anchor="ctr"/>
+                </a:tc>
+                <a:tc>
+                  <a:txBody>
+                    <a:bodyPr/>
+                    <a:lstStyle/>
+                    <a:p>
+                      <a:pPr algn="ctr">
+                        <a:lnSpc>
+                          <a:spcPct val="115000"/>
+                        </a:lnSpc>
+                        <a:spcAft>
+                          <a:spcPts val="800"/>
+                        </a:spcAft>
+                      </a:pPr>
+                      <a:r>
+                        <a:rPr lang="en-US" sz="1700" kern="0">
+                          <a:effectLst/>
+                          <a:latin typeface="Times New Roman" panose="02020603050405020304" pitchFamily="18" charset="0"/>
+                          <a:ea typeface="標楷體" panose="03000509000000000000" pitchFamily="65" charset="-120"/>
+                          <a:cs typeface="Times New Roman" panose="02020603050405020304" pitchFamily="18" charset="0"/>
+                        </a:rPr>
+                        <a:t>253</a:t>
+                      </a:r>
+                      <a:endParaRPr lang="zh-TW" sz="1700" kern="100">
+                        <a:effectLst/>
+                        <a:latin typeface="Times New Roman" panose="02020603050405020304" pitchFamily="18" charset="0"/>
+                        <a:ea typeface="標楷體" panose="03000509000000000000" pitchFamily="65" charset="-120"/>
+                        <a:cs typeface="Times New Roman" panose="02020603050405020304" pitchFamily="18" charset="0"/>
+                      </a:endParaRPr>
+                    </a:p>
+                  </a:txBody>
+                  <a:tcPr marL="110965" marR="110965" marT="0" marB="0" anchor="ctr"/>
+                </a:tc>
+                <a:extLst>
+                  <a:ext uri="{0D108BD9-81ED-4DB2-BD59-A6C34878D82A}">
+                    <a16:rowId xmlns:a16="http://schemas.microsoft.com/office/drawing/2014/main" val="295770251"/>
+                  </a:ext>
+                </a:extLst>
+              </a:tr>
+              <a:tr h="295350">
+                <a:tc>
+                  <a:txBody>
+                    <a:bodyPr/>
+                    <a:lstStyle/>
+                    <a:p>
+                      <a:pPr algn="ctr">
+                        <a:lnSpc>
+                          <a:spcPct val="115000"/>
+                        </a:lnSpc>
+                        <a:spcAft>
+                          <a:spcPts val="800"/>
+                        </a:spcAft>
+                      </a:pPr>
+                      <a:r>
+                        <a:rPr lang="en-US" sz="1700" kern="0">
+                          <a:effectLst/>
+                          <a:latin typeface="Times New Roman" panose="02020603050405020304" pitchFamily="18" charset="0"/>
+                          <a:ea typeface="標楷體" panose="03000509000000000000" pitchFamily="65" charset="-120"/>
+                          <a:cs typeface="Times New Roman" panose="02020603050405020304" pitchFamily="18" charset="0"/>
+                        </a:rPr>
+                        <a:t>2.6</a:t>
+                      </a:r>
+                      <a:endParaRPr lang="zh-TW" sz="1700" kern="100">
+                        <a:effectLst/>
+                        <a:latin typeface="Times New Roman" panose="02020603050405020304" pitchFamily="18" charset="0"/>
+                        <a:ea typeface="標楷體" panose="03000509000000000000" pitchFamily="65" charset="-120"/>
+                        <a:cs typeface="Times New Roman" panose="02020603050405020304" pitchFamily="18" charset="0"/>
+                      </a:endParaRPr>
+                    </a:p>
+                  </a:txBody>
+                  <a:tcPr marL="110965" marR="110965" marT="0" marB="0" anchor="ctr"/>
+                </a:tc>
+                <a:tc>
+                  <a:txBody>
+                    <a:bodyPr/>
+                    <a:lstStyle/>
+                    <a:p>
+                      <a:pPr algn="ctr">
+                        <a:lnSpc>
+                          <a:spcPct val="115000"/>
+                        </a:lnSpc>
+                        <a:spcAft>
+                          <a:spcPts val="800"/>
+                        </a:spcAft>
+                      </a:pPr>
+                      <a:r>
+                        <a:rPr lang="en-US" sz="1700" kern="0">
+                          <a:effectLst/>
+                          <a:latin typeface="Times New Roman" panose="02020603050405020304" pitchFamily="18" charset="0"/>
+                          <a:ea typeface="標楷體" panose="03000509000000000000" pitchFamily="65" charset="-120"/>
+                          <a:cs typeface="Times New Roman" panose="02020603050405020304" pitchFamily="18" charset="0"/>
+                        </a:rPr>
+                        <a:t>5400</a:t>
+                      </a:r>
+                      <a:endParaRPr lang="zh-TW" sz="1700" kern="100">
+                        <a:effectLst/>
+                        <a:latin typeface="Times New Roman" panose="02020603050405020304" pitchFamily="18" charset="0"/>
+                        <a:ea typeface="標楷體" panose="03000509000000000000" pitchFamily="65" charset="-120"/>
+                        <a:cs typeface="Times New Roman" panose="02020603050405020304" pitchFamily="18" charset="0"/>
+                      </a:endParaRPr>
+                    </a:p>
+                  </a:txBody>
+                  <a:tcPr marL="110965" marR="110965" marT="0" marB="0" anchor="ctr"/>
+                </a:tc>
+                <a:tc>
+                  <a:txBody>
+                    <a:bodyPr/>
+                    <a:lstStyle/>
+                    <a:p>
+                      <a:pPr algn="ctr">
+                        <a:lnSpc>
+                          <a:spcPct val="115000"/>
+                        </a:lnSpc>
+                        <a:spcAft>
+                          <a:spcPts val="800"/>
+                        </a:spcAft>
+                      </a:pPr>
+                      <a:r>
+                        <a:rPr lang="en-US" sz="1700" kern="0" dirty="0">
+                          <a:effectLst/>
+                          <a:latin typeface="Times New Roman" panose="02020603050405020304" pitchFamily="18" charset="0"/>
+                          <a:ea typeface="標楷體" panose="03000509000000000000" pitchFamily="65" charset="-120"/>
+                          <a:cs typeface="Times New Roman" panose="02020603050405020304" pitchFamily="18" charset="0"/>
+                        </a:rPr>
+                        <a:t>5404</a:t>
+                      </a:r>
+                      <a:endParaRPr lang="zh-TW" sz="1700" kern="100" dirty="0">
+                        <a:effectLst/>
+                        <a:latin typeface="Times New Roman" panose="02020603050405020304" pitchFamily="18" charset="0"/>
+                        <a:ea typeface="標楷體" panose="03000509000000000000" pitchFamily="65" charset="-120"/>
+                        <a:cs typeface="Times New Roman" panose="02020603050405020304" pitchFamily="18" charset="0"/>
+                      </a:endParaRPr>
+                    </a:p>
+                  </a:txBody>
+                  <a:tcPr marL="110965" marR="110965" marT="0" marB="0" anchor="ctr"/>
+                </a:tc>
+                <a:tc>
+                  <a:txBody>
+                    <a:bodyPr/>
+                    <a:lstStyle/>
+                    <a:p>
+                      <a:pPr algn="ctr">
+                        <a:lnSpc>
+                          <a:spcPct val="115000"/>
+                        </a:lnSpc>
+                        <a:spcAft>
+                          <a:spcPts val="800"/>
+                        </a:spcAft>
+                      </a:pPr>
+                      <a:r>
+                        <a:rPr lang="en-US" altLang="zh-TW" sz="1700" kern="0" dirty="0">
+                          <a:effectLst/>
+                          <a:latin typeface="Times New Roman" panose="02020603050405020304" pitchFamily="18" charset="0"/>
+                          <a:ea typeface="標楷體" panose="03000509000000000000" pitchFamily="65" charset="-120"/>
+                          <a:cs typeface="Times New Roman" panose="02020603050405020304" pitchFamily="18" charset="0"/>
+                        </a:rPr>
+                        <a:t>-4</a:t>
+                      </a:r>
+                      <a:endParaRPr lang="zh-TW" sz="1700" kern="100" dirty="0">
+                        <a:effectLst/>
+                        <a:latin typeface="Times New Roman" panose="02020603050405020304" pitchFamily="18" charset="0"/>
+                        <a:ea typeface="標楷體" panose="03000509000000000000" pitchFamily="65" charset="-120"/>
+                        <a:cs typeface="Times New Roman" panose="02020603050405020304" pitchFamily="18" charset="0"/>
+                      </a:endParaRPr>
+                    </a:p>
+                  </a:txBody>
+                  <a:tcPr marL="110965" marR="110965" marT="0" marB="0" anchor="ctr"/>
+                </a:tc>
+                <a:extLst>
+                  <a:ext uri="{0D108BD9-81ED-4DB2-BD59-A6C34878D82A}">
+                    <a16:rowId xmlns:a16="http://schemas.microsoft.com/office/drawing/2014/main" val="2490794649"/>
+                  </a:ext>
+                </a:extLst>
+              </a:tr>
+              <a:tr h="295350">
+                <a:tc>
+                  <a:txBody>
+                    <a:bodyPr/>
+                    <a:lstStyle/>
+                    <a:p>
+                      <a:pPr algn="ctr"/>
+                      <a:endParaRPr lang="zh-TW" sz="1700" kern="100">
+                        <a:effectLst/>
+                        <a:latin typeface="Times New Roman" panose="02020603050405020304" pitchFamily="18" charset="0"/>
+                        <a:ea typeface="標楷體" panose="03000509000000000000" pitchFamily="65" charset="-120"/>
+                        <a:cs typeface="Times New Roman" panose="02020603050405020304" pitchFamily="18" charset="0"/>
+                      </a:endParaRPr>
+                    </a:p>
+                  </a:txBody>
+                  <a:tcPr marL="110965" marR="110965" marT="0" marB="0" anchor="ctr"/>
+                </a:tc>
+                <a:tc>
+                  <a:txBody>
+                    <a:bodyPr/>
+                    <a:lstStyle/>
+                    <a:p>
+                      <a:pPr algn="ctr">
+                        <a:lnSpc>
+                          <a:spcPct val="115000"/>
+                        </a:lnSpc>
+                        <a:spcAft>
+                          <a:spcPts val="800"/>
+                        </a:spcAft>
+                      </a:pPr>
+                      <a:r>
+                        <a:rPr lang="en-US" sz="1700" kern="0">
+                          <a:effectLst/>
+                          <a:latin typeface="Times New Roman" panose="02020603050405020304" pitchFamily="18" charset="0"/>
+                          <a:ea typeface="標楷體" panose="03000509000000000000" pitchFamily="65" charset="-120"/>
+                          <a:cs typeface="Times New Roman" panose="02020603050405020304" pitchFamily="18" charset="0"/>
+                        </a:rPr>
+                        <a:t>6500</a:t>
+                      </a:r>
+                      <a:endParaRPr lang="zh-TW" sz="1700" kern="100">
+                        <a:effectLst/>
+                        <a:latin typeface="Times New Roman" panose="02020603050405020304" pitchFamily="18" charset="0"/>
+                        <a:ea typeface="標楷體" panose="03000509000000000000" pitchFamily="65" charset="-120"/>
+                        <a:cs typeface="Times New Roman" panose="02020603050405020304" pitchFamily="18" charset="0"/>
+                      </a:endParaRPr>
+                    </a:p>
+                  </a:txBody>
+                  <a:tcPr marL="110965" marR="110965" marT="0" marB="0" anchor="ctr"/>
+                </a:tc>
+                <a:tc>
+                  <a:txBody>
+                    <a:bodyPr/>
+                    <a:lstStyle/>
+                    <a:p>
+                      <a:pPr algn="ctr">
+                        <a:lnSpc>
+                          <a:spcPct val="115000"/>
+                        </a:lnSpc>
+                        <a:spcAft>
+                          <a:spcPts val="800"/>
+                        </a:spcAft>
+                      </a:pPr>
+                      <a:r>
+                        <a:rPr lang="en-US" sz="1700" kern="0">
+                          <a:effectLst/>
+                          <a:latin typeface="Times New Roman" panose="02020603050405020304" pitchFamily="18" charset="0"/>
+                          <a:ea typeface="標楷體" panose="03000509000000000000" pitchFamily="65" charset="-120"/>
+                          <a:cs typeface="Times New Roman" panose="02020603050405020304" pitchFamily="18" charset="0"/>
+                        </a:rPr>
+                        <a:t>6544</a:t>
+                      </a:r>
+                      <a:endParaRPr lang="zh-TW" sz="1700" kern="100">
+                        <a:effectLst/>
+                        <a:latin typeface="Times New Roman" panose="02020603050405020304" pitchFamily="18" charset="0"/>
+                        <a:ea typeface="標楷體" panose="03000509000000000000" pitchFamily="65" charset="-120"/>
+                        <a:cs typeface="Times New Roman" panose="02020603050405020304" pitchFamily="18" charset="0"/>
+                      </a:endParaRPr>
+                    </a:p>
+                  </a:txBody>
+                  <a:tcPr marL="110965" marR="110965" marT="0" marB="0" anchor="ctr"/>
+                </a:tc>
+                <a:tc>
+                  <a:txBody>
+                    <a:bodyPr/>
+                    <a:lstStyle/>
+                    <a:p>
+                      <a:pPr algn="ctr">
+                        <a:lnSpc>
+                          <a:spcPct val="115000"/>
+                        </a:lnSpc>
+                        <a:spcAft>
+                          <a:spcPts val="800"/>
+                        </a:spcAft>
+                      </a:pPr>
+                      <a:r>
+                        <a:rPr lang="en-US" sz="1700" kern="0">
+                          <a:effectLst/>
+                          <a:latin typeface="Times New Roman" panose="02020603050405020304" pitchFamily="18" charset="0"/>
+                          <a:ea typeface="標楷體" panose="03000509000000000000" pitchFamily="65" charset="-120"/>
+                          <a:cs typeface="Times New Roman" panose="02020603050405020304" pitchFamily="18" charset="0"/>
+                        </a:rPr>
+                        <a:t>-44</a:t>
+                      </a:r>
+                      <a:endParaRPr lang="zh-TW" sz="1700" kern="100">
+                        <a:effectLst/>
+                        <a:latin typeface="Times New Roman" panose="02020603050405020304" pitchFamily="18" charset="0"/>
+                        <a:ea typeface="標楷體" panose="03000509000000000000" pitchFamily="65" charset="-120"/>
+                        <a:cs typeface="Times New Roman" panose="02020603050405020304" pitchFamily="18" charset="0"/>
+                      </a:endParaRPr>
+                    </a:p>
+                  </a:txBody>
+                  <a:tcPr marL="110965" marR="110965" marT="0" marB="0" anchor="ctr"/>
+                </a:tc>
+                <a:extLst>
+                  <a:ext uri="{0D108BD9-81ED-4DB2-BD59-A6C34878D82A}">
+                    <a16:rowId xmlns:a16="http://schemas.microsoft.com/office/drawing/2014/main" val="148649462"/>
+                  </a:ext>
+                </a:extLst>
+              </a:tr>
+              <a:tr h="295350">
+                <a:tc>
+                  <a:txBody>
+                    <a:bodyPr/>
+                    <a:lstStyle/>
+                    <a:p>
+                      <a:pPr algn="ctr"/>
+                      <a:endParaRPr lang="zh-TW" sz="1700" kern="100">
+                        <a:effectLst/>
+                        <a:latin typeface="Times New Roman" panose="02020603050405020304" pitchFamily="18" charset="0"/>
+                        <a:ea typeface="標楷體" panose="03000509000000000000" pitchFamily="65" charset="-120"/>
+                        <a:cs typeface="Times New Roman" panose="02020603050405020304" pitchFamily="18" charset="0"/>
+                      </a:endParaRPr>
+                    </a:p>
+                  </a:txBody>
+                  <a:tcPr marL="110965" marR="110965" marT="0" marB="0" anchor="ctr"/>
+                </a:tc>
+                <a:tc>
+                  <a:txBody>
+                    <a:bodyPr/>
+                    <a:lstStyle/>
+                    <a:p>
+                      <a:pPr algn="ctr">
+                        <a:lnSpc>
+                          <a:spcPct val="115000"/>
+                        </a:lnSpc>
+                        <a:spcAft>
+                          <a:spcPts val="800"/>
+                        </a:spcAft>
+                      </a:pPr>
+                      <a:r>
+                        <a:rPr lang="en-US" sz="1700" kern="0">
+                          <a:effectLst/>
+                          <a:latin typeface="Times New Roman" panose="02020603050405020304" pitchFamily="18" charset="0"/>
+                          <a:ea typeface="標楷體" panose="03000509000000000000" pitchFamily="65" charset="-120"/>
+                          <a:cs typeface="Times New Roman" panose="02020603050405020304" pitchFamily="18" charset="0"/>
+                        </a:rPr>
+                        <a:t>9300</a:t>
+                      </a:r>
+                      <a:endParaRPr lang="zh-TW" sz="1700" kern="100">
+                        <a:effectLst/>
+                        <a:latin typeface="Times New Roman" panose="02020603050405020304" pitchFamily="18" charset="0"/>
+                        <a:ea typeface="標楷體" panose="03000509000000000000" pitchFamily="65" charset="-120"/>
+                        <a:cs typeface="Times New Roman" panose="02020603050405020304" pitchFamily="18" charset="0"/>
+                      </a:endParaRPr>
+                    </a:p>
+                  </a:txBody>
+                  <a:tcPr marL="110965" marR="110965" marT="0" marB="0" anchor="ctr"/>
+                </a:tc>
+                <a:tc>
+                  <a:txBody>
+                    <a:bodyPr/>
+                    <a:lstStyle/>
+                    <a:p>
+                      <a:pPr algn="ctr">
+                        <a:lnSpc>
+                          <a:spcPct val="115000"/>
+                        </a:lnSpc>
+                        <a:spcAft>
+                          <a:spcPts val="800"/>
+                        </a:spcAft>
+                      </a:pPr>
+                      <a:r>
+                        <a:rPr lang="en-US" sz="1700" kern="0">
+                          <a:effectLst/>
+                          <a:latin typeface="Times New Roman" panose="02020603050405020304" pitchFamily="18" charset="0"/>
+                          <a:ea typeface="標楷體" panose="03000509000000000000" pitchFamily="65" charset="-120"/>
+                          <a:cs typeface="Times New Roman" panose="02020603050405020304" pitchFamily="18" charset="0"/>
+                        </a:rPr>
+                        <a:t>9048</a:t>
+                      </a:r>
+                      <a:endParaRPr lang="zh-TW" sz="1700" kern="100">
+                        <a:effectLst/>
+                        <a:latin typeface="Times New Roman" panose="02020603050405020304" pitchFamily="18" charset="0"/>
+                        <a:ea typeface="標楷體" panose="03000509000000000000" pitchFamily="65" charset="-120"/>
+                        <a:cs typeface="Times New Roman" panose="02020603050405020304" pitchFamily="18" charset="0"/>
+                      </a:endParaRPr>
+                    </a:p>
+                  </a:txBody>
+                  <a:tcPr marL="110965" marR="110965" marT="0" marB="0" anchor="ctr"/>
+                </a:tc>
+                <a:tc>
+                  <a:txBody>
+                    <a:bodyPr/>
+                    <a:lstStyle/>
+                    <a:p>
+                      <a:pPr algn="ctr">
+                        <a:lnSpc>
+                          <a:spcPct val="115000"/>
+                        </a:lnSpc>
+                        <a:spcAft>
+                          <a:spcPts val="800"/>
+                        </a:spcAft>
+                      </a:pPr>
+                      <a:r>
+                        <a:rPr lang="en-US" sz="1700" kern="0" dirty="0">
+                          <a:effectLst/>
+                          <a:latin typeface="Times New Roman" panose="02020603050405020304" pitchFamily="18" charset="0"/>
+                          <a:ea typeface="標楷體" panose="03000509000000000000" pitchFamily="65" charset="-120"/>
+                          <a:cs typeface="Times New Roman" panose="02020603050405020304" pitchFamily="18" charset="0"/>
+                        </a:rPr>
+                        <a:t>252</a:t>
+                      </a:r>
+                      <a:endParaRPr lang="zh-TW" sz="1700" kern="100" dirty="0">
+                        <a:effectLst/>
+                        <a:latin typeface="Times New Roman" panose="02020603050405020304" pitchFamily="18" charset="0"/>
+                        <a:ea typeface="標楷體" panose="03000509000000000000" pitchFamily="65" charset="-120"/>
+                        <a:cs typeface="Times New Roman" panose="02020603050405020304" pitchFamily="18" charset="0"/>
+                      </a:endParaRPr>
+                    </a:p>
+                  </a:txBody>
+                  <a:tcPr marL="110965" marR="110965" marT="0" marB="0" anchor="ctr"/>
+                </a:tc>
+                <a:extLst>
+                  <a:ext uri="{0D108BD9-81ED-4DB2-BD59-A6C34878D82A}">
+                    <a16:rowId xmlns:a16="http://schemas.microsoft.com/office/drawing/2014/main" val="140765279"/>
+                  </a:ext>
+                </a:extLst>
+              </a:tr>
+            </a:tbl>
+          </a:graphicData>
+        </a:graphic>
+      </p:graphicFrame>
     </p:spTree>
     <p:extLst>
       <p:ext uri="{BB962C8B-B14F-4D97-AF65-F5344CB8AC3E}">
-        <p14:creationId xmlns:p14="http://schemas.microsoft.com/office/powerpoint/2010/main" val="2446612204"/>
+        <p14:creationId xmlns:p14="http://schemas.microsoft.com/office/powerpoint/2010/main" val="2916607448"/>
       </p:ext>
     </p:extLst>
   </p:cSld>

--- a/ICCPROFILE_0929.pptx
+++ b/ICCPROFILE_0929.pptx
@@ -2955,6 +2955,26 @@
           <a:lstStyle/>
           <a:p>
             <a:pPr marL="0" indent="0"/>
+            <a:r>
+              <a:rPr lang="en-US" altLang="zh-TW" dirty="0" err="1"/>
+              <a:t>DisplayCAL</a:t>
+            </a:r>
+            <a:r>
+              <a:rPr lang="en-US" altLang="zh-TW" dirty="0"/>
+              <a:t> </a:t>
+            </a:r>
+            <a:r>
+              <a:rPr lang="zh-TW" altLang="en-US" dirty="0"/>
+              <a:t>無法量測 </a:t>
+            </a:r>
+            <a:r>
+              <a:rPr lang="en-US" altLang="zh-TW" dirty="0"/>
+              <a:t>DICOM</a:t>
+            </a:r>
+            <a:r>
+              <a:rPr lang="zh-TW" altLang="en-US"/>
+              <a:t> 所以並無數據</a:t>
+            </a:r>
             <a:endParaRPr lang="zh-TW" altLang="en-US" dirty="0"/>
           </a:p>
         </p:txBody>
